--- a/ADG/01장/1장_DataGuard개요와아키텍처.pptx
+++ b/ADG/01장/1장_DataGuard개요와아키텍처.pptx
@@ -47,6 +47,18 @@
     <p:sldId id="295" r:id="rId47"/>
     <p:sldId id="296" r:id="rId48"/>
     <p:sldId id="297" r:id="rId49"/>
+    <p:sldId id="298" r:id="rId50"/>
+    <p:sldId id="299" r:id="rId51"/>
+    <p:sldId id="300" r:id="rId52"/>
+    <p:sldId id="301" r:id="rId53"/>
+    <p:sldId id="302" r:id="rId54"/>
+    <p:sldId id="303" r:id="rId55"/>
+    <p:sldId id="304" r:id="rId56"/>
+    <p:sldId id="305" r:id="rId57"/>
+    <p:sldId id="306" r:id="rId58"/>
+    <p:sldId id="307" r:id="rId59"/>
+    <p:sldId id="308" r:id="rId60"/>
+    <p:sldId id="309" r:id="rId61"/>
   </p:sldIdLst>
   <p:sldSz cx="12191695" cy="6858000" type="screen4x3"/>
   <p:notesSz cx="6858000" cy="9144000"/>
@@ -543,7 +555,7 @@
           <a:lstStyle/>
           <a:p>
             <a:r>
-              <a:t>Data Guard를 백업의 확장으로 오해하는 경우가 많습니다. 둘은 막는 사고가 다릅니다. 백업은 사람이 저지른 논리적 오류를 되돌리고, Data Guard는 Primary가 물리적으로 사라지는 사고를 막습니다. 잘못된 DELETE는 리두를 타고 Standby에도 그대로 적용되므로 Standby가 방패가 되지 못합니다. 따라서 Data Guard를 도입해도 백업 주기를 줄여서는 안 된다는 점을 처음부터 분명히 해 두어야 합니다.</a:t>
+              <a:t>다운타임이라고 하면 장애부터 떠올리지만, 실제 운영에서 서비스를 가장 자주 멈추게 하는 것은 분기마다 돌아오는 패치나 장비 교체 같은 계획 정지입니다. Data Guard는 Standby를 먼저 작업하고 역할을 넘기는 방식으로 이 중단 시간을 몇 분 수준으로 줄입니다. 표의 마지막 줄은 일부러 넣었습니다. 잘못된 DELETE는 Primary에서 정상 커밋된 변경이라 Standby에도 몇 초 안에 그대로 적용됩니다. Standby가 있으니 실수도 되돌릴 수 있다고 생각하는 분이 의외로 많습니다.</a:t>
             </a:r>
           </a:p>
         </p:txBody>
@@ -613,7 +625,7 @@
           <a:lstStyle/>
           <a:p>
             <a:r>
-              <a:t>전송 방식의 선택이 곧 보호 모드의 선택입니다. SYNC는 Standby가 받았다는 확인을 기다린 뒤 커밋하므로 무손실에 가깝지만 Primary의 커밋 응답시간이 네트워크 왕복에 묶입니다. ASYNC는 커밋을 기다리지 않으므로 성능 영향이 작은 대신 미전송 리두만큼 손실 가능성이 남습니다. 실습 환경은 ASYNC이며 2장에서 SYNC로 바꿔 차이를 관찰합니다.</a:t>
+              <a:t>동기 전송은 Standby까지의 왕복 시간만큼 커밋이 늦어집니다. 수백 킬로미터 떨어진 재해 복구 센터로 동기 전송을 하면 업무 응답 시간이 눈에 띄게 늘어나죠. Far Sync는 Primary 옆에 데이터 파일 없는 작은 인스턴스를 두고 거기까지만 동기로 보내, 커밋 대기는 짧게 끝내고 먼 곳으로는 비동기로 넘기는 구조입니다. 캐스케이딩도 기본 기능이지만, 받는 즉시 넘기는 실시간 캐스케이딩은 옵션이 필요합니다. 옵션 없이 캐스케이딩을 구성하면 로그 파일이 아카이브된 뒤에야 다음 Standby로 넘어갑니다.</a:t>
             </a:r>
           </a:p>
         </p:txBody>
@@ -683,7 +695,7 @@
           <a:lstStyle/>
           <a:p>
             <a:r>
-              <a:t>실시간 적용과 그렇지 않은 경우의 차이를 미리 언급해 두면 좋습니다. USING CURRENT LOGFILE 절을 주면 standby 리두 로그에 쓰이는 즉시 적용하고, 주지 않으면 아카이브가 완료된 뒤에야 적용합니다. 후자는 지연이 로그 하나 분량만큼 항상 존재하게 됩니다. 이 차이는 7장에서 실제로 관찰합니다. 실시간 적용을 쓰려면 Standby에 standby 리두 로그가 반드시 있어야 하며, 없으면 명령이 거부됩니다. 이 전제는 4장에서 SRL을 만들 때 다시 다룹니다.</a:t>
+              <a:t>세 유형을 한 표로 놓고 보면 선택 기준이 분명해집니다. 장애 대비가 목적이면 Physical, Primary와 다른 구조가 필요하면 Logical, 잠깐 쓰고 버릴 사본이 필요하면 Snapshot입니다. 실무에서는 이 셋을 한 구성에 섞기도 합니다. 재해 복구용 Physical Standby를 두고, 보고용으로 Logical Standby를 하나 더 두는 식입니다. 실습에서는 같은 Standby를 Snapshot으로 바꿨다 되돌리면서 DATABASE_ROLE과 OPEN_MODE가 어떻게 달라지는지 직접 확인합니다.</a:t>
             </a:r>
           </a:p>
         </p:txBody>
@@ -753,7 +765,7 @@
           <a:lstStyle/>
           <a:p>
             <a:r>
-              <a:t>Switchover와 Failover를 혼용하는 경우가 많은데 결과가 다릅니다. Switchover는 원래 Primary가 Standby로 살아남지만, Failover는 실패한 Primary가 구성에서 제거됩니다. 되살리려면 Reinstate 절차가 따로 필요하고 그 전제로 Flashback Database가 켜져 있어야 합니다. Fast-Start Failover는 복구 시간을 크게 줄이지만 오탐지 대비가 함께 필요합니다.</a:t>
+              <a:t>세 서비스 가운데 처음 배우는 분들이 가장 자주 섞는 것이 전송과 적용입니다. 적용을 멈춰 둔 Standby도 전송은 정상이어서, 그 순간 Primary가 사라져도 데이터는 잃지 않습니다. 다만 그 Standby를 Primary로 올리려면 밀린 리두를 전부 적용해야 하니 시간이 오래 걸립니다. 거꾸로 네트워크가 끊겨도 이미 받은 리두는 계속 적용됩니다. 역할 관리 서비스는 이 둘을 이용해 남은 리두를 마저 보내고 적용한 다음 역할을 바꿉니다.</a:t>
             </a:r>
           </a:p>
         </p:txBody>
@@ -823,7 +835,7 @@
           <a:lstStyle/>
           <a:p>
             <a:r>
-              <a:t>Data Guard가 Primary에 주는 부담이 작은 이유가 여기 있습니다. 새로운 저장 계층을 만들지 않고 기존 LGWR과 ARCn 흐름에 전송 경로를 덧붙였기 때문입니다. ASYNC 구성에서는 LGWR이 전송에 거의 관여하지 않고 TTnn 슬레이브가 독립적으로 리두를 읽어 보냅니다. 그래서 Standby가 느리거나 네트워크가 나빠도 Primary의 커밋이 지연되지 않습니다.</a:t>
+              <a:t>SYNC와 ASYNC의 차이는 프로세스 구조에서 드러납니다. SYNC 목적지가 있으면 LGWR가 NSS에 리두를 넘기고 Standby의 확인이 올 때까지 커밋 응답을 미룹니다. 네트워크 지연이 커밋 시간에 그대로 더해집니다. ASYNC는 TT 프로세스가 로그 버퍼나 온라인 리두 로그에서 알아서 읽어 가고, LGWR는 기다리지 않습니다. 인터넷에서 찾은 자료나 오래된 그림에는 LNS라는 이름이 자주 보이는데, 지금 버전에서는 NSS나 TT로 바꿔 읽으면 됩니다.</a:t>
             </a:r>
           </a:p>
         </p:txBody>
@@ -893,7 +905,7 @@
           <a:lstStyle/>
           <a:p>
             <a:r>
-              <a:t>V$PROCESS로도 프로세스 목록은 볼 수 있지만 각 TTnn이 무슨 일을 하는지는 알 수 없습니다. 19c의 V$DATAGUARD_PROCESS는 ROLE 열로 각 프로세스의 실제 임무를 알려 줍니다. 예전부터 쓰던 V$MANAGED_STANDBY는 ARCH·LNS·DGRD 같은 굵은 분류만 주므로, 19c 환경에서는 V$DATAGUARD_PROCESS를 기본으로 쓰는 편이 진단에 훨씬 유리합니다.</a:t>
+              <a:t>Standby에서 RFS 프로세스가 보인다고 적용이 돌고 있다고 판단하면 안 됩니다. RFS는 받기만 하고, 적용은 MRP0가 지휘하고 PR로 시작하는 복구 슬레이브가 실제 블록 작업을 나눠 맡습니다. Physical Standby에는 LSP가 없고 Logical Standby에는 MRP0가 없으니, 프로세스 이름만으로도 Standby 유형을 짐작할 수 있습니다. 실시간 적용은 RFS가 SRL에 쓰는 리두를 MRP0가 로그 전환을 기다리지 않고 바로 읽어 가는 방식이며, 적용 동작은 7장에서 자세히 봅니다.</a:t>
             </a:r>
           </a:p>
         </p:txBody>
@@ -963,7 +975,7 @@
           <a:lstStyle/>
           <a:p>
             <a:r>
-              <a:t>RFS가 여러 개 생기는 이유는 Primary의 전송 프로세스마다 짝이 하나씩 만들어지기 때문입니다. 실측에서 RFS가 세 개였고 각각 리두 본류, 갭 탐지 신호, 아카이브 갭 수신을 담당했습니다. MRP는 이름과 달리 직접 적용하지 않고 조율만 하며, 실제 적용은 PR00이 리두를 병합해 읽고 PR01 이후 슬레이브가 병렬로 수행합니다. 적용 슬레이브의 개수는 Standby의 CPU 수에 따라 결정되므로, 적용이 지속적으로 밀린다면 Standby의 자원 배분도 함께 살펴봐야 합니다.</a:t>
+              <a:t>SRL은 Standby가 Primary의 온라인 리두 로그에 대응해 갖는 수신용 로그입니다. 예전에는 선택 사항처럼 소개됐지만, 지금은 동기 전송도, 실시간 적용도, Far Sync도 SRL 없이는 동작하지 않으니 사실상 필수입니다. Primary에도 SRL을 만들어 두는 이유는 Switchover로 Standby가 되는 순간부터 리두를 받아야 하기 때문입니다. 개수는 스레드마다 온라인 리두 그룹 수보다 하나 많게 잡는 것이 일반 권장이고, 구체적인 산정과 생성은 4장에서 다룹니다.</a:t>
             </a:r>
           </a:p>
         </p:txBody>
@@ -1033,7 +1045,7 @@
           <a:lstStyle/>
           <a:p>
             <a:r>
-              <a:t>이 두 줄을 비교하는 습관이 Data Guard 진단의 기본기입니다. 시퀀스가 같으면 실시간으로 따라가고 있는 것이고, MRP0의 시퀀스가 뒤처지면 적용이 밀리는 것입니다. 시퀀스가 같은데 블록 차이가 크다면 순간적인 부하일 뿐이므로 조치가 필요 없습니다. 7장에서 부하를 걸어 실제로 지연이 생겼다가 회복되는 과정을 관찰합니다. 실무에서는 이 조회를 스크립트로 만들어 주기적으로 남겨 두면, 지연이 언제부터 벌어지기 시작했는지 사후에 추적할 수 있습니다.</a:t>
+              <a:t>설치 가이드나 블로그 글 상당수가 아직 V$MANAGED_STANDBY를 씁니다. 19c에서도 조회는 되지만 디프리케이트 상태라 언제 빠질지 모릅니다. 새 뷰는 프로세스 이름 옆에 역할 이름을 보여 주어 TT02가 무엇을 하는 프로세스인지 알아볼 수 있고, 같은 뷰를 Primary와 Standby 양쪽에서 조회할 수 있습니다. 실습 02에서 이 뷰로 Primary의 전송 프로세스와 Standby의 RFS를 짝지어 보는데, 두 노드의 출력을 나란히 놓고 보면 리두가 흘러가는 길이 그대로 보입니다.</a:t>
             </a:r>
           </a:p>
         </p:txBody>
@@ -1103,7 +1115,7 @@
           <a:lstStyle/>
           <a:p>
             <a:r>
-              <a:t>CLIENT_ROLE은 19c에서 특히 유용한 열입니다. Standby의 각 rfs가 Primary의 어느 프로세스와 짝을 이루는지 알려 주기 때문에, 양쪽 조회 결과를 문자열로 맞추면 리두가 어느 경로로 흘러오는지 그림이 완성됩니다. 전송이 끊겼을 때 어느 경로가 죽었는지 특정하는 데 직접 쓰이므로 15장 문제 해결에서 다시 활용합니다. 반대로 Primary 쪽에서만 보면 보냈다는 사실까지만 알 수 있고 상대가 받았는지는 알 수 없으므로, 양쪽을 함께 보는 습관이 중요합니다.</a:t>
+              <a:t>네트워크가 잠깐 끊겼다 돌아오는 일은 생각보다 흔합니다. 그때마다 관리자가 빠진 로그를 찾아 복사해야 한다면 운영이 불가능하겠죠. Data Guard는 Primary와 Standby 양쪽에서 빈 구간을 찾아 자동으로 채웁니다. 단 하나의 조건은 원본 아카이브 로그가 Primary에 남아 있어야 한다는 것입니다. 백업 스크립트가 아카이브 로그를 백업하고 바로 지우도록 짜여 있으면 갭을 메울 원본이 사라집니다. RMAN 삭제 정책을 Standby 적용 이후로 맞춰 둡니다.</a:t>
             </a:r>
           </a:p>
         </p:txBody>
@@ -1173,7 +1185,7 @@
           <a:lstStyle/>
           <a:p>
             <a:r>
-              <a:t>이 자동화가 Data Guard 운영을 가볍게 만드는 가장 큰 요소입니다. 네트워크가 잠시 끊겨도 DBA가 아무것도 하지 않아도 동기화가 회복됩니다. 다만 무조건은 아닙니다. Primary의 아카이브 로그를 공격적으로 삭제하는 정책을 쓰고 있다면 자동 해소가 실패할 수 있으므로, FRA 보존 정책과 Standby 적용 상태를 함께 고려해 삭제 정책을 세워야 합니다.</a:t>
+              <a:t>세 모드는 Standby에 리두를 쓰지 못할 때 Primary가 어떻게 행동하느냐로 갈립니다. Protection은 데이터 손실 가능성을 만들지 않으려고 Primary를 멈추고, Availability는 업무를 계속하면서 연결이 돌아오면 다시 동기화합니다. Performance는 처음부터 기다리지 않습니다. 기본값은 Performance입니다. 아무 설정 없이 구성하면 장애 순간의 마지막 몇 초는 잃을 수 있는 상태로 운영하게 됩니다. 업무와 합의한 RPO가 0이라면 이 기본값을 바꿔야 합니다.</a:t>
             </a:r>
           </a:p>
         </p:txBody>
@@ -1243,7 +1255,7 @@
           <a:lstStyle/>
           <a:p>
             <a:r>
-              <a:t>Maximum Protection은 도입에 신중해야 합니다. 무손실 보장을 지키기 위해 가용성을 희생하는 선택이라, 네트워크 문제나 Standby 장애 하나가 Primary 정지로 직결됩니다. 무손실이 계약상 요구되는 경우가 아니라면 Maximum Availability가 현실적인 절충이며, 이 경우에도 Standby를 둘 이상 두어 단일 장애점을 없애는 편이 안전합니다.</a:t>
+              <a:t>Switchover는 Primary가 살아 있어야 할 수 있습니다. 남은 리두를 끝까지 보내고 적용한 뒤 역할을 맞바꾸기 때문입니다. 패치나 장비 교체처럼 미리 계획한 작업에 쓰고, 끝나면 같은 방법으로 되돌립니다. Failover는 Primary를 포기하는 결정입니다. 명령은 승격할 Standby에서 내고, 버려진 원래 Primary는 Flashback Database가 켜져 있었다면 reinstate로 Standby로 되살릴 수 있습니다. 꺼져 있었다면 백업으로 Standby를 다시 만들어야 하니, Flashback은 Data Guard 구성 초기에 켜 두는 편이 좋습니다.</a:t>
             </a:r>
           </a:p>
         </p:txBody>
@@ -1313,7 +1325,7 @@
           <a:lstStyle/>
           <a:p>
             <a:r>
-              <a:t>30이라는 숫자는 임의로 정해진 값이 아니라 파라미터 구조에서 나옵니다. 12c 이후 LOG_ARCHIVE_DEST_n 목적지가 최대 31개이고 그중 하나를 로컬 아카이브가 쓰기 때문에 원격 목적지로 30개가 남습니다. 실무에서 30개를 다 채우는 경우는 거의 없지만, 이 숫자의 출처를 알아 두면 목적지 번호를 배정할 때 혼란이 줄어듭니다. 또한 Standby가 늘어나면 Primary의 전송 프로세스와 네트워크 부담도 함께 늘어나므로, 개수보다 배치 위치와 보호 모드 조합을 먼저 설계하는 것이 실무의 순서입니다.</a:t>
+              <a:t>백업에서 복원하는 방식도 아카이브 로그만 잘 남아 있으면 데이터는 거의 잃지 않습니다. 문제는 시간입니다. 수 테라바이트 데이터베이스를 복원하고 복구하는 데는 몇 시간이 걸리고, 그동안 업무는 멈춰 있습니다. Data Guard는 복원과 적용이 이미 끝난 사본을 늘 들고 있어 그 시간을 없애 줍니다. 대신 데이터 손실은 리두를 동기로 보내느냐 비동기로 보내느냐에 달려 있습니다. 실무에서는 업무 부서와 RPO, RTO 숫자부터 정해야 보호 모드와 자동 Failover 여부를 결정할 근거가 생깁니다.</a:t>
             </a:r>
           </a:p>
         </p:txBody>
@@ -1383,7 +1395,7 @@
           <a:lstStyle/>
           <a:p>
             <a:r>
-              <a:t>이 두 열의 차이를 아는 것만으로도 진단이 빨라집니다. 구성을 인수받아 처음 볼 때 두 값이 어긋나 있다면 설정 문제가 아니라 현재 전송에 문제가 있다는 뜻입니다. RESYNCHRONIZATION 같은 값이 보이면 갭을 메우는 중이라는 신호입니다. 2장에서 전송을 일부러 끊어 이 값이 어떻게 변하는지 재현합니다. 두 값이 어긋난 상태가 오래 지속되면 보호 수준이 설계와 다르게 운영되고 있다는 뜻이므로, 경보 대상으로 삼아 두는 것이 좋습니다. Broker를 쓰면 SHOW CONFIGURATION의 상태 문구로도 같은 신호를 읽을 수 있습니다.</a:t>
+              <a:t>새벽 세 시에 장애가 나면 담당자가 일어나 상황을 파악하고 Failover를 결정하기까지 수십 분이 걸립니다. Fast-Start Failover는 이 판단을 옵저버라는 감시 프로세스에 맡깁니다. 옵저버를 Primary나 Standby와 같은 서버에 두면 의미가 없습니다. 네트워크 일부만 끊긴 상황에서 두 데이터베이스가 동시에 Primary가 되는 일을 막으려면, 옵저버와 Standby가 함께 Primary를 잃었다고 판단할 때만 Failover하도록 제3자 위치에 있어야 합니다. 설정은 16장에서 실습합니다.</a:t>
             </a:r>
           </a:p>
         </p:txBody>
@@ -1453,7 +1465,7 @@
           <a:lstStyle/>
           <a:p>
             <a:r>
-              <a:t>세 번째 항목이 실무 도입 논거로 가장 자주 쓰입니다. 재해 대비만을 위해 동일한 사양의 장비를 놀리는 것은 예산 설득이 어렵지만, 그 장비가 평소 리포팅 부하를 나눠 진다면 이야기가 달라집니다. 다만 Standby를 열어 조회에 쓰려면 Active Data Guard 옵션이 필요하다는 점을 예산 단계에서 분명히 해 두지 않으면 나중에 문제가 됩니다. 나머지 네 항목도 각각 근거 자료로 쓸 수 있으니, 도입 제안서를 쓸 때 이 다섯 가지를 축으로 정리하면 설득력이 높아집니다.</a:t>
+              <a:t>데이터베이스 쪽 전환은 몇 분 만에 끝났는데 애플리케이션이 한 시간 넘게 접속하지 못하는 일이 실제로 자주 일어납니다. 접속 문자열에 Primary 서버 주소만 적혀 있었기 때문입니다. 역할 기반 서비스를 만들어 두면 전환 뒤 새 Primary에서 같은 이름의 서비스가 올라오고, 접속 기술자에 두 주소를 모두 적어 두면 클라이언트가 알아서 살아 있는 쪽을 찾습니다. 이 준비는 Data Guard 구성과 별도로 애플리케이션 담당자와 함께 해야 하므로 일정에 미리 넣어 둡니다.</a:t>
             </a:r>
           </a:p>
         </p:txBody>
@@ -1523,7 +1535,7 @@
           <a:lstStyle/>
           <a:p>
             <a:r>
-              <a:t>"다를 수 있다"와 "달라도 문제없다"는 다릅니다. 오라클이 혼합 플랫폼을 지원한다고 문서에 적어 두었지만 지원 조합은 두 MOS 문서로 엄격히 제한됩니다. 실제 구축 전에 반드시 확인해야 하며, 확인하지 않고 진행했다가 DUPLICATE 단계에서 막히는 사례가 드물지 않습니다. 학습 환경에서는 양쪽을 동일하게 맞추는 것이 안전합니다. 반대로 하드웨어 사양이 달라도 된다는 점은 적극적으로 활용할 만합니다. Standby를 Primary보다 낮은 사양으로 두는 구성도 가능하지만, 그만큼 적용이 밀릴 수 있다는 점은 감안해야 합니다.</a:t>
+              <a:t>이 사례에서 판단의 축은 부품 교체 네 시간을 업무가 견딜 수 있느냐입니다. 견딜 수 없다면 Failover 외에는 길이 없습니다. 결정하기 전에 확인할 숫자는 두 개입니다. transport lag는 지금 넘어가면 얼마만큼의 데이터를 잃는지, apply lag는 Failover가 끝나기까지 얼마나 걸리는지를 알려 줍니다. 평소에 이 두 값을 감시하고 기록해 두었다면 그 자리에서 판단할 수 있습니다. 수리가 끝난 원래 Primary를 어떻게 되살리느냐는 Flashback Database 설정 여부가 정합니다.</a:t>
             </a:r>
           </a:p>
         </p:txBody>
@@ -1593,7 +1605,7 @@
           <a:lstStyle/>
           <a:p>
             <a:r>
-              <a:t>릴리스 일치는 19.3과 19.8을 다른 릴리스로 본다는 뜻입니다. 패치 적용 순서를 잘못 잡아 한쪽만 올렸다가 구성이 깨지는 사고가 흔합니다. Data Guard 환경의 패치는 항상 순서를 정해 두고 진행해야 합니다. ASM과 OMF의 대칭 사용도 마찬가지로, 한쪽만 OMF인 구성은 파일 경로 관리가 복잡해져 나중에 문제를 만듭니다. 릴리스 일치는 구축 시점뿐 아니라 운영 내내 지켜야 하는 조건이므로, 패치 계획 자체를 Data Guard 구성 단위로 세우는 것이 안전합니다.</a:t>
+              <a:t>Broker는 SQL과 파라미터로 하던 일을 대신 해 주는 관리 계층입니다. 각 인스턴스에서 DMON 프로세스가 돌며 서로 통신하고, 구성 정보는 데이터베이스마다 두 개씩 있는 구성 파일에 저장됩니다. 두 개를 두는 이유는 한쪽을 쓰는 동안 다른 쪽이 직전 상태를 보관하기 위해서입니다. Broker를 쓰면 전송 목적지나 보호 모드를 속성으로 지정하고, Broker가 그에 맞춰 LOG_ARCHIVE_DEST_n 같은 파라미터를 직접 설정합니다. 이 관계를 알아야 13장 이후 내용이 자연스럽게 연결됩니다.</a:t>
             </a:r>
           </a:p>
         </p:txBody>
@@ -1663,7 +1675,7 @@
           <a:lstStyle/>
           <a:p>
             <a:r>
-              <a:t>점검표에서 가장 중요한 것은 "무엇이 맞아야 하고 무엇은 달라도 되는가"를 구분하는 일입니다. SESSIONTIMEZONE이 다르다고 문제 삼거나, 반대로 DB_UNIQUE_NAME을 같게 맞추려다 구성이 안 되는 일이 실제로 있습니다. 엔디안 확인은 V$DATABASE와 V$TRANSPORTABLE_PLATFORM을 platform_name으로 조인하면 한 줄로 끝난다는 점도 기억해 두십시오.</a:t>
+              <a:t>DGMGRL에서 SWITCHOVER TO boston 한 줄이면 끝나는 작업을 SQL로만 하려면 양쪽 데이터베이스를 오가며 명령 여러 개와 재기동을 순서대로 실행해야 합니다. 그런데도 이 과정이 SQL부터 시작하는 이유는 Broker가 내놓는 경고를 해석하려면 그 밑에서 어떤 파라미터와 프로세스가 움직이는지 알아야 하기 때문입니다. Enterprise Manager는 화면으로 보기 편하지만 Cloud Control 설치가 전제여서 이 과정에서는 개념만 소개하고, 실습은 모두 DGMGRL과 SQL로 진행합니다.</a:t>
             </a:r>
           </a:p>
         </p:txBody>
@@ -1733,7 +1745,7 @@
           <a:lstStyle/>
           <a:p>
             <a:r>
-              <a:t>이 과정의 이름에는 Active Data Guard가 들어가지만 내용의 대부분은 Enterprise Edition 기본 기능으로 실습할 수 있습니다. 옵션이 필요한 것은 9장과 10장뿐이며, 두 장에는 옵션 없이 같은 목적을 달성하는 대안 경로를 함께 실었습니다. 옵션을 보유하지 않은 환경이라면 Standby를 MOUNT 상태로 두면 나머지 실습은 그대로 진행됩니다.</a:t>
+              <a:t>Broker를 도입한 뒤에도 습관처럼 ALTER SYSTEM으로 전송 파라미터를 고치는 경우가 있습니다. 그러면 Broker 구성 파일에 저장된 속성과 실제 파라미터가 어긋나고, Broker는 다음 점검이나 재기동 때 자기 값으로 덮어쓰거나 불일치 경고를 냅니다. 고친 줄 알았던 설정이 재기동 후 원래대로 돌아가 있는 일이 이렇게 생깁니다. Broker 구성에서는 설정 변경은 DGMGRL의 EDIT 명령으로, SQL은 조회에만 쓰도록 팀 규칙으로 정해 두는 것이 안전합니다.</a:t>
             </a:r>
           </a:p>
         </p:txBody>
@@ -1803,7 +1815,7 @@
           <a:lstStyle/>
           <a:p>
             <a:r>
-              <a:t>실습 03에서 직접 겪는 흐름입니다. 멀티테넌트 환경에서 DBA_ 뷰가 비어 있으면 CDB_ 뷰를 의심하라는 것이 첫 번째 교훈이고, 두 번째는 그렇게 찾아낸 값조차 판정 근거가 되지 못한다는 것입니다. 수집이 MMON의 주간 샘플링에 의존하는 데다 Real-Time Query는 Standby에서 일어나는 사건인데 읽기 전용 Standby는 자기 딕셔너리를 갱신할 수 없기 때문입니다.</a:t>
+              <a:t>Data Guard와 Active Data Guard는 이름이 비슷해 같은 것처럼 쓰이지만, 하나는 Enterprise Edition에 들어 있는 기능이고 다른 하나는 따로 사는 옵션입니다. 판단 기준은 적용을 계속하면서 Standby를 열어 두느냐 하나입니다. 적용을 멈추고 READ ONLY로 여는 것은 기본 기능이지만, 적용 중인 Standby를 열면 옵션 사용입니다. DBMS_ROLLING을 쓴 롤링 업그레이드도 옵션 쪽입니다. 클라우드 상품 일부에는 옵션이 포함돼 있지만 온프레미스 19c는 별도 계약이 필요합니다.</a:t>
             </a:r>
           </a:p>
         </p:txBody>
@@ -1873,7 +1885,7 @@
           <a:lstStyle/>
           <a:p>
             <a:r>
-              <a:t>V$OPTION을 라이선스 근거로 오해하는 경우가 많습니다. Enterprise Edition을 설치하면 대부분의 옵션이 TRUE로 나타나며, 이는 기술적으로 사용 가능하다는 뜻일 뿐입니다. 기술적 가용성과 계약상 사용 권한은 별개이며, 이 구분은 Tuning 과정의 Diagnostics Pack에서 적용한 원칙과 같습니다. 라이선스 실사에 대비한다면 Standby의 OPEN_MODE를 시각과 함께 기록해 두는 것이 실용적입니다.</a:t>
+              <a:t>옵션 구매를 검토하는 자리에서는 어떤 업무 문제를 해결하려는지부터 물어야 합니다. 가장 흔한 동기는 보고서 조회를 Primary에서 떼어 내는 것이고, 그다음이 원거리 무손실 보호를 위한 Far Sync입니다. DML 리다이렉션은 19c에서 추가된 기능으로, Standby에 붙은 세션이 가끔 쓰기를 하면 그 DML을 Primary로 넘겨 실행해 줍니다. 쓰기가 잦은 애플리케이션을 Standby로 옮기는 용도는 아닙니다. 각 기능은 9장과 10장에서 직접 사용해 봅니다.</a:t>
             </a:r>
           </a:p>
         </p:txBody>
@@ -1943,7 +1955,77 @@
           <a:lstStyle/>
           <a:p>
             <a:r>
-              <a:t>순서를 이렇게 잡은 데는 이유가 있습니다. Broker는 여러 노드에 걸친 파라미터 조정을 알아서 처리해 주므로 편리하지만, 문제가 생겼을 때 원인을 찾으려면 Broker가 감춰 둔 파라미터와 프로세스를 직접 들여다봐야 합니다. 손으로 먼저 해 본 사람은 Broker의 출력에서 무엇이 잘못됐는지 바로 읽어 낼 수 있습니다. 또한 Broker를 도입한 뒤에도 SQL로 설정한 파라미터가 Broker 속성과 어긋나면 경고가 발생하므로, 두 방식을 섞어 쓰지 않는 원칙을 정해 두어야 합니다. 15장에서 그 진단 방법을 다룹니다.</a:t>
+              <a:t>오라클은 옵션 기능을 라이선스 키로 막아 두지 않습니다. 적용을 멈추고 Standby를 연 다음 적용을 다시 켜는 평범한 순서만으로 Real-Time Query가 됩니다. 장애 대응 중에 Standby 데이터를 확인하려고 이렇게 했다가 그대로 두는 경우가 대표적입니다. 옵션이 없는 사이트라면 Standby 기동 스크립트를 STARTUP MOUNT와 적용 기동으로 고정해 두고, 담당자가 바뀌어도 알 수 있게 운영 문서 첫 장에 보유 여부를 적어 둡니다. 조회 요구가 들어오면 Snapshot Standby나 적용 중지 상태의 조회로 대신합니다.</a:t>
+            </a:r>
+          </a:p>
+        </p:txBody>
+      </p:sp>
+      <p:sp>
+        <p:nvSpPr>
+          <p:cNvPr id="4" name="Slide Number Placeholder 3"/>
+          <p:cNvSpPr>
+            <a:spLocks noGrp="1"/>
+          </p:cNvSpPr>
+          <p:nvPr>
+            <p:ph type="sldNum" idx="5" sz="quarter"/>
+          </p:nvPr>
+        </p:nvSpPr>
+        <p:spPr/>
+      </p:sp>
+    </p:spTree>
+  </p:cSld>
+  <p:clrMapOvr>
+    <a:masterClrMapping/>
+  </p:clrMapOvr>
+</p:notes>
+</file>
+
+<file path=ppt/notesSlides/notesSlide29.xml><?xml version="1.0" encoding="utf-8"?>
+<p:notes xmlns:a="http://schemas.openxmlformats.org/drawingml/2006/main" xmlns:p="http://schemas.openxmlformats.org/presentationml/2006/main" xmlns:r="http://schemas.openxmlformats.org/officeDocument/2006/relationships">
+  <p:cSld>
+    <p:spTree>
+      <p:nvGrpSpPr>
+        <p:cNvPr id="1" name=""/>
+        <p:cNvGrpSpPr/>
+        <p:nvPr/>
+      </p:nvGrpSpPr>
+      <p:grpSpPr>
+        <a:xfrm>
+          <a:off x="0" y="0"/>
+          <a:ext cx="0" cy="0"/>
+          <a:chOff x="0" y="0"/>
+          <a:chExt cx="0" cy="0"/>
+        </a:xfrm>
+      </p:grpSpPr>
+      <p:sp>
+        <p:nvSpPr>
+          <p:cNvPr id="2" name="Slide Image Placeholder 1"/>
+          <p:cNvSpPr>
+            <a:spLocks noGrp="1"/>
+          </p:cNvSpPr>
+          <p:nvPr>
+            <p:ph type="sldImg" idx="2"/>
+          </p:nvPr>
+        </p:nvSpPr>
+        <p:spPr/>
+      </p:sp>
+      <p:sp>
+        <p:nvSpPr>
+          <p:cNvPr id="3" name="Notes Placeholder 2"/>
+          <p:cNvSpPr>
+            <a:spLocks noGrp="1"/>
+          </p:cNvSpPr>
+          <p:nvPr>
+            <p:ph type="body" idx="3" sz="quarter"/>
+          </p:nvPr>
+        </p:nvSpPr>
+        <p:spPr/>
+        <p:txBody>
+          <a:bodyPr/>
+          <a:lstStyle/>
+          <a:p>
+            <a:r>
+              <a:t>기능 사용 이력 뷰는 MMON이 주기적으로 샘플링해 기록합니다. 그런데 읽기 전용으로 열린 Standby는 자기 딕셔너리에 아무것도 쓸 수 없으니, 실제로 Real-Time Query를 쓰고 있어도 값이 올라가지 않는 경우가 있습니다. 멀티테넌트 환경에서는 CDB$ROOT의 DBA_ 뷰가 비어 보이기도 합니다. 실사 대비 기록은 양쪽의 버전 배너, Standby의 OPEN_MODE, 사용 이력 뷰를 함께 남기는 방식이 무난합니다. 실습 03에서 이 한계를 직접 확인합니다.</a:t>
             </a:r>
           </a:p>
         </p:txBody>
@@ -2013,7 +2095,637 @@
           <a:lstStyle/>
           <a:p>
             <a:r>
-              <a:t>이 슬라이드가 이 장의 출발점입니다. 같은 조회를 두 노드에서 실행했을 때 무엇이 같고 무엇이 다른지가 Data Guard의 성질을 그대로 보여 줍니다. 특히 DB_NAME이 같다는 사실 때문에 접속한 노드를 착각하기 쉽습니다. 전송 목적지 지정, Broker 등록, 로그 판독의 기준 이름은 모두 DB_UNIQUE_NAME이라는 점을 반복해서 강조해 주십시오.</a:t>
+              <a:t>다른 복제 제품과 비교할 때 가장 먼저 꼽을 특징은 데이터베이스가 원래 만들던 리두를 그대로 쓴다는 것입니다. 트리거나 별도 캡처 프로세스가 없으니 Primary에 더해지는 부담이 작고, 리두에 기록되는 변경이라면 무엇이든 Standby에 반영됩니다. 대기 서버 활용 항목은 조금 조심해서 말해야 합니다. 백업을 Standby에서 받는 것은 기본 기능이지만, 적용 중인 Standby에서 조회를 받는 것은 Active Data Guard 옵션이 필요합니다. 이 차이는 1.7절에서 따로 정리합니다.</a:t>
+            </a:r>
+          </a:p>
+        </p:txBody>
+      </p:sp>
+      <p:sp>
+        <p:nvSpPr>
+          <p:cNvPr id="4" name="Slide Number Placeholder 3"/>
+          <p:cNvSpPr>
+            <a:spLocks noGrp="1"/>
+          </p:cNvSpPr>
+          <p:nvPr>
+            <p:ph type="sldNum" idx="5" sz="quarter"/>
+          </p:nvPr>
+        </p:nvSpPr>
+        <p:spPr/>
+      </p:sp>
+    </p:spTree>
+  </p:cSld>
+  <p:clrMapOvr>
+    <a:masterClrMapping/>
+  </p:clrMapOvr>
+</p:notes>
+</file>
+
+<file path=ppt/notesSlides/notesSlide30.xml><?xml version="1.0" encoding="utf-8"?>
+<p:notes xmlns:a="http://schemas.openxmlformats.org/drawingml/2006/main" xmlns:p="http://schemas.openxmlformats.org/presentationml/2006/main" xmlns:r="http://schemas.openxmlformats.org/officeDocument/2006/relationships">
+  <p:cSld>
+    <p:spTree>
+      <p:nvGrpSpPr>
+        <p:cNvPr id="1" name=""/>
+        <p:cNvGrpSpPr/>
+        <p:nvPr/>
+      </p:nvGrpSpPr>
+      <p:grpSpPr>
+        <a:xfrm>
+          <a:off x="0" y="0"/>
+          <a:ext cx="0" cy="0"/>
+          <a:chOff x="0" y="0"/>
+          <a:chExt cx="0" cy="0"/>
+        </a:xfrm>
+      </p:grpSpPr>
+      <p:sp>
+        <p:nvSpPr>
+          <p:cNvPr id="2" name="Slide Image Placeholder 1"/>
+          <p:cNvSpPr>
+            <a:spLocks noGrp="1"/>
+          </p:cNvSpPr>
+          <p:nvPr>
+            <p:ph type="sldImg" idx="2"/>
+          </p:nvPr>
+        </p:nvSpPr>
+        <p:spPr/>
+      </p:sp>
+      <p:sp>
+        <p:nvSpPr>
+          <p:cNvPr id="3" name="Notes Placeholder 2"/>
+          <p:cNvSpPr>
+            <a:spLocks noGrp="1"/>
+          </p:cNvSpPr>
+          <p:nvPr>
+            <p:ph type="body" idx="3" sz="quarter"/>
+          </p:nvPr>
+        </p:nvSpPr>
+        <p:spPr/>
+        <p:txBody>
+          <a:bodyPr/>
+          <a:lstStyle/>
+          <a:p>
+            <a:r>
+              <a:t>Standard Edition 고객이 Data Guard를 쓰고 싶다고 하면 답은 에디션 업그레이드뿐입니다. 아카이브 로그를 스크립트로 복사해 적용하는 수동 Standby를 만들 수는 있지만 Data Guard의 자동 전송, 갭 해소, Broker는 쓸 수 없습니다. 릴리스는 같아야 하고, 실무에서는 Release Update 수준까지 맞춥니다. 패치할 때는 Standby를 먼저 패치하고 Switchover한 뒤 원래 Primary를 패치하는 순서를 많이 쓰는데, 이 방식이 Data Guard로 계획 정지를 줄이는 대표적인 예입니다.</a:t>
+            </a:r>
+          </a:p>
+        </p:txBody>
+      </p:sp>
+      <p:sp>
+        <p:nvSpPr>
+          <p:cNvPr id="4" name="Slide Number Placeholder 3"/>
+          <p:cNvSpPr>
+            <a:spLocks noGrp="1"/>
+          </p:cNvSpPr>
+          <p:nvPr>
+            <p:ph type="sldNum" idx="5" sz="quarter"/>
+          </p:nvPr>
+        </p:nvSpPr>
+        <p:spPr/>
+      </p:sp>
+    </p:spTree>
+  </p:cSld>
+  <p:clrMapOvr>
+    <a:masterClrMapping/>
+  </p:clrMapOvr>
+</p:notes>
+</file>
+
+<file path=ppt/notesSlides/notesSlide31.xml><?xml version="1.0" encoding="utf-8"?>
+<p:notes xmlns:a="http://schemas.openxmlformats.org/drawingml/2006/main" xmlns:p="http://schemas.openxmlformats.org/presentationml/2006/main" xmlns:r="http://schemas.openxmlformats.org/officeDocument/2006/relationships">
+  <p:cSld>
+    <p:spTree>
+      <p:nvGrpSpPr>
+        <p:cNvPr id="1" name=""/>
+        <p:cNvGrpSpPr/>
+        <p:nvPr/>
+      </p:nvGrpSpPr>
+      <p:grpSpPr>
+        <a:xfrm>
+          <a:off x="0" y="0"/>
+          <a:ext cx="0" cy="0"/>
+          <a:chOff x="0" y="0"/>
+          <a:chExt cx="0" cy="0"/>
+        </a:xfrm>
+      </p:grpSpPr>
+      <p:sp>
+        <p:nvSpPr>
+          <p:cNvPr id="2" name="Slide Image Placeholder 1"/>
+          <p:cNvSpPr>
+            <a:spLocks noGrp="1"/>
+          </p:cNvSpPr>
+          <p:nvPr>
+            <p:ph type="sldImg" idx="2"/>
+          </p:nvPr>
+        </p:nvSpPr>
+        <p:spPr/>
+      </p:sp>
+      <p:sp>
+        <p:nvSpPr>
+          <p:cNvPr id="3" name="Notes Placeholder 2"/>
+          <p:cNvSpPr>
+            <a:spLocks noGrp="1"/>
+          </p:cNvSpPr>
+          <p:nvPr>
+            <p:ph type="body" idx="3" sz="quarter"/>
+          </p:nvPr>
+        </p:nvSpPr>
+        <p:spPr/>
+        <p:txBody>
+          <a:bodyPr/>
+          <a:lstStyle/>
+          <a:p>
+            <a:r>
+              <a:t>비용을 아끼려고 Standby 서버를 Primary보다 훨씬 작게 잡는 경우가 있습니다. 평소에는 적용만 하니 괜찮아 보이지만, 야간 배치처럼 리두가 몰리는 시간에는 적용이 밀리고, Failover 뒤에는 그 작은 서버가 모든 업무를 받아야 합니다. 운영체제나 CPU 아키텍처가 다른 혼합 구성은 몇 가지 조합만 허용되므로 반드시 My Oracle Support 문서로 확인합니다. 같은 서버에 Primary와 Standby를 함께 두는 구성은 서버 장애에 아무 도움이 되지 않으니 학습용으로만 씁니다.</a:t>
+            </a:r>
+          </a:p>
+        </p:txBody>
+      </p:sp>
+      <p:sp>
+        <p:nvSpPr>
+          <p:cNvPr id="4" name="Slide Number Placeholder 3"/>
+          <p:cNvSpPr>
+            <a:spLocks noGrp="1"/>
+          </p:cNvSpPr>
+          <p:nvPr>
+            <p:ph type="sldNum" idx="5" sz="quarter"/>
+          </p:nvPr>
+        </p:nvSpPr>
+        <p:spPr/>
+      </p:sp>
+    </p:spTree>
+  </p:cSld>
+  <p:clrMapOvr>
+    <a:masterClrMapping/>
+  </p:clrMapOvr>
+</p:notes>
+</file>
+
+<file path=ppt/notesSlides/notesSlide32.xml><?xml version="1.0" encoding="utf-8"?>
+<p:notes xmlns:a="http://schemas.openxmlformats.org/drawingml/2006/main" xmlns:p="http://schemas.openxmlformats.org/presentationml/2006/main" xmlns:r="http://schemas.openxmlformats.org/officeDocument/2006/relationships">
+  <p:cSld>
+    <p:spTree>
+      <p:nvGrpSpPr>
+        <p:cNvPr id="1" name=""/>
+        <p:cNvGrpSpPr/>
+        <p:nvPr/>
+      </p:nvGrpSpPr>
+      <p:grpSpPr>
+        <a:xfrm>
+          <a:off x="0" y="0"/>
+          <a:ext cx="0" cy="0"/>
+          <a:chOff x="0" y="0"/>
+          <a:chExt cx="0" cy="0"/>
+        </a:xfrm>
+      </p:grpSpPr>
+      <p:sp>
+        <p:nvSpPr>
+          <p:cNvPr id="2" name="Slide Image Placeholder 1"/>
+          <p:cNvSpPr>
+            <a:spLocks noGrp="1"/>
+          </p:cNvSpPr>
+          <p:nvPr>
+            <p:ph type="sldImg" idx="2"/>
+          </p:nvPr>
+        </p:nvSpPr>
+        <p:spPr/>
+      </p:sp>
+      <p:sp>
+        <p:nvSpPr>
+          <p:cNvPr id="3" name="Notes Placeholder 2"/>
+          <p:cNvSpPr>
+            <a:spLocks noGrp="1"/>
+          </p:cNvSpPr>
+          <p:nvPr>
+            <p:ph type="body" idx="3" sz="quarter"/>
+          </p:nvPr>
+        </p:nvSpPr>
+        <p:spPr/>
+        <p:txBody>
+          <a:bodyPr/>
+          <a:lstStyle/>
+          <a:p>
+            <a:r>
+              <a:t>점검표를 같아야 하는 것, 달라야 하는 것, Primary에서 켜야 하는 것으로 나눠 보면 정리가 쉽습니다. FORCE LOGGING이 꺼져 있으면 NOLOGGING으로 적재한 데이터가 리두에 남지 않아 Standby에는 해당 블록이 비정상으로 남습니다. 평소에는 아무 일 없다가 Failover 뒤 그 테이블을 읽는 순간 오류가 납니다. 실습 05에서 이 항목들을 두 노드에서 차례로 조회해 비교하고, 세부 준비 작업은 3장의 Net 구성과 4장의 Primary 준비에서 이어집니다.</a:t>
+            </a:r>
+          </a:p>
+        </p:txBody>
+      </p:sp>
+      <p:sp>
+        <p:nvSpPr>
+          <p:cNvPr id="4" name="Slide Number Placeholder 3"/>
+          <p:cNvSpPr>
+            <a:spLocks noGrp="1"/>
+          </p:cNvSpPr>
+          <p:nvPr>
+            <p:ph type="sldNum" idx="5" sz="quarter"/>
+          </p:nvPr>
+        </p:nvSpPr>
+        <p:spPr/>
+      </p:sp>
+    </p:spTree>
+  </p:cSld>
+  <p:clrMapOvr>
+    <a:masterClrMapping/>
+  </p:clrMapOvr>
+</p:notes>
+</file>
+
+<file path=ppt/notesSlides/notesSlide33.xml><?xml version="1.0" encoding="utf-8"?>
+<p:notes xmlns:a="http://schemas.openxmlformats.org/drawingml/2006/main" xmlns:p="http://schemas.openxmlformats.org/presentationml/2006/main" xmlns:r="http://schemas.openxmlformats.org/officeDocument/2006/relationships">
+  <p:cSld>
+    <p:spTree>
+      <p:nvGrpSpPr>
+        <p:cNvPr id="1" name=""/>
+        <p:cNvGrpSpPr/>
+        <p:nvPr/>
+      </p:nvGrpSpPr>
+      <p:grpSpPr>
+        <a:xfrm>
+          <a:off x="0" y="0"/>
+          <a:ext cx="0" cy="0"/>
+          <a:chOff x="0" y="0"/>
+          <a:chExt cx="0" cy="0"/>
+        </a:xfrm>
+      </p:grpSpPr>
+      <p:sp>
+        <p:nvSpPr>
+          <p:cNvPr id="2" name="Slide Image Placeholder 1"/>
+          <p:cNvSpPr>
+            <a:spLocks noGrp="1"/>
+          </p:cNvSpPr>
+          <p:nvPr>
+            <p:ph type="sldImg" idx="2"/>
+          </p:nvPr>
+        </p:nvSpPr>
+        <p:spPr/>
+      </p:sp>
+      <p:sp>
+        <p:nvSpPr>
+          <p:cNvPr id="3" name="Notes Placeholder 2"/>
+          <p:cNvSpPr>
+            <a:spLocks noGrp="1"/>
+          </p:cNvSpPr>
+          <p:nvPr>
+            <p:ph type="body" idx="3" sz="quarter"/>
+          </p:nvPr>
+        </p:nvSpPr>
+        <p:spPr/>
+        <p:txBody>
+          <a:bodyPr/>
+          <a:lstStyle/>
+          <a:p>
+            <a:r>
+              <a:t>RAC를 쓰고 있으니 Data Guard는 필요 없다는 말을 종종 듣습니다. RAC는 노드 하나가 죽어도 다른 노드가 서비스를 이어 가지만, 모든 노드가 같은 스토리지의 같은 데이터 파일을 봅니다. 스토리지가 손상되거나 데이터센터 전체가 멈추면 RAC 노드가 몇 개든 소용이 없습니다. 반대로 Data Guard의 Failover는 RAC의 인스턴스 복구보다 시간이 더 걸립니다. 두 기술은 맡는 장애가 달라서, 중요한 시스템에서는 RAC 두 벌을 Data Guard로 묶는 구성이 일반적입니다.</a:t>
+            </a:r>
+          </a:p>
+        </p:txBody>
+      </p:sp>
+      <p:sp>
+        <p:nvSpPr>
+          <p:cNvPr id="4" name="Slide Number Placeholder 3"/>
+          <p:cNvSpPr>
+            <a:spLocks noGrp="1"/>
+          </p:cNvSpPr>
+          <p:nvPr>
+            <p:ph type="sldNum" idx="5" sz="quarter"/>
+          </p:nvPr>
+        </p:nvSpPr>
+        <p:spPr/>
+      </p:sp>
+    </p:spTree>
+  </p:cSld>
+  <p:clrMapOvr>
+    <a:masterClrMapping/>
+  </p:clrMapOvr>
+</p:notes>
+</file>
+
+<file path=ppt/notesSlides/notesSlide34.xml><?xml version="1.0" encoding="utf-8"?>
+<p:notes xmlns:a="http://schemas.openxmlformats.org/drawingml/2006/main" xmlns:p="http://schemas.openxmlformats.org/presentationml/2006/main" xmlns:r="http://schemas.openxmlformats.org/officeDocument/2006/relationships">
+  <p:cSld>
+    <p:spTree>
+      <p:nvGrpSpPr>
+        <p:cNvPr id="1" name=""/>
+        <p:cNvGrpSpPr/>
+        <p:nvPr/>
+      </p:nvGrpSpPr>
+      <p:grpSpPr>
+        <a:xfrm>
+          <a:off x="0" y="0"/>
+          <a:ext cx="0" cy="0"/>
+          <a:chOff x="0" y="0"/>
+          <a:chExt cx="0" cy="0"/>
+        </a:xfrm>
+      </p:grpSpPr>
+      <p:sp>
+        <p:nvSpPr>
+          <p:cNvPr id="2" name="Slide Image Placeholder 1"/>
+          <p:cNvSpPr>
+            <a:spLocks noGrp="1"/>
+          </p:cNvSpPr>
+          <p:nvPr>
+            <p:ph type="sldImg" idx="2"/>
+          </p:nvPr>
+        </p:nvSpPr>
+        <p:spPr/>
+      </p:sp>
+      <p:sp>
+        <p:nvSpPr>
+          <p:cNvPr id="3" name="Notes Placeholder 2"/>
+          <p:cNvSpPr>
+            <a:spLocks noGrp="1"/>
+          </p:cNvSpPr>
+          <p:nvPr>
+            <p:ph type="body" idx="3" sz="quarter"/>
+          </p:nvPr>
+        </p:nvSpPr>
+        <p:spPr/>
+        <p:txBody>
+          <a:bodyPr/>
+          <a:lstStyle/>
+          <a:p>
+            <a:r>
+              <a:t>GoldenGate와 Data Guard는 둘 다 리두를 읽지만 목적이 다릅니다. GoldenGate는 대상이 열려 있고 쓰기도 가능하며, 다른 버전이나 다른 회사 데이터베이스로도 복제할 수 있어 무중단 이전이나 양쪽 사이트에서 동시에 쓰는 구성에 강합니다. 대신 복제가 비동기이고 데이터 유형 제약이 있어, 장애 순간 데이터 손실 없는 전환이 목표라면 Physical Standby가 더 단순하고 확실합니다. Logical Standby와 쓰임새가 일부 겹치는데, Logical Standby는 EE 기본 기능이지만 오라클끼리 한 방향으로만 동작합니다.</a:t>
+            </a:r>
+          </a:p>
+        </p:txBody>
+      </p:sp>
+      <p:sp>
+        <p:nvSpPr>
+          <p:cNvPr id="4" name="Slide Number Placeholder 3"/>
+          <p:cNvSpPr>
+            <a:spLocks noGrp="1"/>
+          </p:cNvSpPr>
+          <p:nvPr>
+            <p:ph type="sldNum" idx="5" sz="quarter"/>
+          </p:nvPr>
+        </p:nvSpPr>
+        <p:spPr/>
+      </p:sp>
+    </p:spTree>
+  </p:cSld>
+  <p:clrMapOvr>
+    <a:masterClrMapping/>
+  </p:clrMapOvr>
+</p:notes>
+</file>
+
+<file path=ppt/notesSlides/notesSlide35.xml><?xml version="1.0" encoding="utf-8"?>
+<p:notes xmlns:a="http://schemas.openxmlformats.org/drawingml/2006/main" xmlns:p="http://schemas.openxmlformats.org/presentationml/2006/main" xmlns:r="http://schemas.openxmlformats.org/officeDocument/2006/relationships">
+  <p:cSld>
+    <p:spTree>
+      <p:nvGrpSpPr>
+        <p:cNvPr id="1" name=""/>
+        <p:cNvGrpSpPr/>
+        <p:nvPr/>
+      </p:nvGrpSpPr>
+      <p:grpSpPr>
+        <a:xfrm>
+          <a:off x="0" y="0"/>
+          <a:ext cx="0" cy="0"/>
+          <a:chOff x="0" y="0"/>
+          <a:chExt cx="0" cy="0"/>
+        </a:xfrm>
+      </p:grpSpPr>
+      <p:sp>
+        <p:nvSpPr>
+          <p:cNvPr id="2" name="Slide Image Placeholder 1"/>
+          <p:cNvSpPr>
+            <a:spLocks noGrp="1"/>
+          </p:cNvSpPr>
+          <p:nvPr>
+            <p:ph type="sldImg" idx="2"/>
+          </p:nvPr>
+        </p:nvSpPr>
+        <p:spPr/>
+      </p:sp>
+      <p:sp>
+        <p:nvSpPr>
+          <p:cNvPr id="3" name="Notes Placeholder 2"/>
+          <p:cNvSpPr>
+            <a:spLocks noGrp="1"/>
+          </p:cNvSpPr>
+          <p:nvPr>
+            <p:ph type="body" idx="3" sz="quarter"/>
+          </p:nvPr>
+        </p:nvSpPr>
+        <p:spPr/>
+        <p:txBody>
+          <a:bodyPr/>
+          <a:lstStyle/>
+          <a:p>
+            <a:r>
+              <a:t>스토리지 원격 미러링은 디스크에 쓰인 모든 블록을 상대편에 복제합니다. 펌웨어 결함으로 깨진 블록이 쓰이면 그 깨진 블록도 그대로 복제됩니다. Data Guard는 블록이 아니라 리두를 보내고, 적용하면서 정합성을 검사하므로 Primary 디스크의 물리 손상이 Standby로 옮겨 가지 않습니다. 이 차이가 스토리지 복제를 이미 쓰는 사이트에서 Data Guard를 추가로 검토하는 이유가 됩니다. 반면 백업과 Flashback은 Data Guard가 대신할 수 없는 영역이라 그대로 유지합니다.</a:t>
+            </a:r>
+          </a:p>
+        </p:txBody>
+      </p:sp>
+      <p:sp>
+        <p:nvSpPr>
+          <p:cNvPr id="4" name="Slide Number Placeholder 3"/>
+          <p:cNvSpPr>
+            <a:spLocks noGrp="1"/>
+          </p:cNvSpPr>
+          <p:nvPr>
+            <p:ph type="sldNum" idx="5" sz="quarter"/>
+          </p:nvPr>
+        </p:nvSpPr>
+        <p:spPr/>
+      </p:sp>
+    </p:spTree>
+  </p:cSld>
+  <p:clrMapOvr>
+    <a:masterClrMapping/>
+  </p:clrMapOvr>
+</p:notes>
+</file>
+
+<file path=ppt/notesSlides/notesSlide36.xml><?xml version="1.0" encoding="utf-8"?>
+<p:notes xmlns:a="http://schemas.openxmlformats.org/drawingml/2006/main" xmlns:p="http://schemas.openxmlformats.org/presentationml/2006/main" xmlns:r="http://schemas.openxmlformats.org/officeDocument/2006/relationships">
+  <p:cSld>
+    <p:spTree>
+      <p:nvGrpSpPr>
+        <p:cNvPr id="1" name=""/>
+        <p:cNvGrpSpPr/>
+        <p:nvPr/>
+      </p:nvGrpSpPr>
+      <p:grpSpPr>
+        <a:xfrm>
+          <a:off x="0" y="0"/>
+          <a:ext cx="0" cy="0"/>
+          <a:chOff x="0" y="0"/>
+          <a:chExt cx="0" cy="0"/>
+        </a:xfrm>
+      </p:grpSpPr>
+      <p:sp>
+        <p:nvSpPr>
+          <p:cNvPr id="2" name="Slide Image Placeholder 1"/>
+          <p:cNvSpPr>
+            <a:spLocks noGrp="1"/>
+          </p:cNvSpPr>
+          <p:nvPr>
+            <p:ph type="sldImg" idx="2"/>
+          </p:nvPr>
+        </p:nvSpPr>
+        <p:spPr/>
+      </p:sp>
+      <p:sp>
+        <p:nvSpPr>
+          <p:cNvPr id="3" name="Notes Placeholder 2"/>
+          <p:cNvSpPr>
+            <a:spLocks noGrp="1"/>
+          </p:cNvSpPr>
+          <p:nvPr>
+            <p:ph type="body" idx="3" sz="quarter"/>
+          </p:nvPr>
+        </p:nvSpPr>
+        <p:spPr/>
+        <p:txBody>
+          <a:bodyPr/>
+          <a:lstStyle/>
+          <a:p>
+            <a:r>
+              <a:t>오라클은 이런 기술 조합을 MAA, Maximum Availability Architecture라는 이름으로 정리해 권장합니다. 표는 단순화한 것이고 실제 MAA 문서에는 등급 이름과 세부 구성이 따로 있습니다. 여기서 볼 것은 위 계층이 아래 계층을 대체하지 않는다는 구조입니다. Data Guard를 넣어도 백업은 계속 받아야 하고, GoldenGate를 넣어도 Data Guard가 하던 무손실 보호는 그대로 필요합니다. 모든 시스템을 최상위 계층으로 맞추면 비용이 감당되지 않으니, 시스템마다 합의한 RPO와 RTO로 계층을 고릅니다.</a:t>
+            </a:r>
+          </a:p>
+        </p:txBody>
+      </p:sp>
+      <p:sp>
+        <p:nvSpPr>
+          <p:cNvPr id="4" name="Slide Number Placeholder 3"/>
+          <p:cNvSpPr>
+            <a:spLocks noGrp="1"/>
+          </p:cNvSpPr>
+          <p:nvPr>
+            <p:ph type="sldNum" idx="5" sz="quarter"/>
+          </p:nvPr>
+        </p:nvSpPr>
+        <p:spPr/>
+      </p:sp>
+    </p:spTree>
+  </p:cSld>
+  <p:clrMapOvr>
+    <a:masterClrMapping/>
+  </p:clrMapOvr>
+</p:notes>
+</file>
+
+<file path=ppt/notesSlides/notesSlide37.xml><?xml version="1.0" encoding="utf-8"?>
+<p:notes xmlns:a="http://schemas.openxmlformats.org/drawingml/2006/main" xmlns:p="http://schemas.openxmlformats.org/presentationml/2006/main" xmlns:r="http://schemas.openxmlformats.org/officeDocument/2006/relationships">
+  <p:cSld>
+    <p:spTree>
+      <p:nvGrpSpPr>
+        <p:cNvPr id="1" name=""/>
+        <p:cNvGrpSpPr/>
+        <p:nvPr/>
+      </p:nvGrpSpPr>
+      <p:grpSpPr>
+        <a:xfrm>
+          <a:off x="0" y="0"/>
+          <a:ext cx="0" cy="0"/>
+          <a:chOff x="0" y="0"/>
+          <a:chExt cx="0" cy="0"/>
+        </a:xfrm>
+      </p:grpSpPr>
+      <p:sp>
+        <p:nvSpPr>
+          <p:cNvPr id="2" name="Slide Image Placeholder 1"/>
+          <p:cNvSpPr>
+            <a:spLocks noGrp="1"/>
+          </p:cNvSpPr>
+          <p:nvPr>
+            <p:ph type="sldImg" idx="2"/>
+          </p:nvPr>
+        </p:nvSpPr>
+        <p:spPr/>
+      </p:sp>
+      <p:sp>
+        <p:nvSpPr>
+          <p:cNvPr id="3" name="Notes Placeholder 2"/>
+          <p:cNvSpPr>
+            <a:spLocks noGrp="1"/>
+          </p:cNvSpPr>
+          <p:nvPr>
+            <p:ph type="body" idx="3" sz="quarter"/>
+          </p:nvPr>
+        </p:nvSpPr>
+        <p:spPr/>
+        <p:txBody>
+          <a:bodyPr/>
+          <a:lstStyle/>
+          <a:p>
+            <a:r>
+              <a:t>요구 사항을 하나씩 대조해 보면 답이 나옵니다. 30분 안에 복구하려면 복원 기반의 백업 전략으로는 어렵고, 데이터 손실이 없어야 하니 동기 전송이 필요합니다. RAC는 서버 고장에는 빠르지만 스토리지가 한 벌이라 손실 위험이 남습니다. 별도 서버와 스토리지에 Physical Standby를 두고 Maximum Availability로 운영하면 세 요구가 모두 충족됩니다. 기본 Data Guard로 시작해 조회 분산 같은 새 요구가 생길 때 옵션을 더하는 순서가 비용 면에서도 무리가 없습니다.</a:t>
+            </a:r>
+          </a:p>
+        </p:txBody>
+      </p:sp>
+      <p:sp>
+        <p:nvSpPr>
+          <p:cNvPr id="4" name="Slide Number Placeholder 3"/>
+          <p:cNvSpPr>
+            <a:spLocks noGrp="1"/>
+          </p:cNvSpPr>
+          <p:nvPr>
+            <p:ph type="sldNum" idx="5" sz="quarter"/>
+          </p:nvPr>
+        </p:nvSpPr>
+        <p:spPr/>
+      </p:sp>
+    </p:spTree>
+  </p:cSld>
+  <p:clrMapOvr>
+    <a:masterClrMapping/>
+  </p:clrMapOvr>
+</p:notes>
+</file>
+
+<file path=ppt/notesSlides/notesSlide38.xml><?xml version="1.0" encoding="utf-8"?>
+<p:notes xmlns:a="http://schemas.openxmlformats.org/drawingml/2006/main" xmlns:p="http://schemas.openxmlformats.org/presentationml/2006/main" xmlns:r="http://schemas.openxmlformats.org/officeDocument/2006/relationships">
+  <p:cSld>
+    <p:spTree>
+      <p:nvGrpSpPr>
+        <p:cNvPr id="1" name=""/>
+        <p:cNvGrpSpPr/>
+        <p:nvPr/>
+      </p:nvGrpSpPr>
+      <p:grpSpPr>
+        <a:xfrm>
+          <a:off x="0" y="0"/>
+          <a:ext cx="0" cy="0"/>
+          <a:chOff x="0" y="0"/>
+          <a:chExt cx="0" cy="0"/>
+        </a:xfrm>
+      </p:grpSpPr>
+      <p:sp>
+        <p:nvSpPr>
+          <p:cNvPr id="2" name="Slide Image Placeholder 1"/>
+          <p:cNvSpPr>
+            <a:spLocks noGrp="1"/>
+          </p:cNvSpPr>
+          <p:nvPr>
+            <p:ph type="sldImg" idx="2"/>
+          </p:nvPr>
+        </p:nvSpPr>
+        <p:spPr/>
+      </p:sp>
+      <p:sp>
+        <p:nvSpPr>
+          <p:cNvPr id="3" name="Notes Placeholder 2"/>
+          <p:cNvSpPr>
+            <a:spLocks noGrp="1"/>
+          </p:cNvSpPr>
+          <p:nvPr>
+            <p:ph type="body" idx="3" sz="quarter"/>
+          </p:nvPr>
+        </p:nvSpPr>
+        <p:spPr/>
+        <p:txBody>
+          <a:bodyPr/>
+          <a:lstStyle/>
+          <a:p>
+            <a:r>
+              <a:t>두 데이터베이스의 DB_NAME이 같아서 Standby에서 실행해야 할 명령을 Primary에서 실행하는 실수가 가장 흔합니다. 명령 전에 DB_UNIQUE_NAME과 역할을 확인하는 습관 하나로 상당수 사고를 막을 수 있습니다. 한 번도 전환해 보지 않은 Standby는 장애 때 제대로 동작한다는 보장이 없으므로 정기 훈련 일정을 잡아 둡니다. 감시도 Standby 프로세스가 떠 있는지보다 transport lag와 apply lag가 기준 안에 있는지를 봐야 하고, 기준값은 업무와 합의한 RPO와 RTO에서 거꾸로 정합니다.</a:t>
             </a:r>
           </a:p>
         </p:txBody>
@@ -2083,7 +2795,7 @@
           <a:lstStyle/>
           <a:p>
             <a:r>
-              <a:t>BR 17장에서 이미 RMAN DUPLICATE를 배웠기 때문에 5장의 명령이 낯설지 않을 것입니다. 다만 목적이 전혀 다릅니다. 일반 DUPLICATE는 복제 자체가 목적이라 새 DBID를 받아 독립합니다. FOR STANDBY는 복제 이후의 지속적 동기화가 목적이므로 DBID를 물려받습니다. DBID가 다르면 Primary가 보낸 리두는 다른 데이터베이스의 것으로 판정되어 적용되지 않습니다.</a:t>
+              <a:t>처음 도입하는 사이트는 대부분 Physical Standby 하나로 시작합니다. 그 하나를 어디에 두느냐가 첫 고민인데, 같은 데이터센터에 두면 동기 전송이 쉬워 데이터 손실 없는 전환을 얻지만 건물 전체가 멈추는 재해에는 소용이 없습니다. 멀리 두면 재해에는 강해지지만 왕복 지연 때문에 동기 전송이 커밋 응답 시간을 늘립니다. 두 마리 토끼를 잡으려고 로컬과 원격을 함께 두거나, 로컬 Standby 대신 데이터 파일 없는 Far Sync를 두는 구성이 나옵니다.</a:t>
             </a:r>
           </a:p>
         </p:txBody>
@@ -2153,7 +2865,7 @@
           <a:lstStyle/>
           <a:p>
             <a:r>
-              <a:t>physical standby가 이 과정의 중심입니다. 4장부터 10장까지가 여기에 해당합니다. 가장 큰 장점은 단순함입니다. 리두를 SQL로 번역하지 않고 블록에 그대로 적용하므로 빠르고, 데이터 타입 제약도 없습니다. Active Data Guard 옵션이 있으면 재해 대비용으로 놀고 있는 장비가 아니라 조회 부하를 나눠 지는 실제 자원이 된다는 점이 도입 논거로 자주 쓰입니다.</a:t>
+              <a:t>Data Guard 도입을 검토하는 자리에서 백업을 줄여도 되느냐는 질문이 꼭 나옵니다. 답은 줄이면 안 된다입니다. Data Guard는 Primary에서 일어난 일을 충실히 옮기는 장치라서, 사람이 저지른 실수도 똑같이 충실하게 옮깁니다. 이를 보완하려고 Standby 하나에 몇 시간 지연 적용을 걸어 두거나 Flashback Database를 켜 두는 방법을 함께 씁니다. 지연 적용 Standby는 실수 직후 적용을 멈추고 그 시점의 데이터를 꺼내는 용도로 쓰입니다.</a:t>
             </a:r>
           </a:p>
         </p:txBody>
@@ -2223,7 +2935,7 @@
           <a:lstStyle/>
           <a:p>
             <a:r>
-              <a:t>logical standby는 쓰임이 좁습니다. 적용이 느리고 지원되지 않는 데이터 타입이 있어서 재해 대비 용도로는 physical이 압도적으로 유리합니다. 그럼에도 존재 이유가 분명한 것은 롤링 업그레이드 때문입니다. 버전이 다른 두 데이터베이스 사이에서도 SQL 수준의 적용은 가능하므로, 다운타임을 최소화하면서 패치셋이나 릴리스를 올릴 수 있습니다. 도입을 검토한다면 DBA_LOGSTDBY_UNSUPPORTED를 먼저 조회해 우리 스키마에 지원되지 않는 타입이 있는지 확인하는 것이 첫 단계입니다.</a:t>
+              <a:t>이 과정 내내 Primary는 chicago, Standby는 boston이라고 부르지만 두 데이터베이스의 DB_NAME은 똑같이 chicago입니다. Physical Standby는 Primary 백업을 복원해 만든 것이라 DBID도 같습니다. 따라서 V$DATABASE의 NAME만 보면 어느 쪽에 접속했는지 알 수 없고, DB_UNIQUE_NAME과 DATABASE_ROLE을 함께 봐야 합니다. 또 Switchover를 한 번 하고 나면 boston이 Primary가 되므로, 운영 문서에서는 서버 이름보다 현재 역할로 대상을 지칭하는 습관을 들이는 편이 사고를 줄입니다.</a:t>
             </a:r>
           </a:p>
         </p:txBody>
@@ -2293,7 +3005,7 @@
           <a:lstStyle/>
           <a:p>
             <a:r>
-              <a:t>snapshot standby의 핵심 성질은 "되돌리면 전부 사라진다"입니다. 이것은 선택이 아니라 규칙입니다. 테스트 결과를 남기고 싶다면 복귀 전에 Data Pump 등으로 별도 추출해야 합니다. 또 하나 주의할 점은 FRA 공간입니다. 변환 시 만들어지는 보장 복원 지점 때문에 플래시백 로그가 삭제되지 않으므로, 공간이 부족하면 변환 자체가 실패하거나 이후 운영이 막힙니다.</a:t>
+              <a:t>재해 복구용 Standby라고 하면 거의 항상 Physical Standby를 말합니다. 블록 변경을 그대로 재현하기 때문에 Primary에서 가능한 일은 무엇이든 Standby에 반영되고, 지원되지 않는 데이터 유형 같은 고민이 없습니다. 블록이 같다는 성질 덕분에 Standby에서 받은 RMAN 백업으로 Primary를 복원할 수도 있어, 백업 부하를 Standby로 넘기는 사이트가 많습니다. 반대로 Standby에서는 테이블 하나 만들 수 없습니다. 내용은 Primary의 리두로만 바뀌어야 하기 때문입니다.</a:t>
             </a:r>
           </a:p>
         </p:txBody>
@@ -2363,7 +3075,7 @@
           <a:lstStyle/>
           <a:p>
             <a:r>
-              <a:t>이 표를 외우기보다 규칙을 이해하는 편이 낫습니다. CONTROLFILE_TYPE이 STANDBY인 것은 physical standby뿐입니다. 갱신 가능한 상태가 되려면 일반 컨트롤 파일이 필요하기 때문에 snapshot과 logical은 CURRENT입니다. OPEN_MODE의 READ ONLY WITH APPLY는 "열려 있으면서 적용받는" 상태로, Active Data Guard 옵션이 있어야 나타납니다.</a:t>
+              <a:t>Logical Standby는 열린 채로 동기화된다는 점 때문에 매력적으로 보이지만, 리두를 SQL로 다시 만드는 방식이라 따라오는 제약이 있습니다. 지원하지 않는 데이터 유형이 들어 있는 테이블은 동기화에서 빠지고, 대량 변경이 많으면 적용이 밀리기도 합니다. 이런 이유로 재해 복구 주력으로는 잘 쓰지 않고, Primary에 없는 보고용 구조가 필요하거나 버전이 다른 데이터베이스 사이에서 롤링 업그레이드를 할 때 고릅니다. 생성 절차와 필터 설정은 12장에서 실습합니다.</a:t>
             </a:r>
           </a:p>
         </p:txBody>
@@ -2433,7 +3145,7 @@
           <a:lstStyle/>
           <a:p>
             <a:r>
-              <a:t>실습 04에서 직접 수행하는 내용입니다. 되돌린 뒤 ORA-00942가 나오는 것을 눈으로 보는 것이 중요합니다. 오류처럼 보이지만 설계된 동작이며, snapshot standby의 성질을 가장 분명하게 보여 주는 장면입니다. 복귀 과정에서 인스턴스를 두 번 재기동해야 한다는 점과, 그 사이에 나오는 ORA-01109가 실패가 아니라는 점도 함께 짚어 주십시오.</a:t>
+              <a:t>운영 데이터 그대로 애플리케이션 패치나 부하 시험을 해 보고 싶을 때 쓰는 유형입니다. 전환하면 보장 복원 지점이 만들어지고, 되돌릴 때 그 지점으로 데이터베이스를 되감은 뒤 그동안 쌓아 둔 리두를 적용해 Primary를 따라잡습니다. 리두를 계속 받아 두니 데이터는 잃지 않지만, Snapshot 상태가 길어질수록 Failover 대상으로서의 가치는 떨어집니다. 밀린 리두를 다 적용해야 Primary가 될 수 있기 때문입니다. 시험 기간을 정해 두고 쓰는 것이 원칙입니다.</a:t>
             </a:r>
           </a:p>
         </p:txBody>
@@ -5683,7 +6395,7 @@
                 </a:solidFill>
                 <a:latin typeface="맑은 고딕"/>
               </a:rPr>
-              <a:t>Introduction to Oracle Data Guard — 무엇을 지키고 무엇으로 연결되는가</a:t>
+              <a:t>무엇을 지키고, 무엇으로 이루어지며, 어디까지가 기본 기능인가</a:t>
             </a:r>
           </a:p>
         </p:txBody>
@@ -5722,7 +6434,7 @@
                 </a:solidFill>
                 <a:latin typeface="맑은 고딕"/>
               </a:rPr>
-              <a:t>Primary·Standby · 세 가지 서비스 · 프로세스 지도 · 보호 모드 · 라이선스 경계</a:t>
+              <a:t>제1장</a:t>
             </a:r>
           </a:p>
         </p:txBody>
@@ -5754,7 +6466,7 @@
         <p:spPr>
           <a:xfrm>
             <a:off x="0" y="0"/>
-            <a:ext cx="12191695" cy="1005840"/>
+            <a:ext cx="12191695" cy="6858000"/>
           </a:xfrm>
           <a:prstGeom prst="rect">
             <a:avLst/>
@@ -5797,8 +6509,8 @@
         </p:nvSpPr>
         <p:spPr>
           <a:xfrm>
-            <a:off x="548640" y="91440"/>
-            <a:ext cx="10972800" cy="777240"/>
+            <a:off x="822960" y="2011680"/>
+            <a:ext cx="10515600" cy="1097280"/>
           </a:xfrm>
           <a:prstGeom prst="rect">
             <a:avLst/>
@@ -5817,13 +6529,13 @@
               </a:spcAft>
             </a:pPr>
             <a:r>
-              <a:rPr sz="2600" b="1">
+              <a:rPr sz="4000" b="1">
                 <a:solidFill>
                   <a:srgbClr val="FFFFFF"/>
                 </a:solidFill>
                 <a:latin typeface="맑은 고딕"/>
               </a:rPr>
-              <a:t>Physical Standby</a:t>
+              <a:t>1.3</a:t>
             </a:r>
           </a:p>
         </p:txBody>
@@ -5836,8 +6548,8 @@
         </p:nvSpPr>
         <p:spPr>
           <a:xfrm>
-            <a:off x="640080" y="1078992"/>
-            <a:ext cx="10881360" cy="457200"/>
+            <a:off x="822960" y="3017520"/>
+            <a:ext cx="10515600" cy="914400"/>
           </a:xfrm>
           <a:prstGeom prst="rect">
             <a:avLst/>
@@ -5856,27 +6568,71 @@
               </a:spcAft>
             </a:pPr>
             <a:r>
-              <a:rPr sz="1500" b="0">
-                <a:solidFill>
-                  <a:srgbClr val="5A6672"/>
-                </a:solidFill>
-                <a:latin typeface="맑은 고딕"/>
-              </a:rPr>
-              <a:t>블록 단위로 동일한 복제본</a:t>
-            </a:r>
-          </a:p>
-        </p:txBody>
-      </p:sp>
-      <p:sp>
-        <p:nvSpPr>
-          <p:cNvPr id="5" name="TextBox 4"/>
+              <a:rPr sz="2800" b="1">
+                <a:solidFill>
+                  <a:srgbClr val="FFFFFF"/>
+                </a:solidFill>
+                <a:latin typeface="맑은 고딕"/>
+              </a:rPr>
+              <a:t>Data Guard 구성 요소</a:t>
+            </a:r>
+          </a:p>
+        </p:txBody>
+      </p:sp>
+      <p:sp>
+        <p:nvSpPr>
+          <p:cNvPr id="5" name="Rectangle 4"/>
+          <p:cNvSpPr/>
+          <p:nvPr/>
+        </p:nvSpPr>
+        <p:spPr>
+          <a:xfrm>
+            <a:off x="822960" y="4114800"/>
+            <a:ext cx="5486400" cy="54864"/>
+          </a:xfrm>
+          <a:prstGeom prst="rect">
+            <a:avLst/>
+          </a:prstGeom>
+          <a:solidFill>
+            <a:srgbClr val="FFFFFF"/>
+          </a:solidFill>
+          <a:ln>
+            <a:noFill/>
+          </a:ln>
+          <a:effectLst/>
+        </p:spPr>
+        <p:style>
+          <a:lnRef idx="1">
+            <a:schemeClr val="accent1"/>
+          </a:lnRef>
+          <a:fillRef idx="3">
+            <a:schemeClr val="accent1"/>
+          </a:fillRef>
+          <a:effectRef idx="2">
+            <a:schemeClr val="accent1"/>
+          </a:effectRef>
+          <a:fontRef idx="minor">
+            <a:schemeClr val="lt1"/>
+          </a:fontRef>
+        </p:style>
+        <p:txBody>
+          <a:bodyPr rtlCol="0" anchor="ctr"/>
+          <a:lstStyle/>
+          <a:p>
+            <a:pPr algn="ctr"/>
+          </a:p>
+        </p:txBody>
+      </p:sp>
+      <p:sp>
+        <p:nvSpPr>
+          <p:cNvPr id="6" name="TextBox 5"/>
           <p:cNvSpPr txBox="1"/>
           <p:nvPr/>
         </p:nvSpPr>
         <p:spPr>
           <a:xfrm>
-            <a:off x="640080" y="1737360"/>
-            <a:ext cx="10881360" cy="4754880"/>
+            <a:off x="822960" y="4297680"/>
+            <a:ext cx="10058400" cy="2011680"/>
           </a:xfrm>
           <a:prstGeom prst="rect">
             <a:avLst/>
@@ -5891,65 +6647,49 @@
           <a:p>
             <a:pPr algn="l">
               <a:spcAft>
-                <a:spcPts val="1000"/>
-              </a:spcAft>
-            </a:pPr>
-            <a:r>
-              <a:rPr sz="1700" b="0">
-                <a:solidFill>
-                  <a:srgbClr val="222222"/>
-                </a:solidFill>
-                <a:latin typeface="맑은 고딕"/>
-              </a:rPr>
-              <a:t>•  디스크 구조가 Primary와 블록 단위로 같다</a:t>
-            </a:r>
-          </a:p>
-          <a:p>
-            <a:pPr algn="l">
-              <a:spcAft>
-                <a:spcPts val="1000"/>
-              </a:spcAft>
-            </a:pPr>
-            <a:r>
-              <a:rPr sz="1700" b="0">
-                <a:solidFill>
-                  <a:srgbClr val="222222"/>
-                </a:solidFill>
-                <a:latin typeface="맑은 고딕"/>
-              </a:rPr>
-              <a:t>•  동기화 방식: 미디어 복구(Redo Apply) — 리두를 그대로 적용</a:t>
-            </a:r>
-          </a:p>
-          <a:p>
-            <a:pPr algn="l">
-              <a:spcAft>
-                <a:spcPts val="1000"/>
-              </a:spcAft>
-            </a:pPr>
-            <a:r>
-              <a:rPr sz="1700" b="0">
-                <a:solidFill>
-                  <a:srgbClr val="222222"/>
-                </a:solidFill>
-                <a:latin typeface="맑은 고딕"/>
-              </a:rPr>
-              <a:t>•  해석 과정이 없으므로 가장 빠르고, 지원하지 않는 데이터 타입이 없다</a:t>
-            </a:r>
-          </a:p>
-          <a:p>
-            <a:pPr algn="l">
-              <a:spcAft>
-                <a:spcPts val="1000"/>
-              </a:spcAft>
-            </a:pPr>
-            <a:r>
-              <a:rPr sz="1700" b="0">
-                <a:solidFill>
-                  <a:srgbClr val="222222"/>
-                </a:solidFill>
-                <a:latin typeface="맑은 고딕"/>
-              </a:rPr>
-              <a:t>•  12c 이후 읽기 전용으로 열린 상태에서도 적용 가능 → Real-Time Query (ADG 옵션)</a:t>
+                <a:spcPts val="800"/>
+              </a:spcAft>
+            </a:pPr>
+            <a:r>
+              <a:rPr sz="1600" b="0">
+                <a:solidFill>
+                  <a:srgbClr val="FFFFFF"/>
+                </a:solidFill>
+                <a:latin typeface="맑은 고딕"/>
+              </a:rPr>
+              <a:t>•  Primary, Standby, 구성</a:t>
+            </a:r>
+          </a:p>
+          <a:p>
+            <a:pPr algn="l">
+              <a:spcAft>
+                <a:spcPts val="800"/>
+              </a:spcAft>
+            </a:pPr>
+            <a:r>
+              <a:rPr sz="1600" b="0">
+                <a:solidFill>
+                  <a:srgbClr val="FFFFFF"/>
+                </a:solidFill>
+                <a:latin typeface="맑은 고딕"/>
+              </a:rPr>
+              <a:t>•  Physical, Logical, Snapshot Standby</a:t>
+            </a:r>
+          </a:p>
+          <a:p>
+            <a:pPr algn="l">
+              <a:spcAft>
+                <a:spcPts val="800"/>
+              </a:spcAft>
+            </a:pPr>
+            <a:r>
+              <a:rPr sz="1600" b="0">
+                <a:solidFill>
+                  <a:srgbClr val="FFFFFF"/>
+                </a:solidFill>
+                <a:latin typeface="맑은 고딕"/>
+              </a:rPr>
+              <a:t>•  Far Sync와 캐스케이딩</a:t>
             </a:r>
           </a:p>
         </p:txBody>
@@ -6050,7 +6790,7 @@
                 </a:solidFill>
                 <a:latin typeface="맑은 고딕"/>
               </a:rPr>
-              <a:t>Logical Standby</a:t>
+              <a:t>Primary와 Standby, 그리고 구성</a:t>
             </a:r>
           </a:p>
         </p:txBody>
@@ -6089,7 +6829,7 @@
                 </a:solidFill>
                 <a:latin typeface="맑은 고딕"/>
               </a:rPr>
-              <a:t>SQL Apply와 롤링 업그레이드</a:t>
+              <a:t>역할은 바뀌고 이름은 남는다</a:t>
             </a:r>
           </a:p>
         </p:txBody>
@@ -6128,7 +6868,7 @@
                 </a:solidFill>
                 <a:latin typeface="맑은 고딕"/>
               </a:rPr>
-              <a:t>•  같은 논리 정보를 담되 물리 구조는 다를 수 있다</a:t>
+              <a:t>•  Primary는 구성 안에 하나, Standby는 최대 30개</a:t>
             </a:r>
           </a:p>
           <a:p>
@@ -6144,7 +6884,7 @@
                 </a:solidFill>
                 <a:latin typeface="맑은 고딕"/>
               </a:rPr>
-              <a:t>•  LogMiner로 리두를 읽어 동등한 SQL로 변환한 뒤 실행</a:t>
+              <a:t>•  30 = LOG_ARCHIVE_DEST_n 31개 중 로컬 1개 제외</a:t>
             </a:r>
           </a:p>
           <a:p>
@@ -6160,7 +6900,7 @@
                 </a:solidFill>
                 <a:latin typeface="맑은 고딕"/>
               </a:rPr>
-              <a:t>•  읽기/쓰기로 열려 있어 Primary에 없는 인덱스·구체화 뷰 추가 가능</a:t>
+              <a:t>•  같은 DB_NAME과 DBID, 다른 DB_UNIQUE_NAME</a:t>
             </a:r>
           </a:p>
           <a:p>
@@ -6176,7 +6916,7 @@
                 </a:solidFill>
                 <a:latin typeface="맑은 고딕"/>
               </a:rPr>
-              <a:t>•  대가: 지원하지 않는 데이터 타입·구문이 있고 적용이 느리다</a:t>
+              <a:t>•  목적지·Broker·서비스 이름은 DB_UNIQUE_NAME 기준</a:t>
             </a:r>
           </a:p>
           <a:p>
@@ -6192,7 +6932,7 @@
                 </a:solidFill>
                 <a:latin typeface="맑은 고딕"/>
               </a:rPr>
-              <a:t>•  대표 용도: 롤링 업그레이드 (12장)</a:t>
+              <a:t>•  대상은 이름보다 현재 역할로 부른다</a:t>
             </a:r>
           </a:p>
         </p:txBody>
@@ -6293,7 +7033,7 @@
                 </a:solidFill>
                 <a:latin typeface="맑은 고딕"/>
               </a:rPr>
-              <a:t>Snapshot Standby</a:t>
+              <a:t>Physical Standby</a:t>
             </a:r>
           </a:p>
         </p:txBody>
@@ -6332,7 +7072,7 @@
                 </a:solidFill>
                 <a:latin typeface="맑은 고딕"/>
               </a:rPr>
-              <a:t>임시로 갱신 가능한 Standby</a:t>
+              <a:t>블록 단위로 같은 사본</a:t>
             </a:r>
           </a:p>
         </p:txBody>
@@ -6371,7 +7111,7 @@
                 </a:solidFill>
                 <a:latin typeface="맑은 고딕"/>
               </a:rPr>
-              <a:t>•  physical standby를 변환해 만든다. 리두는 계속 받되 적용하지 않고 쌓아 둔다</a:t>
+              <a:t>•  Redo Apply: 미디어 복구로 리두 적용</a:t>
             </a:r>
           </a:p>
           <a:p>
@@ -6387,7 +7127,7 @@
                 </a:solidFill>
                 <a:latin typeface="맑은 고딕"/>
               </a:rPr>
-              <a:t>•  그동안 읽기/쓰기로 열려 자유롭게 변경 가능</a:t>
+              <a:t>•  데이터 유형·DDL 제약 없음</a:t>
             </a:r>
           </a:p>
           <a:p>
@@ -6403,7 +7143,7 @@
                 </a:solidFill>
                 <a:latin typeface="맑은 고딕"/>
               </a:rPr>
-              <a:t>•  되돌리면 변경은 전부 폐기되고, 쌓인 리두가 한꺼번에 적용된다</a:t>
+              <a:t>•  MOUNT 또는 READ ONLY, 적용 중 조회는 옵션</a:t>
             </a:r>
           </a:p>
           <a:p>
@@ -6419,7 +7159,7 @@
                 </a:solidFill>
                 <a:latin typeface="맑은 고딕"/>
               </a:rPr>
-              <a:t>•  바탕은 Flashback Database — 변환 시 보장 복원 지점 자동 생성</a:t>
+              <a:t>•  컨트롤 파일 유형 STANDBY, DDL은 거부</a:t>
             </a:r>
           </a:p>
           <a:p>
@@ -6435,7 +7175,7 @@
                 </a:solidFill>
                 <a:latin typeface="맑은 고딕"/>
               </a:rPr>
-              <a:t>•  대표 용도: 운영 데이터로 하는 테스트 (11장)</a:t>
+              <a:t>•  Physical Standby의 백업으로 Primary 복원 가능</a:t>
             </a:r>
           </a:p>
         </p:txBody>
@@ -6536,7 +7276,7 @@
                 </a:solidFill>
                 <a:latin typeface="맑은 고딕"/>
               </a:rPr>
-              <a:t>세 유형의 ROLE / OPEN_MODE 조합</a:t>
+              <a:t>Logical Standby</a:t>
             </a:r>
           </a:p>
         </p:txBody>
@@ -6575,7 +7315,7 @@
                 </a:solidFill>
                 <a:latin typeface="맑은 고딕"/>
               </a:rPr>
-              <a:t>두 열만 보면 판별된다</a:t>
+              <a:t>논리적으로 같고, 물리 구조는 달라도 된다</a:t>
             </a:r>
           </a:p>
         </p:txBody>
@@ -6614,7 +7354,7 @@
                 </a:solidFill>
                 <a:latin typeface="맑은 고딕"/>
               </a:rPr>
-              <a:t>•  PRIMARY / READ WRITE / CURRENT</a:t>
+              <a:t>•  SQL Apply: LogMiner로 리두를 SQL로 바꿔 실행</a:t>
             </a:r>
           </a:p>
           <a:p>
@@ -6630,7 +7370,7 @@
                 </a:solidFill>
                 <a:latin typeface="맑은 고딕"/>
               </a:rPr>
-              <a:t>•  PHYSICAL STANDBY / MOUNTED / STANDBY  (ADG 옵션 없음)</a:t>
+              <a:t>•  READ WRITE로 열려 보고용 인덱스·뷰 추가 가능</a:t>
             </a:r>
           </a:p>
           <a:p>
@@ -6646,7 +7386,7 @@
                 </a:solidFill>
                 <a:latin typeface="맑은 고딕"/>
               </a:rPr>
-              <a:t>•  PHYSICAL STANDBY / READ ONLY WITH APPLY / STANDBY  (ADG 옵션 있음)</a:t>
+              <a:t>•  DATABASE GUARD로 관리 대상 테이블 변경 차단</a:t>
             </a:r>
           </a:p>
           <a:p>
@@ -6662,7 +7402,7 @@
                 </a:solidFill>
                 <a:latin typeface="맑은 고딕"/>
               </a:rPr>
-              <a:t>•  SNAPSHOT STANDBY / READ WRITE / CURRENT</a:t>
+              <a:t>•  지원하지 않는 데이터 유형이 있음</a:t>
             </a:r>
           </a:p>
           <a:p>
@@ -6678,7 +7418,7 @@
                 </a:solidFill>
                 <a:latin typeface="맑은 고딕"/>
               </a:rPr>
-              <a:t>•  LOGICAL STANDBY / READ WRITE / CURRENT</a:t>
+              <a:t>•  롤링 업그레이드, 스키마 단위 skip 필터</a:t>
             </a:r>
           </a:p>
         </p:txBody>
@@ -6779,7 +7519,7 @@
                 </a:solidFill>
                 <a:latin typeface="맑은 고딕"/>
               </a:rPr>
-              <a:t>snapshot 변환 실측</a:t>
+              <a:t>Snapshot Standby</a:t>
             </a:r>
           </a:p>
         </p:txBody>
@@ -6818,7 +7558,7 @@
                 </a:solidFill>
                 <a:latin typeface="맑은 고딕"/>
               </a:rPr>
-              <a:t>값이 실제로 어떻게 바뀌는가</a:t>
+              <a:t>잠시 쓰고, 버리고, 다시 따라잡는다</a:t>
             </a:r>
           </a:p>
         </p:txBody>
@@ -6857,7 +7597,7 @@
                 </a:solidFill>
                 <a:latin typeface="맑은 고딕"/>
               </a:rPr>
-              <a:t>•  CONVERT TO SNAPSHOT STANDBY 후: SNAPSHOT STANDBY / READ WRITE / CURRENT</a:t>
+              <a:t>•  Physical Standby를 명령 하나로 전환</a:t>
             </a:r>
           </a:p>
           <a:p>
@@ -6873,7 +7613,7 @@
                 </a:solidFill>
                 <a:latin typeface="맑은 고딕"/>
               </a:rPr>
-              <a:t>•  자동 생성된 복원 지점: SNAPSHOT_STANDBY_REQUIRED_08/26/2026 18:22:01, SCN 2173646, GUARANTEE=YES</a:t>
+              <a:t>•  보장 복원 지점 생성, FRA 필요</a:t>
             </a:r>
           </a:p>
           <a:p>
@@ -6889,7 +7629,7 @@
                 </a:solidFill>
                 <a:latin typeface="맑은 고딕"/>
               </a:rPr>
-              <a:t>•  이 상태에서 CREATE TABLE / INSERT / COMMIT 모두 성공</a:t>
+              <a:t>•  전환 중에도 리두는 받아서 보관</a:t>
             </a:r>
           </a:p>
           <a:p>
@@ -6905,7 +7645,7 @@
                 </a:solidFill>
                 <a:latin typeface="맑은 고딕"/>
               </a:rPr>
-              <a:t>•  복귀 후 같은 테이블 조회 → ORA-00942 : 변경이 폐기됐다</a:t>
+              <a:t>•  되돌리면 변경은 버리고 밀린 리두 적용</a:t>
             </a:r>
           </a:p>
           <a:p>
@@ -6921,7 +7661,7 @@
                 </a:solidFill>
                 <a:latin typeface="맑은 고딕"/>
               </a:rPr>
-              <a:t>•  복원 지점도 함께 제거되어 V$RESTORE_POINT는 0행</a:t>
+              <a:t>•  ADG 옵션 없이 쓰는 기본 기능</a:t>
             </a:r>
           </a:p>
         </p:txBody>
@@ -6953,7 +7693,7 @@
         <p:spPr>
           <a:xfrm>
             <a:off x="0" y="0"/>
-            <a:ext cx="12191695" cy="6858000"/>
+            <a:ext cx="12191695" cy="1005840"/>
           </a:xfrm>
           <a:prstGeom prst="rect">
             <a:avLst/>
@@ -6996,8 +7736,8 @@
         </p:nvSpPr>
         <p:spPr>
           <a:xfrm>
-            <a:off x="822960" y="2011680"/>
-            <a:ext cx="10515600" cy="1097280"/>
+            <a:off x="548640" y="91440"/>
+            <a:ext cx="10972800" cy="777240"/>
           </a:xfrm>
           <a:prstGeom prst="rect">
             <a:avLst/>
@@ -7016,13 +7756,13 @@
               </a:spcAft>
             </a:pPr>
             <a:r>
-              <a:rPr sz="4000" b="1">
+              <a:rPr sz="2600" b="1">
                 <a:solidFill>
                   <a:srgbClr val="FFFFFF"/>
                 </a:solidFill>
                 <a:latin typeface="맑은 고딕"/>
               </a:rPr>
-              <a:t>1.4</a:t>
+              <a:t>Far Sync와 캐스케이딩</a:t>
             </a:r>
           </a:p>
         </p:txBody>
@@ -7035,8 +7775,8 @@
         </p:nvSpPr>
         <p:spPr>
           <a:xfrm>
-            <a:off x="822960" y="3017520"/>
-            <a:ext cx="10515600" cy="914400"/>
+            <a:off x="640080" y="1078992"/>
+            <a:ext cx="10881360" cy="457200"/>
           </a:xfrm>
           <a:prstGeom prst="rect">
             <a:avLst/>
@@ -7055,71 +7795,27 @@
               </a:spcAft>
             </a:pPr>
             <a:r>
-              <a:rPr sz="2800" b="1">
-                <a:solidFill>
-                  <a:srgbClr val="FFFFFF"/>
-                </a:solidFill>
-                <a:latin typeface="맑은 고딕"/>
-              </a:rPr>
-              <a:t>Data Guard가 제공하는 세 가지 서비스</a:t>
-            </a:r>
-          </a:p>
-        </p:txBody>
-      </p:sp>
-      <p:sp>
-        <p:nvSpPr>
-          <p:cNvPr id="5" name="Rectangle 4"/>
-          <p:cNvSpPr/>
-          <p:nvPr/>
-        </p:nvSpPr>
-        <p:spPr>
-          <a:xfrm>
-            <a:off x="822960" y="4114800"/>
-            <a:ext cx="5486400" cy="54864"/>
-          </a:xfrm>
-          <a:prstGeom prst="rect">
-            <a:avLst/>
-          </a:prstGeom>
-          <a:solidFill>
-            <a:srgbClr val="FFFFFF"/>
-          </a:solidFill>
-          <a:ln>
-            <a:noFill/>
-          </a:ln>
-          <a:effectLst/>
-        </p:spPr>
-        <p:style>
-          <a:lnRef idx="1">
-            <a:schemeClr val="accent1"/>
-          </a:lnRef>
-          <a:fillRef idx="3">
-            <a:schemeClr val="accent1"/>
-          </a:fillRef>
-          <a:effectRef idx="2">
-            <a:schemeClr val="accent1"/>
-          </a:effectRef>
-          <a:fontRef idx="minor">
-            <a:schemeClr val="lt1"/>
-          </a:fontRef>
-        </p:style>
-        <p:txBody>
-          <a:bodyPr rtlCol="0" anchor="ctr"/>
-          <a:lstStyle/>
-          <a:p>
-            <a:pPr algn="ctr"/>
-          </a:p>
-        </p:txBody>
-      </p:sp>
-      <p:sp>
-        <p:nvSpPr>
-          <p:cNvPr id="6" name="TextBox 5"/>
+              <a:rPr sz="1500" b="0">
+                <a:solidFill>
+                  <a:srgbClr val="5A6672"/>
+                </a:solidFill>
+                <a:latin typeface="맑은 고딕"/>
+              </a:rPr>
+              <a:t>데이터 없이 리두만 중계한다</a:t>
+            </a:r>
+          </a:p>
+        </p:txBody>
+      </p:sp>
+      <p:sp>
+        <p:nvSpPr>
+          <p:cNvPr id="5" name="TextBox 4"/>
           <p:cNvSpPr txBox="1"/>
           <p:nvPr/>
         </p:nvSpPr>
         <p:spPr>
           <a:xfrm>
-            <a:off x="822960" y="4297680"/>
-            <a:ext cx="10058400" cy="2011680"/>
+            <a:off x="640080" y="1737360"/>
+            <a:ext cx="10881360" cy="4754880"/>
           </a:xfrm>
           <a:prstGeom prst="rect">
             <a:avLst/>
@@ -7134,49 +7830,81 @@
           <a:p>
             <a:pPr algn="l">
               <a:spcAft>
-                <a:spcPts val="800"/>
-              </a:spcAft>
-            </a:pPr>
-            <a:r>
-              <a:rPr sz="1600" b="0">
-                <a:solidFill>
-                  <a:srgbClr val="FFFFFF"/>
-                </a:solidFill>
-                <a:latin typeface="맑은 고딕"/>
-              </a:rPr>
-              <a:t>•  리두 전송 서비스</a:t>
-            </a:r>
-          </a:p>
-          <a:p>
-            <a:pPr algn="l">
-              <a:spcAft>
-                <a:spcPts val="800"/>
-              </a:spcAft>
-            </a:pPr>
-            <a:r>
-              <a:rPr sz="1600" b="0">
-                <a:solidFill>
-                  <a:srgbClr val="FFFFFF"/>
-                </a:solidFill>
-                <a:latin typeface="맑은 고딕"/>
-              </a:rPr>
-              <a:t>•  적용 서비스 (Redo Apply / SQL Apply)</a:t>
-            </a:r>
-          </a:p>
-          <a:p>
-            <a:pPr algn="l">
-              <a:spcAft>
-                <a:spcPts val="800"/>
-              </a:spcAft>
-            </a:pPr>
-            <a:r>
-              <a:rPr sz="1600" b="0">
-                <a:solidFill>
-                  <a:srgbClr val="FFFFFF"/>
-                </a:solidFill>
-                <a:latin typeface="맑은 고딕"/>
-              </a:rPr>
-              <a:t>•  역할 관리 서비스 (Switchover / Failover)</a:t>
+                <a:spcPts val="1000"/>
+              </a:spcAft>
+            </a:pPr>
+            <a:r>
+              <a:rPr sz="1700" b="0">
+                <a:solidFill>
+                  <a:srgbClr val="222222"/>
+                </a:solidFill>
+                <a:latin typeface="맑은 고딕"/>
+              </a:rPr>
+              <a:t>•  Far Sync: 컨트롤 파일, SRL, 아카이브 로그만 보유</a:t>
+            </a:r>
+          </a:p>
+          <a:p>
+            <a:pPr algn="l">
+              <a:spcAft>
+                <a:spcPts val="1000"/>
+              </a:spcAft>
+            </a:pPr>
+            <a:r>
+              <a:rPr sz="1700" b="0">
+                <a:solidFill>
+                  <a:srgbClr val="222222"/>
+                </a:solidFill>
+                <a:latin typeface="맑은 고딕"/>
+              </a:rPr>
+              <a:t>•  Primary → Far Sync는 SYNC, Far Sync → 원격은 ASYNC</a:t>
+            </a:r>
+          </a:p>
+          <a:p>
+            <a:pPr algn="l">
+              <a:spcAft>
+                <a:spcPts val="1000"/>
+              </a:spcAft>
+            </a:pPr>
+            <a:r>
+              <a:rPr sz="1700" b="0">
+                <a:solidFill>
+                  <a:srgbClr val="222222"/>
+                </a:solidFill>
+                <a:latin typeface="맑은 고딕"/>
+              </a:rPr>
+              <a:t>•  Primary 역할을 넘겨받을 수 없음</a:t>
+            </a:r>
+          </a:p>
+          <a:p>
+            <a:pPr algn="l">
+              <a:spcAft>
+                <a:spcPts val="1000"/>
+              </a:spcAft>
+            </a:pPr>
+            <a:r>
+              <a:rPr sz="1700" b="0">
+                <a:solidFill>
+                  <a:srgbClr val="222222"/>
+                </a:solidFill>
+                <a:latin typeface="맑은 고딕"/>
+              </a:rPr>
+              <a:t>•  Far Sync와 실시간 캐스케이딩은 ADG 옵션</a:t>
+            </a:r>
+          </a:p>
+          <a:p>
+            <a:pPr algn="l">
+              <a:spcAft>
+                <a:spcPts val="1000"/>
+              </a:spcAft>
+            </a:pPr>
+            <a:r>
+              <a:rPr sz="1700" b="0">
+                <a:solidFill>
+                  <a:srgbClr val="222222"/>
+                </a:solidFill>
+                <a:latin typeface="맑은 고딕"/>
+              </a:rPr>
+              <a:t>•  단일 장애점 대비: 2개 배치 또는 ALTERNATE 경로</a:t>
             </a:r>
           </a:p>
         </p:txBody>
@@ -7277,7 +8005,7 @@
                 </a:solidFill>
                 <a:latin typeface="맑은 고딕"/>
               </a:rPr>
-              <a:t>리두 전송 서비스</a:t>
+              <a:t>Standby 유형 비교</a:t>
             </a:r>
           </a:p>
         </p:txBody>
@@ -7316,7 +8044,7 @@
                 </a:solidFill>
                 <a:latin typeface="맑은 고딕"/>
               </a:rPr>
-              <a:t>언제 보낼 것인가</a:t>
+              <a:t>재해 복구의 기본 선택지는 Physical</a:t>
             </a:r>
           </a:p>
         </p:txBody>
@@ -7355,7 +8083,7 @@
                 </a:solidFill>
                 <a:latin typeface="맑은 고딕"/>
               </a:rPr>
-              <a:t>•  Primary의 리두를 하나 이상의 Standby 또는 아카이브 목적지로 자동 전달</a:t>
+              <a:t>•  Physical: 블록 동일, 제약 없음, Failover에 가장 적합</a:t>
             </a:r>
           </a:p>
           <a:p>
@@ -7371,7 +8099,7 @@
                 </a:solidFill>
                 <a:latin typeface="맑은 고딕"/>
               </a:rPr>
-              <a:t>•  동기(SYNC)와 비동기(ASYNC) — 이 선택이 보호 수준과 Primary 성능의 균형점</a:t>
+              <a:t>•  Logical: 논리 동일, READ WRITE, 데이터 유형 제약</a:t>
             </a:r>
           </a:p>
           <a:p>
@@ -7387,7 +8115,7 @@
                 </a:solidFill>
                 <a:latin typeface="맑은 고딕"/>
               </a:rPr>
-              <a:t>•  목적지와 방식은 LOG_ARCHIVE_DEST_n에 속성으로 기술</a:t>
+              <a:t>•  Snapshot: 일시적 READ WRITE, 리두는 보관만</a:t>
             </a:r>
           </a:p>
           <a:p>
@@ -7403,7 +8131,23 @@
                 </a:solidFill>
                 <a:latin typeface="맑은 고딕"/>
               </a:rPr>
-              <a:t>•  2장(보호 모드)과 3장(Oracle Net)에서 다룬다</a:t>
+              <a:t>•  DATABASE_ROLE로 유형, OPEN_MODE로 열린 모드 확인</a:t>
+            </a:r>
+          </a:p>
+          <a:p>
+            <a:pPr algn="l">
+              <a:spcAft>
+                <a:spcPts val="1000"/>
+              </a:spcAft>
+            </a:pPr>
+            <a:r>
+              <a:rPr sz="1700" b="0">
+                <a:solidFill>
+                  <a:srgbClr val="222222"/>
+                </a:solidFill>
+                <a:latin typeface="맑은 고딕"/>
+              </a:rPr>
+              <a:t>•  한 구성 안에 유형을 섞어 쓸 수 있다</a:t>
             </a:r>
           </a:p>
         </p:txBody>
@@ -7435,7 +8179,7 @@
         <p:spPr>
           <a:xfrm>
             <a:off x="0" y="0"/>
-            <a:ext cx="12191695" cy="1005840"/>
+            <a:ext cx="12191695" cy="6858000"/>
           </a:xfrm>
           <a:prstGeom prst="rect">
             <a:avLst/>
@@ -7478,8 +8222,8 @@
         </p:nvSpPr>
         <p:spPr>
           <a:xfrm>
-            <a:off x="548640" y="91440"/>
-            <a:ext cx="10972800" cy="777240"/>
+            <a:off x="822960" y="2011680"/>
+            <a:ext cx="10515600" cy="1097280"/>
           </a:xfrm>
           <a:prstGeom prst="rect">
             <a:avLst/>
@@ -7498,13 +8242,13 @@
               </a:spcAft>
             </a:pPr>
             <a:r>
-              <a:rPr sz="2600" b="1">
+              <a:rPr sz="4000" b="1">
                 <a:solidFill>
                   <a:srgbClr val="FFFFFF"/>
                 </a:solidFill>
                 <a:latin typeface="맑은 고딕"/>
               </a:rPr>
-              <a:t>적용 서비스</a:t>
+              <a:t>1.4</a:t>
             </a:r>
           </a:p>
         </p:txBody>
@@ -7517,8 +8261,8 @@
         </p:nvSpPr>
         <p:spPr>
           <a:xfrm>
-            <a:off x="640080" y="1078992"/>
-            <a:ext cx="10881360" cy="457200"/>
+            <a:off x="822960" y="3017520"/>
+            <a:ext cx="10515600" cy="914400"/>
           </a:xfrm>
           <a:prstGeom prst="rect">
             <a:avLst/>
@@ -7537,27 +8281,71 @@
               </a:spcAft>
             </a:pPr>
             <a:r>
-              <a:rPr sz="1500" b="0">
-                <a:solidFill>
-                  <a:srgbClr val="5A6672"/>
-                </a:solidFill>
-                <a:latin typeface="맑은 고딕"/>
-              </a:rPr>
-              <a:t>언제 어떻게 반영할 것인가</a:t>
-            </a:r>
-          </a:p>
-        </p:txBody>
-      </p:sp>
-      <p:sp>
-        <p:nvSpPr>
-          <p:cNvPr id="5" name="TextBox 4"/>
+              <a:rPr sz="2800" b="1">
+                <a:solidFill>
+                  <a:srgbClr val="FFFFFF"/>
+                </a:solidFill>
+                <a:latin typeface="맑은 고딕"/>
+              </a:rPr>
+              <a:t>리두 전송 서비스와 적용 서비스</a:t>
+            </a:r>
+          </a:p>
+        </p:txBody>
+      </p:sp>
+      <p:sp>
+        <p:nvSpPr>
+          <p:cNvPr id="5" name="Rectangle 4"/>
+          <p:cNvSpPr/>
+          <p:nvPr/>
+        </p:nvSpPr>
+        <p:spPr>
+          <a:xfrm>
+            <a:off x="822960" y="4114800"/>
+            <a:ext cx="5486400" cy="54864"/>
+          </a:xfrm>
+          <a:prstGeom prst="rect">
+            <a:avLst/>
+          </a:prstGeom>
+          <a:solidFill>
+            <a:srgbClr val="FFFFFF"/>
+          </a:solidFill>
+          <a:ln>
+            <a:noFill/>
+          </a:ln>
+          <a:effectLst/>
+        </p:spPr>
+        <p:style>
+          <a:lnRef idx="1">
+            <a:schemeClr val="accent1"/>
+          </a:lnRef>
+          <a:fillRef idx="3">
+            <a:schemeClr val="accent1"/>
+          </a:fillRef>
+          <a:effectRef idx="2">
+            <a:schemeClr val="accent1"/>
+          </a:effectRef>
+          <a:fontRef idx="minor">
+            <a:schemeClr val="lt1"/>
+          </a:fontRef>
+        </p:style>
+        <p:txBody>
+          <a:bodyPr rtlCol="0" anchor="ctr"/>
+          <a:lstStyle/>
+          <a:p>
+            <a:pPr algn="ctr"/>
+          </a:p>
+        </p:txBody>
+      </p:sp>
+      <p:sp>
+        <p:nvSpPr>
+          <p:cNvPr id="6" name="TextBox 5"/>
           <p:cNvSpPr txBox="1"/>
           <p:nvPr/>
         </p:nvSpPr>
         <p:spPr>
           <a:xfrm>
-            <a:off x="640080" y="1737360"/>
-            <a:ext cx="10881360" cy="4754880"/>
+            <a:off x="822960" y="4297680"/>
+            <a:ext cx="10058400" cy="2011680"/>
           </a:xfrm>
           <a:prstGeom prst="rect">
             <a:avLst/>
@@ -7572,65 +8360,49 @@
           <a:p>
             <a:pPr algn="l">
               <a:spcAft>
-                <a:spcPts val="1000"/>
-              </a:spcAft>
-            </a:pPr>
-            <a:r>
-              <a:rPr sz="1700" b="0">
-                <a:solidFill>
-                  <a:srgbClr val="222222"/>
-                </a:solidFill>
-                <a:latin typeface="맑은 고딕"/>
-              </a:rPr>
-              <a:t>•  Physical standby → Redo Apply : 미디어 복구 기능으로 블록 단위 적용</a:t>
-            </a:r>
-          </a:p>
-          <a:p>
-            <a:pPr algn="l">
-              <a:spcAft>
-                <a:spcPts val="1000"/>
-              </a:spcAft>
-            </a:pPr>
-            <a:r>
-              <a:rPr sz="1700" b="0">
-                <a:solidFill>
-                  <a:srgbClr val="222222"/>
-                </a:solidFill>
-                <a:latin typeface="맑은 고딕"/>
-              </a:rPr>
-              <a:t>•  Logical standby → SQL Apply : 리두를 SQL로 변환해 실행</a:t>
-            </a:r>
-          </a:p>
-          <a:p>
-            <a:pPr algn="l">
-              <a:spcAft>
-                <a:spcPts val="1000"/>
-              </a:spcAft>
-            </a:pPr>
-            <a:r>
-              <a:rPr sz="1700" b="0">
-                <a:solidFill>
-                  <a:srgbClr val="222222"/>
-                </a:solidFill>
-                <a:latin typeface="맑은 고딕"/>
-              </a:rPr>
-              <a:t>•  실시간 적용(real-time apply)은 standby 리두 로그에서 바로 읽어 적용</a:t>
-            </a:r>
-          </a:p>
-          <a:p>
-            <a:pPr algn="l">
-              <a:spcAft>
-                <a:spcPts val="1000"/>
-              </a:spcAft>
-            </a:pPr>
-            <a:r>
-              <a:rPr sz="1700" b="0">
-                <a:solidFill>
-                  <a:srgbClr val="222222"/>
-                </a:solidFill>
-                <a:latin typeface="맑은 고딕"/>
-              </a:rPr>
-              <a:t>•  7장(Redo Apply)과 12장(SQL Apply)에서 각각 다룬다</a:t>
+                <a:spcPts val="800"/>
+              </a:spcAft>
+            </a:pPr>
+            <a:r>
+              <a:rPr sz="1600" b="0">
+                <a:solidFill>
+                  <a:srgbClr val="FFFFFF"/>
+                </a:solidFill>
+                <a:latin typeface="맑은 고딕"/>
+              </a:rPr>
+              <a:t>•  세 가지 서비스</a:t>
+            </a:r>
+          </a:p>
+          <a:p>
+            <a:pPr algn="l">
+              <a:spcAft>
+                <a:spcPts val="800"/>
+              </a:spcAft>
+            </a:pPr>
+            <a:r>
+              <a:rPr sz="1600" b="0">
+                <a:solidFill>
+                  <a:srgbClr val="FFFFFF"/>
+                </a:solidFill>
+                <a:latin typeface="맑은 고딕"/>
+              </a:rPr>
+              <a:t>•  Primary·Standby 프로세스와 SRL</a:t>
+            </a:r>
+          </a:p>
+          <a:p>
+            <a:pPr algn="l">
+              <a:spcAft>
+                <a:spcPts val="800"/>
+              </a:spcAft>
+            </a:pPr>
+            <a:r>
+              <a:rPr sz="1600" b="0">
+                <a:solidFill>
+                  <a:srgbClr val="FFFFFF"/>
+                </a:solidFill>
+                <a:latin typeface="맑은 고딕"/>
+              </a:rPr>
+              <a:t>•  갭 해소와 보호 모드 미리 보기</a:t>
             </a:r>
           </a:p>
         </p:txBody>
@@ -7731,7 +8503,7 @@
                 </a:solidFill>
                 <a:latin typeface="맑은 고딕"/>
               </a:rPr>
-              <a:t>역할 관리 서비스</a:t>
+              <a:t>세 가지 서비스</a:t>
             </a:r>
           </a:p>
         </p:txBody>
@@ -7770,7 +8542,7 @@
                 </a:solidFill>
                 <a:latin typeface="맑은 고딕"/>
               </a:rPr>
-              <a:t>Switchover와 Failover</a:t>
+              <a:t>전송, 적용, 역할 관리</a:t>
             </a:r>
           </a:p>
         </p:txBody>
@@ -7809,7 +8581,7 @@
                 </a:solidFill>
                 <a:latin typeface="맑은 고딕"/>
               </a:rPr>
-              <a:t>•  데이터베이스는 Primary 또는 Standby 두 역할 중 하나로만 동작한다</a:t>
+              <a:t>•  리두 전송 서비스: Primary의 리두를 목적지로 (2·3장)</a:t>
             </a:r>
           </a:p>
           <a:p>
@@ -7825,7 +8597,7 @@
                 </a:solidFill>
                 <a:latin typeface="맑은 고딕"/>
               </a:rPr>
-              <a:t>•  Switchover: 계획된 역할 교대. 유지보수·업그레이드용. 데이터 손실 없음</a:t>
+              <a:t>•  적용 서비스: Redo Apply 또는 SQL Apply (7·12장)</a:t>
             </a:r>
           </a:p>
           <a:p>
@@ -7841,7 +8613,7 @@
                 </a:solidFill>
                 <a:latin typeface="맑은 고딕"/>
               </a:rPr>
-              <a:t>•  Failover: 장애로 인한 전환. 손실 여부는 보호 모드에 달려 있다</a:t>
+              <a:t>•  역할 관리 서비스: Switchover, Failover (16장)</a:t>
             </a:r>
           </a:p>
           <a:p>
@@ -7857,7 +8629,23 @@
                 </a:solidFill>
                 <a:latin typeface="맑은 고딕"/>
               </a:rPr>
-              <a:t>•  Fast-Start Failover: Broker가 판단과 실행을 자동 수행 (16장)</a:t>
+              <a:t>•  전송과 적용은 서로 기다리지 않는다</a:t>
+            </a:r>
+          </a:p>
+          <a:p>
+            <a:pPr algn="l">
+              <a:spcAft>
+                <a:spcPts val="1000"/>
+              </a:spcAft>
+            </a:pPr>
+            <a:r>
+              <a:rPr sz="1700" b="0">
+                <a:solidFill>
+                  <a:srgbClr val="222222"/>
+                </a:solidFill>
+                <a:latin typeface="맑은 고딕"/>
+              </a:rPr>
+              <a:t>•  손실은 전송이, 전환 속도는 적용이 결정</a:t>
             </a:r>
           </a:p>
         </p:txBody>
@@ -7889,7 +8677,7 @@
         <p:spPr>
           <a:xfrm>
             <a:off x="0" y="0"/>
-            <a:ext cx="12191695" cy="6858000"/>
+            <a:ext cx="12191695" cy="1005840"/>
           </a:xfrm>
           <a:prstGeom prst="rect">
             <a:avLst/>
@@ -7932,8 +8720,8 @@
         </p:nvSpPr>
         <p:spPr>
           <a:xfrm>
-            <a:off x="822960" y="2011680"/>
-            <a:ext cx="10515600" cy="1097280"/>
+            <a:off x="548640" y="91440"/>
+            <a:ext cx="10972800" cy="777240"/>
           </a:xfrm>
           <a:prstGeom prst="rect">
             <a:avLst/>
@@ -7952,13 +8740,13 @@
               </a:spcAft>
             </a:pPr>
             <a:r>
-              <a:rPr sz="4000" b="1">
+              <a:rPr sz="2600" b="1">
                 <a:solidFill>
                   <a:srgbClr val="FFFFFF"/>
                 </a:solidFill>
                 <a:latin typeface="맑은 고딕"/>
               </a:rPr>
-              <a:t>1.5</a:t>
+              <a:t>Primary 쪽 프로세스</a:t>
             </a:r>
           </a:p>
         </p:txBody>
@@ -7971,8 +8759,8 @@
         </p:nvSpPr>
         <p:spPr>
           <a:xfrm>
-            <a:off x="822960" y="3017520"/>
-            <a:ext cx="10515600" cy="914400"/>
+            <a:off x="640080" y="1078992"/>
+            <a:ext cx="10881360" cy="457200"/>
           </a:xfrm>
           <a:prstGeom prst="rect">
             <a:avLst/>
@@ -7991,71 +8779,27 @@
               </a:spcAft>
             </a:pPr>
             <a:r>
-              <a:rPr sz="2800" b="1">
-                <a:solidFill>
-                  <a:srgbClr val="FFFFFF"/>
-                </a:solidFill>
-                <a:latin typeface="맑은 고딕"/>
-              </a:rPr>
-              <a:t>아키텍처 — 프로세스 지도</a:t>
-            </a:r>
-          </a:p>
-        </p:txBody>
-      </p:sp>
-      <p:sp>
-        <p:nvSpPr>
-          <p:cNvPr id="5" name="Rectangle 4"/>
-          <p:cNvSpPr/>
-          <p:nvPr/>
-        </p:nvSpPr>
-        <p:spPr>
-          <a:xfrm>
-            <a:off x="822960" y="4114800"/>
-            <a:ext cx="5486400" cy="54864"/>
-          </a:xfrm>
-          <a:prstGeom prst="rect">
-            <a:avLst/>
-          </a:prstGeom>
-          <a:solidFill>
-            <a:srgbClr val="FFFFFF"/>
-          </a:solidFill>
-          <a:ln>
-            <a:noFill/>
-          </a:ln>
-          <a:effectLst/>
-        </p:spPr>
-        <p:style>
-          <a:lnRef idx="1">
-            <a:schemeClr val="accent1"/>
-          </a:lnRef>
-          <a:fillRef idx="3">
-            <a:schemeClr val="accent1"/>
-          </a:fillRef>
-          <a:effectRef idx="2">
-            <a:schemeClr val="accent1"/>
-          </a:effectRef>
-          <a:fontRef idx="minor">
-            <a:schemeClr val="lt1"/>
-          </a:fontRef>
-        </p:style>
-        <p:txBody>
-          <a:bodyPr rtlCol="0" anchor="ctr"/>
-          <a:lstStyle/>
-          <a:p>
-            <a:pPr algn="ctr"/>
-          </a:p>
-        </p:txBody>
-      </p:sp>
-      <p:sp>
-        <p:nvSpPr>
-          <p:cNvPr id="6" name="TextBox 5"/>
+              <a:rPr sz="1500" b="0">
+                <a:solidFill>
+                  <a:srgbClr val="5A6672"/>
+                </a:solidFill>
+                <a:latin typeface="맑은 고딕"/>
+              </a:rPr>
+              <a:t>LGWR는 그대로, 전송은 NSS와 TTnn</a:t>
+            </a:r>
+          </a:p>
+        </p:txBody>
+      </p:sp>
+      <p:sp>
+        <p:nvSpPr>
+          <p:cNvPr id="5" name="TextBox 4"/>
           <p:cNvSpPr txBox="1"/>
           <p:nvPr/>
         </p:nvSpPr>
         <p:spPr>
           <a:xfrm>
-            <a:off x="822960" y="4297680"/>
-            <a:ext cx="10058400" cy="2011680"/>
+            <a:off x="640080" y="1737360"/>
+            <a:ext cx="10881360" cy="4754880"/>
           </a:xfrm>
           <a:prstGeom prst="rect">
             <a:avLst/>
@@ -8070,49 +8814,81 @@
           <a:p>
             <a:pPr algn="l">
               <a:spcAft>
-                <a:spcPts val="800"/>
-              </a:spcAft>
-            </a:pPr>
-            <a:r>
-              <a:rPr sz="1600" b="0">
-                <a:solidFill>
-                  <a:srgbClr val="FFFFFF"/>
-                </a:solidFill>
-                <a:latin typeface="맑은 고딕"/>
-              </a:rPr>
-              <a:t>•  기존 리두 생성 구조를 그대로 활용한다</a:t>
-            </a:r>
-          </a:p>
-          <a:p>
-            <a:pPr algn="l">
-              <a:spcAft>
-                <a:spcPts val="800"/>
-              </a:spcAft>
-            </a:pPr>
-            <a:r>
-              <a:rPr sz="1600" b="0">
-                <a:solidFill>
-                  <a:srgbClr val="FFFFFF"/>
-                </a:solidFill>
-                <a:latin typeface="맑은 고딕"/>
-              </a:rPr>
-              <a:t>•  Primary: LGWR · NSSn · TTnn · ARCn</a:t>
-            </a:r>
-          </a:p>
-          <a:p>
-            <a:pPr algn="l">
-              <a:spcAft>
-                <a:spcPts val="800"/>
-              </a:spcAft>
-            </a:pPr>
-            <a:r>
-              <a:rPr sz="1600" b="0">
-                <a:solidFill>
-                  <a:srgbClr val="FFFFFF"/>
-                </a:solidFill>
-                <a:latin typeface="맑은 고딕"/>
-              </a:rPr>
-              <a:t>•  Standby: RFS · ARCn · MRP · PRnn</a:t>
+                <a:spcPts val="1000"/>
+              </a:spcAft>
+            </a:pPr>
+            <a:r>
+              <a:rPr sz="1700" b="0">
+                <a:solidFill>
+                  <a:srgbClr val="222222"/>
+                </a:solidFill>
+                <a:latin typeface="맑은 고딕"/>
+              </a:rPr>
+              <a:t>•  LGWR: 온라인 리두 로그 기록</a:t>
+            </a:r>
+          </a:p>
+          <a:p>
+            <a:pPr algn="l">
+              <a:spcAft>
+                <a:spcPts val="1000"/>
+              </a:spcAft>
+            </a:pPr>
+            <a:r>
+              <a:rPr sz="1700" b="0">
+                <a:solidFill>
+                  <a:srgbClr val="222222"/>
+                </a:solidFill>
+                <a:latin typeface="맑은 고딕"/>
+              </a:rPr>
+              <a:t>•  NSSn: SYNC 목적지 전송, LGWR가 확인을 기다림</a:t>
+            </a:r>
+          </a:p>
+          <a:p>
+            <a:pPr algn="l">
+              <a:spcAft>
+                <a:spcPts val="1000"/>
+              </a:spcAft>
+            </a:pPr>
+            <a:r>
+              <a:rPr sz="1700" b="0">
+                <a:solidFill>
+                  <a:srgbClr val="222222"/>
+                </a:solidFill>
+                <a:latin typeface="맑은 고딕"/>
+              </a:rPr>
+              <a:t>•  TTnn: ASYNC 목적지 전송, LGWR는 관여 안 함</a:t>
+            </a:r>
+          </a:p>
+          <a:p>
+            <a:pPr algn="l">
+              <a:spcAft>
+                <a:spcPts val="1000"/>
+              </a:spcAft>
+            </a:pPr>
+            <a:r>
+              <a:rPr sz="1700" b="0">
+                <a:solidFill>
+                  <a:srgbClr val="222222"/>
+                </a:solidFill>
+                <a:latin typeface="맑은 고딕"/>
+              </a:rPr>
+              <a:t>•  ARCn: 로컬 아카이브와 갭 해소, 기본 4개</a:t>
+            </a:r>
+          </a:p>
+          <a:p>
+            <a:pPr algn="l">
+              <a:spcAft>
+                <a:spcPts val="1000"/>
+              </a:spcAft>
+            </a:pPr>
+            <a:r>
+              <a:rPr sz="1700" b="0">
+                <a:solidFill>
+                  <a:srgbClr val="222222"/>
+                </a:solidFill>
+                <a:latin typeface="맑은 고딕"/>
+              </a:rPr>
+              <a:t>•  11g까지의 LNS는 19c의 NSS 또는 TTnn</a:t>
             </a:r>
           </a:p>
         </p:txBody>
@@ -8213,7 +8989,7 @@
                 </a:solidFill>
                 <a:latin typeface="맑은 고딕"/>
               </a:rPr>
-              <a:t>학습 목표 (Objectives)</a:t>
+              <a:t>학습 목표</a:t>
             </a:r>
           </a:p>
         </p:txBody>
@@ -8252,7 +9028,7 @@
                 </a:solidFill>
                 <a:latin typeface="맑은 고딕"/>
               </a:rPr>
-              <a:t>•  Data Guard의 정의와 구성 요소를 설명하고, Primary와 Standby가 무엇으로 연결되는지 말한다.</a:t>
+              <a:t>•  Data Guard가 대응하는 다운타임의 종류를 구분한다</a:t>
             </a:r>
           </a:p>
           <a:p>
@@ -8268,7 +9044,7 @@
                 </a:solidFill>
                 <a:latin typeface="맑은 고딕"/>
               </a:rPr>
-              <a:t>•  Standby 세 유형(physical·logical·snapshot)을 구분하고 ROLE·OPEN_MODE 조합으로 확인한다.</a:t>
+              <a:t>•  Physical, Logical, Snapshot Standby와 Far Sync를 구분한다</a:t>
             </a:r>
           </a:p>
           <a:p>
@@ -8284,7 +9060,7 @@
                 </a:solidFill>
                 <a:latin typeface="맑은 고딕"/>
               </a:rPr>
-              <a:t>•  세 가지 서비스(리두 전송·적용·역할 관리)를 구분하고 각각의 구현 프로세스와 연결한다.</a:t>
+              <a:t>•  전송·적용·역할 관리 서비스와 주요 프로세스를 짝짓는다</a:t>
             </a:r>
           </a:p>
           <a:p>
@@ -8300,7 +9076,7 @@
                 </a:solidFill>
                 <a:latin typeface="맑은 고딕"/>
               </a:rPr>
-              <a:t>•  Primary·Standby의 백그라운드 프로세스를 V$MANAGED_STANDBY·V$DATAGUARD_PROCESS로 식별한다.</a:t>
+              <a:t>•  Switchover, Failover, Fast-Start Failover를 구분한다</a:t>
             </a:r>
           </a:p>
           <a:p>
@@ -8316,7 +9092,7 @@
                 </a:solidFill>
                 <a:latin typeface="맑은 고딕"/>
               </a:rPr>
-              <a:t>•  자동 갭 탐지·해소의 동작과 한계를 설명한다.</a:t>
+              <a:t>•  Broker와 관리 도구, ADG 옵션의 라이선스 경계를 판단한다</a:t>
             </a:r>
           </a:p>
           <a:p>
@@ -8332,39 +9108,7 @@
                 </a:solidFill>
                 <a:latin typeface="맑은 고딕"/>
               </a:rPr>
-              <a:t>•  세 가지 데이터 보호 모드의 이름과 기본값을 알고 현재 구성을 확인한다.</a:t>
-            </a:r>
-          </a:p>
-          <a:p>
-            <a:pPr algn="l">
-              <a:spcAft>
-                <a:spcPts val="1000"/>
-              </a:spcAft>
-            </a:pPr>
-            <a:r>
-              <a:rPr sz="1600" b="0">
-                <a:solidFill>
-                  <a:srgbClr val="222222"/>
-                </a:solidFill>
-                <a:latin typeface="맑은 고딕"/>
-              </a:rPr>
-              <a:t>•  구성 전에 두 노드에서 맞춰야 할 항목을 점검표로 확인한다.</a:t>
-            </a:r>
-          </a:p>
-          <a:p>
-            <a:pPr algn="l">
-              <a:spcAft>
-                <a:spcPts val="1000"/>
-              </a:spcAft>
-            </a:pPr>
-            <a:r>
-              <a:rPr sz="1600" b="0">
-                <a:solidFill>
-                  <a:srgbClr val="222222"/>
-                </a:solidFill>
-                <a:latin typeface="맑은 고딕"/>
-              </a:rPr>
-              <a:t>•  EE 기본 Data Guard와 Active Data Guard 옵션의 경계를 구분한다.</a:t>
+              <a:t>•  RAC, GoldenGate, 백업과 비교해 보호 범위를 설명한다</a:t>
             </a:r>
           </a:p>
         </p:txBody>
@@ -8465,7 +9209,7 @@
                 </a:solidFill>
                 <a:latin typeface="맑은 고딕"/>
               </a:rPr>
-              <a:t>Primary 측 프로세스</a:t>
+              <a:t>Standby 쪽 프로세스</a:t>
             </a:r>
           </a:p>
         </p:txBody>
@@ -8504,7 +9248,7 @@
                 </a:solidFill>
                 <a:latin typeface="맑은 고딕"/>
               </a:rPr>
-              <a:t>누가 리두를 내보내는가</a:t>
+              <a:t>받는 RFS, 적용하는 MRP0</a:t>
             </a:r>
           </a:p>
         </p:txBody>
@@ -8543,7 +9287,7 @@
                 </a:solidFill>
                 <a:latin typeface="맑은 고딕"/>
               </a:rPr>
-              <a:t>•  LGWR: 리두를 온라인 리두 로그에 기록. SYNC면 NSSn에 넘기고 확인을 기다린 뒤 커밋</a:t>
+              <a:t>•  RFSn: Primary 연결마다 하나, SRL에 기록</a:t>
             </a:r>
           </a:p>
           <a:p>
@@ -8559,7 +9303,7 @@
                 </a:solidFill>
                 <a:latin typeface="맑은 고딕"/>
               </a:rPr>
-              <a:t>•  NSSn (Network Server SYNC): 동기 전송 전용. Standby의 RFS로 직접 전송</a:t>
+              <a:t>•  ARCn: 다 찬 SRL을 아카이브</a:t>
             </a:r>
           </a:p>
           <a:p>
@@ -8575,7 +9319,7 @@
                 </a:solidFill>
                 <a:latin typeface="맑은 고딕"/>
               </a:rPr>
-              <a:t>•  TTnn: 비동기 전송 슬레이브. 리두 버퍼나 ORL에서 읽어 전송</a:t>
+              <a:t>•  MRP0와 PRnn: Physical Standby의 Redo Apply</a:t>
             </a:r>
           </a:p>
           <a:p>
@@ -8591,7 +9335,23 @@
                 </a:solidFill>
                 <a:latin typeface="맑은 고딕"/>
               </a:rPr>
-              <a:t>•  ARCn: 로컬 아카이브 + 원격 전송 + 갭 탐지·해소. 최대 30개, 기본값 4</a:t>
+              <a:t>•  LSP: Logical Standby의 SQL Apply</a:t>
+            </a:r>
+          </a:p>
+          <a:p>
+            <a:pPr algn="l">
+              <a:spcAft>
+                <a:spcPts val="1000"/>
+              </a:spcAft>
+            </a:pPr>
+            <a:r>
+              <a:rPr sz="1700" b="0">
+                <a:solidFill>
+                  <a:srgbClr val="222222"/>
+                </a:solidFill>
+                <a:latin typeface="맑은 고딕"/>
+              </a:rPr>
+              <a:t>•  12.1부터 SRL이 있으면 실시간 적용이 기본</a:t>
             </a:r>
           </a:p>
         </p:txBody>
@@ -8692,7 +9452,7 @@
                 </a:solidFill>
                 <a:latin typeface="맑은 고딕"/>
               </a:rPr>
-              <a:t>Primary 실측 — V$DATAGUARD_PROCESS</a:t>
+              <a:t>Standby Redo Log</a:t>
             </a:r>
           </a:p>
         </p:txBody>
@@ -8731,7 +9491,7 @@
                 </a:solidFill>
                 <a:latin typeface="맑은 고딕"/>
               </a:rPr>
-              <a:t>ROLE 열이 임무를 알려 준다</a:t>
+              <a:t>받은 리두를 담는 Standby 전용 로그</a:t>
             </a:r>
           </a:p>
         </p:txBody>
@@ -8770,7 +9530,7 @@
                 </a:solidFill>
                 <a:latin typeface="맑은 고딕"/>
               </a:rPr>
-              <a:t>•  ARC0 'archive local' / ARC1~ARC3 'archive redo' — 기본 4개</a:t>
+              <a:t>•  RFS가 받은 리두를 즉시 기록하는 곳</a:t>
             </a:r>
           </a:p>
           <a:p>
@@ -8786,7 +9546,7 @@
                 </a:solidFill>
                 <a:latin typeface="맑은 고딕"/>
               </a:rPr>
-              <a:t>•  TT04 'async ORL single' ACTION=WRITING SEQUENCE#=19 ← 리두 본류를 나르는 프로세스</a:t>
+              <a:t>•  없으면 아카이브 로그로만 기록, 전환을 기다림</a:t>
             </a:r>
           </a:p>
           <a:p>
@@ -8802,7 +9562,7 @@
                 </a:solidFill>
                 <a:latin typeface="맑은 고딕"/>
               </a:rPr>
-              <a:t>•  TT00 'gap manager' — 갭 탐지 / TT03 'heartbeat redo informer' — 연결 생존 확인</a:t>
+              <a:t>•  SYNC, 실시간 적용, Far Sync의 전제</a:t>
             </a:r>
           </a:p>
           <a:p>
@@ -8818,7 +9578,7 @@
                 </a:solidFill>
                 <a:latin typeface="맑은 고딕"/>
               </a:rPr>
-              <a:t>•  TMON 'redo transport monitor' — 전송 전반 감시</a:t>
+              <a:t>•  역할 전환 대비로 Primary에도 생성</a:t>
             </a:r>
           </a:p>
           <a:p>
@@ -8834,7 +9594,7 @@
                 </a:solidFill>
                 <a:latin typeface="맑은 고딕"/>
               </a:rPr>
-              <a:t>•  ASYNC 구성이라 NSSn은 보이지 않는다</a:t>
+              <a:t>•  크기는 온라인 로그와 같게, 개수는 그룹 수 + 1</a:t>
             </a:r>
           </a:p>
         </p:txBody>
@@ -8935,7 +9695,7 @@
                 </a:solidFill>
                 <a:latin typeface="맑은 고딕"/>
               </a:rPr>
-              <a:t>Standby 측 프로세스</a:t>
+              <a:t>V$DATAGUARD_PROCESS</a:t>
             </a:r>
           </a:p>
         </p:txBody>
@@ -8974,7 +9734,7 @@
                 </a:solidFill>
                 <a:latin typeface="맑은 고딕"/>
               </a:rPr>
-              <a:t>누가 받아 적용하는가</a:t>
+              <a:t>프로세스를 역할 이름으로 보는 뷰</a:t>
             </a:r>
           </a:p>
         </p:txBody>
@@ -9013,7 +9773,7 @@
                 </a:solidFill>
                 <a:latin typeface="맑은 고딕"/>
               </a:rPr>
-              <a:t>•  RFS (Remote File Server): 리두를 받아 standby 리두 로그 또는 아카이브에 기록</a:t>
+              <a:t>•  12.2부터 제공, Primary·Standby 양쪽에서 조회</a:t>
             </a:r>
           </a:p>
           <a:p>
@@ -9029,7 +9789,7 @@
                 </a:solidFill>
                 <a:latin typeface="맑은 고딕"/>
               </a:rPr>
-              <a:t>•  ARCn: standby 리두 로그를 아카이브</a:t>
+              <a:t>•  ROLE: log writer, async ORL single, managed recovery 등</a:t>
             </a:r>
           </a:p>
           <a:p>
@@ -9045,7 +9805,7 @@
                 </a:solidFill>
                 <a:latin typeface="맑은 고딕"/>
               </a:rPr>
-              <a:t>•  MRP (Managed Recovery Process): physical standby 전용. 적용을 조율</a:t>
+              <a:t>•  ACTION: 지금 하고 있는 일</a:t>
             </a:r>
           </a:p>
           <a:p>
@@ -9061,7 +9821,7 @@
                 </a:solidFill>
                 <a:latin typeface="맑은 고딕"/>
               </a:rPr>
-              <a:t>•  PRnn: MRP가 부리는 적용 슬레이브. 병렬로 리두를 적용</a:t>
+              <a:t>•  V$MANAGED_STANDBY는 19c에서 디프리케이트</a:t>
             </a:r>
           </a:p>
           <a:p>
@@ -9077,7 +9837,7 @@
                 </a:solidFill>
                 <a:latin typeface="맑은 고딕"/>
               </a:rPr>
-              <a:t>•  LSP: logical standby에서 SQL Apply를 제어</a:t>
+              <a:t>•  새 점검 스크립트는 V$DATAGUARD_PROCESS 기준</a:t>
             </a:r>
           </a:p>
         </p:txBody>
@@ -9178,7 +9938,7 @@
                 </a:solidFill>
                 <a:latin typeface="맑은 고딕"/>
               </a:rPr>
-              <a:t>Standby 실측 — MRP와 RFS</a:t>
+              <a:t>아카이브 갭의 자동 해소</a:t>
             </a:r>
           </a:p>
         </p:txBody>
@@ -9217,7 +9977,7 @@
                 </a:solidFill>
                 <a:latin typeface="맑은 고딕"/>
               </a:rPr>
-              <a:t>두 숫자를 나란히 놓고 본다</a:t>
+              <a:t>끊긴 동안의 리두는 나중에 채운다</a:t>
             </a:r>
           </a:p>
         </p:txBody>
@@ -9256,7 +10016,7 @@
                 </a:solidFill>
                 <a:latin typeface="맑은 고딕"/>
               </a:rPr>
-              <a:t>•  RFS  : SEQUENCE#=19, BLOCK#=3866  ← 지금 받고 있는 위치</a:t>
+              <a:t>•  연결이 끊긴 동안 생긴 로그 = 아카이브 갭</a:t>
             </a:r>
           </a:p>
           <a:p>
@@ -9272,7 +10032,7 @@
                 </a:solidFill>
                 <a:latin typeface="맑은 고딕"/>
               </a:rPr>
-              <a:t>•  MRP0 : SEQUENCE#=19, BLOCK#=3881  ← 지금 적용한 위치</a:t>
+              <a:t>•  Primary ARCn이 확인(ping) 후 빠진 로그 전송</a:t>
             </a:r>
           </a:p>
           <a:p>
@@ -9288,7 +10048,7 @@
                 </a:solidFill>
                 <a:latin typeface="맑은 고딕"/>
               </a:rPr>
-              <a:t>•  같은 시퀀스 안에서 근접 → 실시간 적용이 동작 중이라는 증거</a:t>
+              <a:t>•  Standby는 FAL_SERVER에 요청해 받아 옴</a:t>
             </a:r>
           </a:p>
           <a:p>
@@ -9304,7 +10064,7 @@
                 </a:solidFill>
                 <a:latin typeface="맑은 고딕"/>
               </a:rPr>
-              <a:t>•  적용이 밀리면 MRP0의 시퀀스 자체가 RFS보다 뒤처진다</a:t>
+              <a:t>•  Primary에 로그가 남아 있어야 자동 해소</a:t>
             </a:r>
           </a:p>
           <a:p>
@@ -9320,7 +10080,7 @@
                 </a:solidFill>
                 <a:latin typeface="맑은 고딕"/>
               </a:rPr>
-              <a:t>•  OS에서도 확인: ora_mrp0_boston, ora_pr00~pr04_boston</a:t>
+              <a:t>•  삭제 정책은 Standby 적용 이후로</a:t>
             </a:r>
           </a:p>
         </p:txBody>
@@ -9421,7 +10181,7 @@
                 </a:solidFill>
                 <a:latin typeface="맑은 고딕"/>
               </a:rPr>
-              <a:t>CLIENT_ROLE로 짝 맞추기</a:t>
+              <a:t>보호 모드 미리 보기</a:t>
             </a:r>
           </a:p>
         </p:txBody>
@@ -9460,7 +10220,7 @@
                 </a:solidFill>
                 <a:latin typeface="맑은 고딕"/>
               </a:rPr>
-              <a:t>리두 흐름 경로를 그린다</a:t>
+              <a:t>커밋 조건과 장애 시 동작</a:t>
             </a:r>
           </a:p>
         </p:txBody>
@@ -9499,7 +10259,7 @@
                 </a:solidFill>
                 <a:latin typeface="맑은 고딕"/>
               </a:rPr>
-              <a:t>•  Primary TT04 'async ORL single'  ↔  Standby rfs 'RFS async' (CLIENT_ROLE=async ORL single)</a:t>
+              <a:t>•  Maximum Protection: 쓰지 못하면 Primary 종료</a:t>
             </a:r>
           </a:p>
           <a:p>
@@ -9515,7 +10275,7 @@
                 </a:solidFill>
                 <a:latin typeface="맑은 고딕"/>
               </a:rPr>
-              <a:t>•  Primary TT00 'gap manager'       ↔  Standby rfs 'RFS ping' (CLIENT_ROLE=gap manager)</a:t>
+              <a:t>•  Maximum Availability: 쓰지 못하면 잠시 비동기로</a:t>
             </a:r>
           </a:p>
           <a:p>
@@ -9531,7 +10291,7 @@
                 </a:solidFill>
                 <a:latin typeface="맑은 고딕"/>
               </a:rPr>
-              <a:t>•  Standby rfs 'RFS archive' (CLIENT_ROLE=archive gap) — 갭 발생 시 아카이브 수신 경로</a:t>
+              <a:t>•  Maximum Performance: 로컬 기록만으로 커밋 (기본)</a:t>
             </a:r>
           </a:p>
           <a:p>
@@ -9547,7 +10307,23 @@
                 </a:solidFill>
                 <a:latin typeface="맑은 고딕"/>
               </a:rPr>
-              <a:t>•  적용 측: MRP0(조율) → PR00 'recovery logmerger' → PR01~PR04 'recovery apply slave'</a:t>
+              <a:t>•  Availability는 두 번째 장애가 겹치지 않는 한 무손실</a:t>
+            </a:r>
+          </a:p>
+          <a:p>
+            <a:pPr algn="l">
+              <a:spcAft>
+                <a:spcPts val="1000"/>
+              </a:spcAft>
+            </a:pPr>
+            <a:r>
+              <a:rPr sz="1700" b="0">
+                <a:solidFill>
+                  <a:srgbClr val="222222"/>
+                </a:solidFill>
+                <a:latin typeface="맑은 고딕"/>
+              </a:rPr>
+              <a:t>•  상세와 전환 방법은 2장</a:t>
             </a:r>
           </a:p>
         </p:txBody>
@@ -9579,7 +10355,7 @@
         <p:spPr>
           <a:xfrm>
             <a:off x="0" y="0"/>
-            <a:ext cx="12191695" cy="1005840"/>
+            <a:ext cx="12191695" cy="6858000"/>
           </a:xfrm>
           <a:prstGeom prst="rect">
             <a:avLst/>
@@ -9622,8 +10398,8 @@
         </p:nvSpPr>
         <p:spPr>
           <a:xfrm>
-            <a:off x="548640" y="91440"/>
-            <a:ext cx="10972800" cy="777240"/>
+            <a:off x="822960" y="2011680"/>
+            <a:ext cx="10515600" cy="1097280"/>
           </a:xfrm>
           <a:prstGeom prst="rect">
             <a:avLst/>
@@ -9642,13 +10418,13 @@
               </a:spcAft>
             </a:pPr>
             <a:r>
-              <a:rPr sz="2600" b="1">
+              <a:rPr sz="4000" b="1">
                 <a:solidFill>
                   <a:srgbClr val="FFFFFF"/>
                 </a:solidFill>
                 <a:latin typeface="맑은 고딕"/>
               </a:rPr>
-              <a:t>자동 갭 탐지와 해소</a:t>
+              <a:t>1.5</a:t>
             </a:r>
           </a:p>
         </p:txBody>
@@ -9661,8 +10437,8 @@
         </p:nvSpPr>
         <p:spPr>
           <a:xfrm>
-            <a:off x="640080" y="1078992"/>
-            <a:ext cx="10881360" cy="457200"/>
+            <a:off x="822960" y="3017520"/>
+            <a:ext cx="10515600" cy="914400"/>
           </a:xfrm>
           <a:prstGeom prst="rect">
             <a:avLst/>
@@ -9681,27 +10457,71 @@
               </a:spcAft>
             </a:pPr>
             <a:r>
-              <a:rPr sz="1500" b="0">
-                <a:solidFill>
-                  <a:srgbClr val="5A6672"/>
-                </a:solidFill>
-                <a:latin typeface="맑은 고딕"/>
-              </a:rPr>
-              <a:t>DBA 개입 없이 회복된다</a:t>
-            </a:r>
-          </a:p>
-        </p:txBody>
-      </p:sp>
-      <p:sp>
-        <p:nvSpPr>
-          <p:cNvPr id="5" name="TextBox 4"/>
+              <a:rPr sz="2800" b="1">
+                <a:solidFill>
+                  <a:srgbClr val="FFFFFF"/>
+                </a:solidFill>
+                <a:latin typeface="맑은 고딕"/>
+              </a:rPr>
+              <a:t>역할 전환</a:t>
+            </a:r>
+          </a:p>
+        </p:txBody>
+      </p:sp>
+      <p:sp>
+        <p:nvSpPr>
+          <p:cNvPr id="5" name="Rectangle 4"/>
+          <p:cNvSpPr/>
+          <p:nvPr/>
+        </p:nvSpPr>
+        <p:spPr>
+          <a:xfrm>
+            <a:off x="822960" y="4114800"/>
+            <a:ext cx="5486400" cy="54864"/>
+          </a:xfrm>
+          <a:prstGeom prst="rect">
+            <a:avLst/>
+          </a:prstGeom>
+          <a:solidFill>
+            <a:srgbClr val="FFFFFF"/>
+          </a:solidFill>
+          <a:ln>
+            <a:noFill/>
+          </a:ln>
+          <a:effectLst/>
+        </p:spPr>
+        <p:style>
+          <a:lnRef idx="1">
+            <a:schemeClr val="accent1"/>
+          </a:lnRef>
+          <a:fillRef idx="3">
+            <a:schemeClr val="accent1"/>
+          </a:fillRef>
+          <a:effectRef idx="2">
+            <a:schemeClr val="accent1"/>
+          </a:effectRef>
+          <a:fontRef idx="minor">
+            <a:schemeClr val="lt1"/>
+          </a:fontRef>
+        </p:style>
+        <p:txBody>
+          <a:bodyPr rtlCol="0" anchor="ctr"/>
+          <a:lstStyle/>
+          <a:p>
+            <a:pPr algn="ctr"/>
+          </a:p>
+        </p:txBody>
+      </p:sp>
+      <p:sp>
+        <p:nvSpPr>
+          <p:cNvPr id="6" name="TextBox 5"/>
           <p:cNvSpPr txBox="1"/>
           <p:nvPr/>
         </p:nvSpPr>
         <p:spPr>
           <a:xfrm>
-            <a:off x="640080" y="1737360"/>
-            <a:ext cx="10881360" cy="4754880"/>
+            <a:off x="822960" y="4297680"/>
+            <a:ext cx="10058400" cy="2011680"/>
           </a:xfrm>
           <a:prstGeom prst="rect">
             <a:avLst/>
@@ -9716,65 +10536,49 @@
           <a:p>
             <a:pPr algn="l">
               <a:spcAft>
-                <a:spcPts val="1000"/>
-              </a:spcAft>
-            </a:pPr>
-            <a:r>
-              <a:rPr sz="1700" b="0">
-                <a:solidFill>
-                  <a:srgbClr val="222222"/>
-                </a:solidFill>
-                <a:latin typeface="맑은 고딕"/>
-              </a:rPr>
-              <a:t>•  연결이 끊긴 동안 전달되지 못한 아카이브 리두 로그의 빠진 구간 = 갭(gap)</a:t>
-            </a:r>
-          </a:p>
-          <a:p>
-            <a:pPr algn="l">
-              <a:spcAft>
-                <a:spcPts val="1000"/>
-              </a:spcAft>
-            </a:pPr>
-            <a:r>
-              <a:rPr sz="1700" b="0">
-                <a:solidFill>
-                  <a:srgbClr val="222222"/>
-                </a:solidFill>
-                <a:latin typeface="맑은 고딕"/>
-              </a:rPr>
-              <a:t>•  연결 회복 시 Primary의 ARCn 또는 gap manager가 빠진 로그를 확인해 재전송</a:t>
-            </a:r>
-          </a:p>
-          <a:p>
-            <a:pPr algn="l">
-              <a:spcAft>
-                <a:spcPts val="1000"/>
-              </a:spcAft>
-            </a:pPr>
-            <a:r>
-              <a:rPr sz="1700" b="0">
-                <a:solidFill>
-                  <a:srgbClr val="222222"/>
-                </a:solidFill>
-                <a:latin typeface="맑은 고딕"/>
-              </a:rPr>
-              <a:t>•  Standby의 RFS ping / RFS archive가 이 흐름을 처리</a:t>
-            </a:r>
-          </a:p>
-          <a:p>
-            <a:pPr algn="l">
-              <a:spcAft>
-                <a:spcPts val="1000"/>
-              </a:spcAft>
-            </a:pPr>
-            <a:r>
-              <a:rPr sz="1700" b="0">
-                <a:solidFill>
-                  <a:srgbClr val="222222"/>
-                </a:solidFill>
-                <a:latin typeface="맑은 고딕"/>
-              </a:rPr>
-              <a:t>•  한계: 필요한 아카이브 로그가 Primary에서 이미 삭제됐다면 수동 조치 필요 (7장)</a:t>
+                <a:spcPts val="800"/>
+              </a:spcAft>
+            </a:pPr>
+            <a:r>
+              <a:rPr sz="1600" b="0">
+                <a:solidFill>
+                  <a:srgbClr val="FFFFFF"/>
+                </a:solidFill>
+                <a:latin typeface="맑은 고딕"/>
+              </a:rPr>
+              <a:t>•  Switchover와 Failover</a:t>
+            </a:r>
+          </a:p>
+          <a:p>
+            <a:pPr algn="l">
+              <a:spcAft>
+                <a:spcPts val="800"/>
+              </a:spcAft>
+            </a:pPr>
+            <a:r>
+              <a:rPr sz="1600" b="0">
+                <a:solidFill>
+                  <a:srgbClr val="FFFFFF"/>
+                </a:solidFill>
+                <a:latin typeface="맑은 고딕"/>
+              </a:rPr>
+              <a:t>•  Fast-Start Failover</a:t>
+            </a:r>
+          </a:p>
+          <a:p>
+            <a:pPr algn="l">
+              <a:spcAft>
+                <a:spcPts val="800"/>
+              </a:spcAft>
+            </a:pPr>
+            <a:r>
+              <a:rPr sz="1600" b="0">
+                <a:solidFill>
+                  <a:srgbClr val="FFFFFF"/>
+                </a:solidFill>
+                <a:latin typeface="맑은 고딕"/>
+              </a:rPr>
+              <a:t>•  전환과 클라이언트 연결</a:t>
             </a:r>
           </a:p>
         </p:txBody>
@@ -9806,7 +10610,7 @@
         <p:spPr>
           <a:xfrm>
             <a:off x="0" y="0"/>
-            <a:ext cx="12191695" cy="6858000"/>
+            <a:ext cx="12191695" cy="1005840"/>
           </a:xfrm>
           <a:prstGeom prst="rect">
             <a:avLst/>
@@ -9849,8 +10653,8 @@
         </p:nvSpPr>
         <p:spPr>
           <a:xfrm>
-            <a:off x="822960" y="2011680"/>
-            <a:ext cx="10515600" cy="1097280"/>
+            <a:off x="548640" y="91440"/>
+            <a:ext cx="10972800" cy="777240"/>
           </a:xfrm>
           <a:prstGeom prst="rect">
             <a:avLst/>
@@ -9869,13 +10673,13 @@
               </a:spcAft>
             </a:pPr>
             <a:r>
-              <a:rPr sz="4000" b="1">
+              <a:rPr sz="2600" b="1">
                 <a:solidFill>
                   <a:srgbClr val="FFFFFF"/>
                 </a:solidFill>
                 <a:latin typeface="맑은 고딕"/>
               </a:rPr>
-              <a:t>1.6</a:t>
+              <a:t>Switchover와 Failover</a:t>
             </a:r>
           </a:p>
         </p:txBody>
@@ -9888,8 +10692,8 @@
         </p:nvSpPr>
         <p:spPr>
           <a:xfrm>
-            <a:off x="822960" y="3017520"/>
-            <a:ext cx="10515600" cy="914400"/>
+            <a:off x="640080" y="1078992"/>
+            <a:ext cx="10881360" cy="457200"/>
           </a:xfrm>
           <a:prstGeom prst="rect">
             <a:avLst/>
@@ -9908,71 +10712,27 @@
               </a:spcAft>
             </a:pPr>
             <a:r>
-              <a:rPr sz="2800" b="1">
-                <a:solidFill>
-                  <a:srgbClr val="FFFFFF"/>
-                </a:solidFill>
-                <a:latin typeface="맑은 고딕"/>
-              </a:rPr>
-              <a:t>데이터 보호 모드 개요</a:t>
-            </a:r>
-          </a:p>
-        </p:txBody>
-      </p:sp>
-      <p:sp>
-        <p:nvSpPr>
-          <p:cNvPr id="5" name="Rectangle 4"/>
-          <p:cNvSpPr/>
-          <p:nvPr/>
-        </p:nvSpPr>
-        <p:spPr>
-          <a:xfrm>
-            <a:off x="822960" y="4114800"/>
-            <a:ext cx="5486400" cy="54864"/>
-          </a:xfrm>
-          <a:prstGeom prst="rect">
-            <a:avLst/>
-          </a:prstGeom>
-          <a:solidFill>
-            <a:srgbClr val="FFFFFF"/>
-          </a:solidFill>
-          <a:ln>
-            <a:noFill/>
-          </a:ln>
-          <a:effectLst/>
-        </p:spPr>
-        <p:style>
-          <a:lnRef idx="1">
-            <a:schemeClr val="accent1"/>
-          </a:lnRef>
-          <a:fillRef idx="3">
-            <a:schemeClr val="accent1"/>
-          </a:fillRef>
-          <a:effectRef idx="2">
-            <a:schemeClr val="accent1"/>
-          </a:effectRef>
-          <a:fontRef idx="minor">
-            <a:schemeClr val="lt1"/>
-          </a:fontRef>
-        </p:style>
-        <p:txBody>
-          <a:bodyPr rtlCol="0" anchor="ctr"/>
-          <a:lstStyle/>
-          <a:p>
-            <a:pPr algn="ctr"/>
-          </a:p>
-        </p:txBody>
-      </p:sp>
-      <p:sp>
-        <p:nvSpPr>
-          <p:cNvPr id="6" name="TextBox 5"/>
+              <a:rPr sz="1500" b="0">
+                <a:solidFill>
+                  <a:srgbClr val="5A6672"/>
+                </a:solidFill>
+                <a:latin typeface="맑은 고딕"/>
+              </a:rPr>
+              <a:t>계획된 교대와 비상 전환</a:t>
+            </a:r>
+          </a:p>
+        </p:txBody>
+      </p:sp>
+      <p:sp>
+        <p:nvSpPr>
+          <p:cNvPr id="5" name="TextBox 4"/>
           <p:cNvSpPr txBox="1"/>
           <p:nvPr/>
         </p:nvSpPr>
         <p:spPr>
           <a:xfrm>
-            <a:off x="822960" y="4297680"/>
-            <a:ext cx="10058400" cy="2011680"/>
+            <a:off x="640080" y="1737360"/>
+            <a:ext cx="10881360" cy="4754880"/>
           </a:xfrm>
           <a:prstGeom prst="rect">
             <a:avLst/>
@@ -9987,49 +10747,81 @@
           <a:p>
             <a:pPr algn="l">
               <a:spcAft>
-                <a:spcPts val="800"/>
-              </a:spcAft>
-            </a:pPr>
-            <a:r>
-              <a:rPr sz="1600" b="0">
-                <a:solidFill>
-                  <a:srgbClr val="FFFFFF"/>
-                </a:solidFill>
-                <a:latin typeface="맑은 고딕"/>
-              </a:rPr>
-              <a:t>•  Maximum Protection · Availability · Performance</a:t>
-            </a:r>
-          </a:p>
-          <a:p>
-            <a:pPr algn="l">
-              <a:spcAft>
-                <a:spcPts val="800"/>
-              </a:spcAft>
-            </a:pPr>
-            <a:r>
-              <a:rPr sz="1600" b="0">
-                <a:solidFill>
-                  <a:srgbClr val="FFFFFF"/>
-                </a:solidFill>
-                <a:latin typeface="맑은 고딕"/>
-              </a:rPr>
-              <a:t>•  비용 · 가용성 · 성능 · 보호 수준의 균형</a:t>
-            </a:r>
-          </a:p>
-          <a:p>
-            <a:pPr algn="l">
-              <a:spcAft>
-                <a:spcPts val="800"/>
-              </a:spcAft>
-            </a:pPr>
-            <a:r>
-              <a:rPr sz="1600" b="0">
-                <a:solidFill>
-                  <a:srgbClr val="FFFFFF"/>
-                </a:solidFill>
-                <a:latin typeface="맑은 고딕"/>
-              </a:rPr>
-              <a:t>•  상세는 2장에서</a:t>
+                <a:spcPts val="1000"/>
+              </a:spcAft>
+            </a:pPr>
+            <a:r>
+              <a:rPr sz="1700" b="0">
+                <a:solidFill>
+                  <a:srgbClr val="222222"/>
+                </a:solidFill>
+                <a:latin typeface="맑은 고딕"/>
+              </a:rPr>
+              <a:t>•  Switchover: Primary 정상, 데이터 손실 없음</a:t>
+            </a:r>
+          </a:p>
+          <a:p>
+            <a:pPr algn="l">
+              <a:spcAft>
+                <a:spcPts val="1000"/>
+              </a:spcAft>
+            </a:pPr>
+            <a:r>
+              <a:rPr sz="1700" b="0">
+                <a:solidFill>
+                  <a:srgbClr val="222222"/>
+                </a:solidFill>
+                <a:latin typeface="맑은 고딕"/>
+              </a:rPr>
+              <a:t>•  원래 Primary는 자동으로 Standby가 됨</a:t>
+            </a:r>
+          </a:p>
+          <a:p>
+            <a:pPr algn="l">
+              <a:spcAft>
+                <a:spcPts val="1000"/>
+              </a:spcAft>
+            </a:pPr>
+            <a:r>
+              <a:rPr sz="1700" b="0">
+                <a:solidFill>
+                  <a:srgbClr val="222222"/>
+                </a:solidFill>
+                <a:latin typeface="맑은 고딕"/>
+              </a:rPr>
+              <a:t>•  Failover: Primary 장애, 손실은 보호 모드에 따름</a:t>
+            </a:r>
+          </a:p>
+          <a:p>
+            <a:pPr algn="l">
+              <a:spcAft>
+                <a:spcPts val="1000"/>
+              </a:spcAft>
+            </a:pPr>
+            <a:r>
+              <a:rPr sz="1700" b="0">
+                <a:solidFill>
+                  <a:srgbClr val="222222"/>
+                </a:solidFill>
+                <a:latin typeface="맑은 고딕"/>
+              </a:rPr>
+              <a:t>•  원래 Primary는 구성에서 빠짐 → reinstate 또는 재생성</a:t>
+            </a:r>
+          </a:p>
+          <a:p>
+            <a:pPr algn="l">
+              <a:spcAft>
+                <a:spcPts val="1000"/>
+              </a:spcAft>
+            </a:pPr>
+            <a:r>
+              <a:rPr sz="1700" b="0">
+                <a:solidFill>
+                  <a:srgbClr val="222222"/>
+                </a:solidFill>
+                <a:latin typeface="맑은 고딕"/>
+              </a:rPr>
+              <a:t>•  reinstate는 Flashback Database가 전제</a:t>
             </a:r>
           </a:p>
         </p:txBody>
@@ -10130,7 +10922,7 @@
                 </a:solidFill>
                 <a:latin typeface="맑은 고딕"/>
               </a:rPr>
-              <a:t>세 가지 보호 모드</a:t>
+              <a:t>Fast-Start Failover</a:t>
             </a:r>
           </a:p>
         </p:txBody>
@@ -10169,7 +10961,7 @@
                 </a:solidFill>
                 <a:latin typeface="맑은 고딕"/>
               </a:rPr>
-              <a:t>커밋 조건과 장애 시 행동</a:t>
+              <a:t>사람 대신 옵저버가 판단한다</a:t>
             </a:r>
           </a:p>
         </p:txBody>
@@ -10208,7 +11000,7 @@
                 </a:solidFill>
                 <a:latin typeface="맑은 고딕"/>
               </a:rPr>
-              <a:t>•  Maximum Protection: 로컬 + 최소 1대 standby 리두 로그 기록 후 커밋 / 전송 불가 시 Primary 종료</a:t>
+              <a:t>•  Primary 장애 시 지정 Standby로 자동 Failover</a:t>
             </a:r>
           </a:p>
           <a:p>
@@ -10224,7 +11016,7 @@
                 </a:solidFill>
                 <a:latin typeface="맑은 고딕"/>
               </a:rPr>
-              <a:t>•  Maximum Availability: 커밋 조건 동일 / 장애 시 비동기화 모드로 계속 운영 후 자동 복귀</a:t>
+              <a:t>•  Broker 구성에서만 사용</a:t>
             </a:r>
           </a:p>
           <a:p>
@@ -10240,7 +11032,7 @@
                 </a:solidFill>
                 <a:latin typeface="맑은 고딕"/>
               </a:rPr>
-              <a:t>•  Maximum Performance: 로컬 기록만으로 즉시 커밋 / Standby 장애가 Primary에 무영향 (기본값)</a:t>
+              <a:t>•  옵저버는 제3의 서버에 두는 것이 원칙</a:t>
             </a:r>
           </a:p>
           <a:p>
@@ -10256,7 +11048,23 @@
                 </a:solidFill>
                 <a:latin typeface="맑은 고딕"/>
               </a:rPr>
-              <a:t>•  실습 환경은 Maximum Performance</a:t>
+              <a:t>•  옵저버와 Standby가 함께 연결을 잃어야 실행</a:t>
+            </a:r>
+          </a:p>
+          <a:p>
+            <a:pPr algn="l">
+              <a:spcAft>
+                <a:spcPts val="1000"/>
+              </a:spcAft>
+            </a:pPr>
+            <a:r>
+              <a:rPr sz="1700" b="0">
+                <a:solidFill>
+                  <a:srgbClr val="222222"/>
+                </a:solidFill>
+                <a:latin typeface="맑은 고딕"/>
+              </a:rPr>
+              <a:t>•  ADG 옵션 불필요, 원래 Primary는 자동 reinstate 시도</a:t>
             </a:r>
           </a:p>
         </p:txBody>
@@ -10357,7 +11165,7 @@
                 </a:solidFill>
                 <a:latin typeface="맑은 고딕"/>
               </a:rPr>
-              <a:t>PROTECTION_MODE와 PROTECTION_LEVEL</a:t>
+              <a:t>역할 전환과 클라이언트 연결</a:t>
             </a:r>
           </a:p>
         </p:txBody>
@@ -10396,7 +11204,7 @@
                 </a:solidFill>
                 <a:latin typeface="맑은 고딕"/>
               </a:rPr>
-              <a:t>두 열이 따로 있는 이유</a:t>
+              <a:t>애플리케이션은 새 Primary를 어떻게 찾는가</a:t>
             </a:r>
           </a:p>
         </p:txBody>
@@ -10435,7 +11243,7 @@
                 </a:solidFill>
                 <a:latin typeface="맑은 고딕"/>
               </a:rPr>
-              <a:t>•  PROTECTION_MODE: 설정한 모드</a:t>
+              <a:t>•  Primary 주소만 적은 접속 문자열은 전환 뒤 실패</a:t>
             </a:r>
           </a:p>
           <a:p>
@@ -10451,7 +11259,7 @@
                 </a:solidFill>
                 <a:latin typeface="맑은 고딕"/>
               </a:rPr>
-              <a:t>•  PROTECTION_LEVEL: 지금 실제로 달성 중인 수준</a:t>
+              <a:t>•  역할 기반 서비스: Primary 역할일 때만 시작</a:t>
             </a:r>
           </a:p>
           <a:p>
@@ -10467,7 +11275,7 @@
                 </a:solidFill>
                 <a:latin typeface="맑은 고딕"/>
               </a:rPr>
-              <a:t>•  실측에서는 둘 다 MAXIMUM PERFORMANCE로 일치 = 정상</a:t>
+              <a:t>•  접속 기술자에 두 서버 주소를 모두 기재</a:t>
             </a:r>
           </a:p>
           <a:p>
@@ -10483,7 +11291,23 @@
                 </a:solidFill>
                 <a:latin typeface="맑은 고딕"/>
               </a:rPr>
-              <a:t>•  전송이 끊기면 LEVEL만 떨어져 두 값이 어긋난다 → 이상 신호</a:t>
+              <a:t>•  FAN 이벤트로 끊긴 세션을 빨리 정리</a:t>
+            </a:r>
+          </a:p>
+          <a:p>
+            <a:pPr algn="l">
+              <a:spcAft>
+                <a:spcPts val="1000"/>
+              </a:spcAft>
+            </a:pPr>
+            <a:r>
+              <a:rPr sz="1700" b="0">
+                <a:solidFill>
+                  <a:srgbClr val="222222"/>
+                </a:solidFill>
+                <a:latin typeface="맑은 고딕"/>
+              </a:rPr>
+              <a:t>•  연결 설계는 구성과 별개로 미리 준비</a:t>
             </a:r>
           </a:p>
         </p:txBody>
@@ -10515,7 +11339,7 @@
         <p:spPr>
           <a:xfrm>
             <a:off x="0" y="0"/>
-            <a:ext cx="12191695" cy="6858000"/>
+            <a:ext cx="12191695" cy="1005840"/>
           </a:xfrm>
           <a:prstGeom prst="rect">
             <a:avLst/>
@@ -10558,8 +11382,8 @@
         </p:nvSpPr>
         <p:spPr>
           <a:xfrm>
-            <a:off x="822960" y="2011680"/>
-            <a:ext cx="10515600" cy="1097280"/>
+            <a:off x="548640" y="91440"/>
+            <a:ext cx="10972800" cy="777240"/>
           </a:xfrm>
           <a:prstGeom prst="rect">
             <a:avLst/>
@@ -10578,13 +11402,13 @@
               </a:spcAft>
             </a:pPr>
             <a:r>
-              <a:rPr sz="4000" b="1">
+              <a:rPr sz="2600" b="1">
                 <a:solidFill>
                   <a:srgbClr val="FFFFFF"/>
                 </a:solidFill>
                 <a:latin typeface="맑은 고딕"/>
               </a:rPr>
-              <a:t>1.7</a:t>
+              <a:t>사례: 스토리지 장애 앞에서의 선택</a:t>
             </a:r>
           </a:p>
         </p:txBody>
@@ -10597,8 +11421,8 @@
         </p:nvSpPr>
         <p:spPr>
           <a:xfrm>
-            <a:off x="822960" y="3017520"/>
-            <a:ext cx="10515600" cy="914400"/>
+            <a:off x="640080" y="1078992"/>
+            <a:ext cx="10881360" cy="457200"/>
           </a:xfrm>
           <a:prstGeom prst="rect">
             <a:avLst/>
@@ -10617,71 +11441,27 @@
               </a:spcAft>
             </a:pPr>
             <a:r>
-              <a:rPr sz="2800" b="1">
-                <a:solidFill>
-                  <a:srgbClr val="FFFFFF"/>
-                </a:solidFill>
-                <a:latin typeface="맑은 고딕"/>
-              </a:rPr>
-              <a:t>도입 효과와 운영 요건</a:t>
-            </a:r>
-          </a:p>
-        </p:txBody>
-      </p:sp>
-      <p:sp>
-        <p:nvSpPr>
-          <p:cNvPr id="5" name="Rectangle 4"/>
-          <p:cNvSpPr/>
-          <p:nvPr/>
-        </p:nvSpPr>
-        <p:spPr>
-          <a:xfrm>
-            <a:off x="822960" y="4114800"/>
-            <a:ext cx="5486400" cy="54864"/>
-          </a:xfrm>
-          <a:prstGeom prst="rect">
-            <a:avLst/>
-          </a:prstGeom>
-          <a:solidFill>
-            <a:srgbClr val="FFFFFF"/>
-          </a:solidFill>
-          <a:ln>
-            <a:noFill/>
-          </a:ln>
-          <a:effectLst/>
-        </p:spPr>
-        <p:style>
-          <a:lnRef idx="1">
-            <a:schemeClr val="accent1"/>
-          </a:lnRef>
-          <a:fillRef idx="3">
-            <a:schemeClr val="accent1"/>
-          </a:fillRef>
-          <a:effectRef idx="2">
-            <a:schemeClr val="accent1"/>
-          </a:effectRef>
-          <a:fontRef idx="minor">
-            <a:schemeClr val="lt1"/>
-          </a:fontRef>
-        </p:style>
-        <p:txBody>
-          <a:bodyPr rtlCol="0" anchor="ctr"/>
-          <a:lstStyle/>
-          <a:p>
-            <a:pPr algn="ctr"/>
-          </a:p>
-        </p:txBody>
-      </p:sp>
-      <p:sp>
-        <p:nvSpPr>
-          <p:cNvPr id="6" name="TextBox 5"/>
+              <a:rPr sz="1500" b="0">
+                <a:solidFill>
+                  <a:srgbClr val="5A6672"/>
+                </a:solidFill>
+                <a:latin typeface="맑은 고딕"/>
+              </a:rPr>
+              <a:t>복구 네 시간을 기다릴 것인가</a:t>
+            </a:r>
+          </a:p>
+        </p:txBody>
+      </p:sp>
+      <p:sp>
+        <p:nvSpPr>
+          <p:cNvPr id="5" name="TextBox 4"/>
           <p:cNvSpPr txBox="1"/>
           <p:nvPr/>
         </p:nvSpPr>
         <p:spPr>
           <a:xfrm>
-            <a:off x="822960" y="4297680"/>
-            <a:ext cx="10058400" cy="2011680"/>
+            <a:off x="640080" y="1737360"/>
+            <a:ext cx="10881360" cy="4754880"/>
           </a:xfrm>
           <a:prstGeom prst="rect">
             <a:avLst/>
@@ -10696,49 +11476,81 @@
           <a:p>
             <a:pPr algn="l">
               <a:spcAft>
-                <a:spcPts val="800"/>
-              </a:spcAft>
-            </a:pPr>
-            <a:r>
-              <a:rPr sz="1600" b="0">
-                <a:solidFill>
-                  <a:srgbClr val="FFFFFF"/>
-                </a:solidFill>
-                <a:latin typeface="맑은 고딕"/>
-              </a:rPr>
-              <a:t>•  다섯 가지 효과</a:t>
-            </a:r>
-          </a:p>
-          <a:p>
-            <a:pPr algn="l">
-              <a:spcAft>
-                <a:spcPts val="800"/>
-              </a:spcAft>
-            </a:pPr>
-            <a:r>
-              <a:rPr sz="1600" b="0">
-                <a:solidFill>
-                  <a:srgbClr val="FFFFFF"/>
-                </a:solidFill>
-                <a:latin typeface="맑은 고딕"/>
-              </a:rPr>
-              <a:t>•  하드웨어·OS는 달라도 되지만 제약이 많다</a:t>
-            </a:r>
-          </a:p>
-          <a:p>
-            <a:pPr algn="l">
-              <a:spcAft>
-                <a:spcPts val="800"/>
-              </a:spcAft>
-            </a:pPr>
-            <a:r>
-              <a:rPr sz="1600" b="0">
-                <a:solidFill>
-                  <a:srgbClr val="FFFFFF"/>
-                </a:solidFill>
-                <a:latin typeface="맑은 고딕"/>
-              </a:rPr>
-              <a:t>•  소프트웨어 요건은 엄격하다</a:t>
+                <a:spcPts val="1000"/>
+              </a:spcAft>
+            </a:pPr>
+            <a:r>
+              <a:rPr sz="1700" b="0">
+                <a:solidFill>
+                  <a:srgbClr val="222222"/>
+                </a:solidFill>
+                <a:latin typeface="맑은 고딕"/>
+              </a:rPr>
+              <a:t>•  새벽, Primary 스토리지 컨트롤러 고장</a:t>
+            </a:r>
+          </a:p>
+          <a:p>
+            <a:pPr algn="l">
+              <a:spcAft>
+                <a:spcPts val="1000"/>
+              </a:spcAft>
+            </a:pPr>
+            <a:r>
+              <a:rPr sz="1700" b="0">
+                <a:solidFill>
+                  <a:srgbClr val="222222"/>
+                </a:solidFill>
+                <a:latin typeface="맑은 고딕"/>
+              </a:rPr>
+              <a:t>•  Switchover는 불가: Primary가 정상이 아님</a:t>
+            </a:r>
+          </a:p>
+          <a:p>
+            <a:pPr algn="l">
+              <a:spcAft>
+                <a:spcPts val="1000"/>
+              </a:spcAft>
+            </a:pPr>
+            <a:r>
+              <a:rPr sz="1700" b="0">
+                <a:solidFill>
+                  <a:srgbClr val="222222"/>
+                </a:solidFill>
+                <a:latin typeface="맑은 고딕"/>
+              </a:rPr>
+              <a:t>•  transport lag로 잃을 양, apply lag로 걸릴 시간 판단</a:t>
+            </a:r>
+          </a:p>
+          <a:p>
+            <a:pPr algn="l">
+              <a:spcAft>
+                <a:spcPts val="1000"/>
+              </a:spcAft>
+            </a:pPr>
+            <a:r>
+              <a:rPr sz="1700" b="0">
+                <a:solidFill>
+                  <a:srgbClr val="222222"/>
+                </a:solidFill>
+                <a:latin typeface="맑은 고딕"/>
+              </a:rPr>
+              <a:t>•  Maximum Availability였다면 무손실 Failover</a:t>
+            </a:r>
+          </a:p>
+          <a:p>
+            <a:pPr algn="l">
+              <a:spcAft>
+                <a:spcPts val="1000"/>
+              </a:spcAft>
+            </a:pPr>
+            <a:r>
+              <a:rPr sz="1700" b="0">
+                <a:solidFill>
+                  <a:srgbClr val="222222"/>
+                </a:solidFill>
+                <a:latin typeface="맑은 고딕"/>
+              </a:rPr>
+              <a:t>•  수리 후 reinstate 또는 Standby 재생성</a:t>
             </a:r>
           </a:p>
         </p:txBody>
@@ -10839,7 +11651,7 @@
                 </a:solidFill>
                 <a:latin typeface="맑은 고딕"/>
               </a:rPr>
-              <a:t>이 장의 구성 (Agenda)</a:t>
+              <a:t>Agenda</a:t>
             </a:r>
           </a:p>
         </p:txBody>
@@ -10878,7 +11690,7 @@
                 </a:solidFill>
                 <a:latin typeface="맑은 고딕"/>
               </a:rPr>
-              <a:t>•  1.2  Data Guard란 무엇인가</a:t>
+              <a:t>•  1.2  Data Guard가 해결하는 문제  /  1.3  구성 요소</a:t>
             </a:r>
           </a:p>
           <a:p>
@@ -10894,7 +11706,7 @@
                 </a:solidFill>
                 <a:latin typeface="맑은 고딕"/>
               </a:rPr>
-              <a:t>•  1.3  Standby 데이터베이스의 세 유형</a:t>
+              <a:t>•  1.4  리두 전송 서비스와 적용 서비스</a:t>
             </a:r>
           </a:p>
           <a:p>
@@ -10910,7 +11722,7 @@
                 </a:solidFill>
                 <a:latin typeface="맑은 고딕"/>
               </a:rPr>
-              <a:t>•  1.4  Data Guard가 제공하는 세 가지 서비스</a:t>
+              <a:t>•  1.5  역할 전환  /  1.6  Broker와 관리 도구</a:t>
             </a:r>
           </a:p>
           <a:p>
@@ -10926,7 +11738,7 @@
                 </a:solidFill>
                 <a:latin typeface="맑은 고딕"/>
               </a:rPr>
-              <a:t>•  1.5  아키텍처 — 프로세스 지도</a:t>
+              <a:t>•  1.7  Active Data Guard 옵션과 라이선스 경계</a:t>
             </a:r>
           </a:p>
           <a:p>
@@ -10942,7 +11754,7 @@
                 </a:solidFill>
                 <a:latin typeface="맑은 고딕"/>
               </a:rPr>
-              <a:t>•  1.6  데이터 보호 모드 개요</a:t>
+              <a:t>•  1.8  구성 요건과 사전 점검</a:t>
             </a:r>
           </a:p>
           <a:p>
@@ -10958,39 +11770,7 @@
                 </a:solidFill>
                 <a:latin typeface="맑은 고딕"/>
               </a:rPr>
-              <a:t>•  1.7  도입 효과와 운영 요건</a:t>
-            </a:r>
-          </a:p>
-          <a:p>
-            <a:pPr algn="l">
-              <a:spcAft>
-                <a:spcPts val="1000"/>
-              </a:spcAft>
-            </a:pPr>
-            <a:r>
-              <a:rPr sz="1600" b="0">
-                <a:solidFill>
-                  <a:srgbClr val="222222"/>
-                </a:solidFill>
-                <a:latin typeface="맑은 고딕"/>
-              </a:rPr>
-              <a:t>•  1.8  라이선스 경계 — EE 기본과 ADG 옵션</a:t>
-            </a:r>
-          </a:p>
-          <a:p>
-            <a:pPr algn="l">
-              <a:spcAft>
-                <a:spcPts val="1000"/>
-              </a:spcAft>
-            </a:pPr>
-            <a:r>
-              <a:rPr sz="1600" b="0">
-                <a:solidFill>
-                  <a:srgbClr val="222222"/>
-                </a:solidFill>
-                <a:latin typeface="맑은 고딕"/>
-              </a:rPr>
-              <a:t>•  1.9  구성을 관리하는 두 가지 방법</a:t>
+              <a:t>•  1.9  다른 고가용성 기술과의 비교  /  1.10  운영 시 주의점</a:t>
             </a:r>
           </a:p>
         </p:txBody>
@@ -11022,7 +11802,7 @@
         <p:spPr>
           <a:xfrm>
             <a:off x="0" y="0"/>
-            <a:ext cx="12191695" cy="1005840"/>
+            <a:ext cx="12191695" cy="6858000"/>
           </a:xfrm>
           <a:prstGeom prst="rect">
             <a:avLst/>
@@ -11065,8 +11845,8 @@
         </p:nvSpPr>
         <p:spPr>
           <a:xfrm>
-            <a:off x="548640" y="91440"/>
-            <a:ext cx="10972800" cy="777240"/>
+            <a:off x="822960" y="2011680"/>
+            <a:ext cx="10515600" cy="1097280"/>
           </a:xfrm>
           <a:prstGeom prst="rect">
             <a:avLst/>
@@ -11085,13 +11865,13 @@
               </a:spcAft>
             </a:pPr>
             <a:r>
-              <a:rPr sz="2600" b="1">
+              <a:rPr sz="4000" b="1">
                 <a:solidFill>
                   <a:srgbClr val="FFFFFF"/>
                 </a:solidFill>
                 <a:latin typeface="맑은 고딕"/>
               </a:rPr>
-              <a:t>도입 효과 다섯 가지</a:t>
+              <a:t>1.6</a:t>
             </a:r>
           </a:p>
         </p:txBody>
@@ -11104,8 +11884,8 @@
         </p:nvSpPr>
         <p:spPr>
           <a:xfrm>
-            <a:off x="640080" y="1078992"/>
-            <a:ext cx="10881360" cy="457200"/>
+            <a:off x="822960" y="3017520"/>
+            <a:ext cx="10515600" cy="914400"/>
           </a:xfrm>
           <a:prstGeom prst="rect">
             <a:avLst/>
@@ -11124,27 +11904,71 @@
               </a:spcAft>
             </a:pPr>
             <a:r>
-              <a:rPr sz="1500" b="0">
-                <a:solidFill>
-                  <a:srgbClr val="5A6672"/>
-                </a:solidFill>
-                <a:latin typeface="맑은 고딕"/>
-              </a:rPr>
-              <a:t>무엇을 얻는가</a:t>
-            </a:r>
-          </a:p>
-        </p:txBody>
-      </p:sp>
-      <p:sp>
-        <p:nvSpPr>
-          <p:cNvPr id="5" name="TextBox 4"/>
+              <a:rPr sz="2800" b="1">
+                <a:solidFill>
+                  <a:srgbClr val="FFFFFF"/>
+                </a:solidFill>
+                <a:latin typeface="맑은 고딕"/>
+              </a:rPr>
+              <a:t>Data Guard Broker와 관리 도구</a:t>
+            </a:r>
+          </a:p>
+        </p:txBody>
+      </p:sp>
+      <p:sp>
+        <p:nvSpPr>
+          <p:cNvPr id="5" name="Rectangle 4"/>
+          <p:cNvSpPr/>
+          <p:nvPr/>
+        </p:nvSpPr>
+        <p:spPr>
+          <a:xfrm>
+            <a:off x="822960" y="4114800"/>
+            <a:ext cx="5486400" cy="54864"/>
+          </a:xfrm>
+          <a:prstGeom prst="rect">
+            <a:avLst/>
+          </a:prstGeom>
+          <a:solidFill>
+            <a:srgbClr val="FFFFFF"/>
+          </a:solidFill>
+          <a:ln>
+            <a:noFill/>
+          </a:ln>
+          <a:effectLst/>
+        </p:spPr>
+        <p:style>
+          <a:lnRef idx="1">
+            <a:schemeClr val="accent1"/>
+          </a:lnRef>
+          <a:fillRef idx="3">
+            <a:schemeClr val="accent1"/>
+          </a:fillRef>
+          <a:effectRef idx="2">
+            <a:schemeClr val="accent1"/>
+          </a:effectRef>
+          <a:fontRef idx="minor">
+            <a:schemeClr val="lt1"/>
+          </a:fontRef>
+        </p:style>
+        <p:txBody>
+          <a:bodyPr rtlCol="0" anchor="ctr"/>
+          <a:lstStyle/>
+          <a:p>
+            <a:pPr algn="ctr"/>
+          </a:p>
+        </p:txBody>
+      </p:sp>
+      <p:sp>
+        <p:nvSpPr>
+          <p:cNvPr id="6" name="TextBox 5"/>
           <p:cNvSpPr txBox="1"/>
           <p:nvPr/>
         </p:nvSpPr>
         <p:spPr>
           <a:xfrm>
-            <a:off x="640080" y="1737360"/>
-            <a:ext cx="10881360" cy="4754880"/>
+            <a:off x="822960" y="4297680"/>
+            <a:ext cx="10058400" cy="2011680"/>
           </a:xfrm>
           <a:prstGeom prst="rect">
             <a:avLst/>
@@ -11159,81 +11983,49 @@
           <a:p>
             <a:pPr algn="l">
               <a:spcAft>
-                <a:spcPts val="1000"/>
-              </a:spcAft>
-            </a:pPr>
-            <a:r>
-              <a:rPr sz="1700" b="0">
-                <a:solidFill>
-                  <a:srgbClr val="222222"/>
-                </a:solidFill>
-                <a:latin typeface="맑은 고딕"/>
-              </a:rPr>
-              <a:t>•  지속적인 서비스: Switchover·Failover로 재해가 업무 중단으로 이어지지 않는다</a:t>
-            </a:r>
-          </a:p>
-          <a:p>
-            <a:pPr algn="l">
-              <a:spcAft>
-                <a:spcPts val="1000"/>
-              </a:spcAft>
-            </a:pPr>
-            <a:r>
-              <a:rPr sz="1700" b="0">
-                <a:solidFill>
-                  <a:srgbClr val="222222"/>
-                </a:solidFill>
-                <a:latin typeface="맑은 고딕"/>
-              </a:rPr>
-              <a:t>•  완전한 데이터 보호: 보호 모드에 따라 무손실 보장, 적용 시 리두 검증</a:t>
-            </a:r>
-          </a:p>
-          <a:p>
-            <a:pPr algn="l">
-              <a:spcAft>
-                <a:spcPts val="1000"/>
-              </a:spcAft>
-            </a:pPr>
-            <a:r>
-              <a:rPr sz="1700" b="0">
-                <a:solidFill>
-                  <a:srgbClr val="222222"/>
-                </a:solidFill>
-                <a:latin typeface="맑은 고딕"/>
-              </a:rPr>
-              <a:t>•  유휴 장비의 제거: Standby를 조회·리포팅·백업 소스로 활용</a:t>
-            </a:r>
-          </a:p>
-          <a:p>
-            <a:pPr algn="l">
-              <a:spcAft>
-                <a:spcPts val="1000"/>
-              </a:spcAft>
-            </a:pPr>
-            <a:r>
-              <a:rPr sz="1700" b="0">
-                <a:solidFill>
-                  <a:srgbClr val="222222"/>
-                </a:solidFill>
-                <a:latin typeface="맑은 고딕"/>
-              </a:rPr>
-              <a:t>•  유연한 구성: 보호 모드와 파라미터로 요구 사항에 맞게 조절</a:t>
-            </a:r>
-          </a:p>
-          <a:p>
-            <a:pPr algn="l">
-              <a:spcAft>
-                <a:spcPts val="1000"/>
-              </a:spcAft>
-            </a:pPr>
-            <a:r>
-              <a:rPr sz="1700" b="0">
-                <a:solidFill>
-                  <a:srgbClr val="222222"/>
-                </a:solidFill>
-                <a:latin typeface="맑은 고딕"/>
-              </a:rPr>
-              <a:t>•  중앙 집중 관리: Broker와 Enterprise Manager</a:t>
+                <a:spcPts val="800"/>
+              </a:spcAft>
+            </a:pPr>
+            <a:r>
+              <a:rPr sz="1600" b="0">
+                <a:solidFill>
+                  <a:srgbClr val="FFFFFF"/>
+                </a:solidFill>
+                <a:latin typeface="맑은 고딕"/>
+              </a:rPr>
+              <a:t>•  Broker의 구조</a:t>
+            </a:r>
+          </a:p>
+          <a:p>
+            <a:pPr algn="l">
+              <a:spcAft>
+                <a:spcPts val="800"/>
+              </a:spcAft>
+            </a:pPr>
+            <a:r>
+              <a:rPr sz="1600" b="0">
+                <a:solidFill>
+                  <a:srgbClr val="FFFFFF"/>
+                </a:solidFill>
+                <a:latin typeface="맑은 고딕"/>
+              </a:rPr>
+              <a:t>•  관리 인터페이스 선택</a:t>
+            </a:r>
+          </a:p>
+          <a:p>
+            <a:pPr algn="l">
+              <a:spcAft>
+                <a:spcPts val="800"/>
+              </a:spcAft>
+            </a:pPr>
+            <a:r>
+              <a:rPr sz="1600" b="0">
+                <a:solidFill>
+                  <a:srgbClr val="FFFFFF"/>
+                </a:solidFill>
+                <a:latin typeface="맑은 고딕"/>
+              </a:rPr>
+              <a:t>•  Broker 구성에서의 운영 규칙</a:t>
             </a:r>
           </a:p>
         </p:txBody>
@@ -11334,7 +12126,7 @@
                 </a:solidFill>
                 <a:latin typeface="맑은 고딕"/>
               </a:rPr>
-              <a:t>하드웨어·OS 요건</a:t>
+              <a:t>Broker의 구조</a:t>
             </a:r>
           </a:p>
         </p:txBody>
@@ -11373,7 +12165,7 @@
                 </a:solidFill>
                 <a:latin typeface="맑은 고딕"/>
               </a:rPr>
-              <a:t>달라도 되지만 제약이 많다</a:t>
+              <a:t>DMON과 구성 파일</a:t>
             </a:r>
           </a:p>
         </p:txBody>
@@ -11412,7 +12204,7 @@
                 </a:solidFill>
                 <a:latin typeface="맑은 고딕"/>
               </a:rPr>
-              <a:t>•  CPU 개수·메모리·저장 장치 구성이 달라도 된다</a:t>
+              <a:t>•  생성·유지·감시를 자동화하는 분산 관리 프레임워크</a:t>
             </a:r>
           </a:p>
           <a:p>
@@ -11428,7 +12220,7 @@
                 </a:solidFill>
                 <a:latin typeface="맑은 고딕"/>
               </a:rPr>
-              <a:t>•  운영체제와 바이너리(32/64비트)도 다를 수 있다</a:t>
+              <a:t>•  EE에 포함, 별도 라이선스 없음</a:t>
             </a:r>
           </a:p>
           <a:p>
@@ -11444,7 +12236,7 @@
                 </a:solidFill>
                 <a:latin typeface="맑은 고딕"/>
               </a:rPr>
-              <a:t>•  그러나 혼합 플랫폼 지원에는 제약이 많다</a:t>
+              <a:t>•  인스턴스마다 DMON 프로세스가 상태 교환</a:t>
             </a:r>
           </a:p>
           <a:p>
@@ -11460,7 +12252,23 @@
                 </a:solidFill>
                 <a:latin typeface="맑은 고딕"/>
               </a:rPr>
-              <a:t>•  반드시 확인: My Oracle Support 413484.1(physical) / 1085687.1(logical)</a:t>
+              <a:t>•  구성 정보는 DG_BROKER_CONFIG_FILE1·2에 저장</a:t>
+            </a:r>
+          </a:p>
+          <a:p>
+            <a:pPr algn="l">
+              <a:spcAft>
+                <a:spcPts val="1000"/>
+              </a:spcAft>
+            </a:pPr>
+            <a:r>
+              <a:rPr sz="1700" b="0">
+                <a:solidFill>
+                  <a:srgbClr val="222222"/>
+                </a:solidFill>
+                <a:latin typeface="맑은 고딕"/>
+              </a:rPr>
+              <a:t>•  DG_BROKER_START=TRUE로 기동, FSFO·FAN의 기반</a:t>
             </a:r>
           </a:p>
         </p:txBody>
@@ -11561,7 +12369,7 @@
                 </a:solidFill>
                 <a:latin typeface="맑은 고딕"/>
               </a:rPr>
-              <a:t>소프트웨어 요건</a:t>
+              <a:t>관리 인터페이스 선택</a:t>
             </a:r>
           </a:p>
         </p:txBody>
@@ -11600,7 +12408,7 @@
                 </a:solidFill>
                 <a:latin typeface="맑은 고딕"/>
               </a:rPr>
-              <a:t>여기는 엄격하다</a:t>
+              <a:t>DGMGRL, EM, SQL</a:t>
             </a:r>
           </a:p>
         </p:txBody>
@@ -11639,7 +12447,7 @@
                 </a:solidFill>
                 <a:latin typeface="맑은 고딕"/>
               </a:rPr>
-              <a:t>•  구성의 모든 DB에 같은 릴리스의 Enterprise Edition (예외: logical standby 롤링 업그레이드)</a:t>
+              <a:t>•  Broker 구성: DGMGRL 명령줄</a:t>
             </a:r>
           </a:p>
           <a:p>
@@ -11655,7 +12463,7 @@
                 </a:solidFill>
                 <a:latin typeface="맑은 고딕"/>
               </a:rPr>
-              <a:t>•  Data Guard는 Enterprise Edition 전용. Standard Edition 불가</a:t>
+              <a:t>•  Broker 구성: Enterprise Manager Cloud Control</a:t>
             </a:r>
           </a:p>
           <a:p>
@@ -11671,7 +12479,7 @@
                 </a:solidFill>
                 <a:latin typeface="맑은 고딕"/>
               </a:rPr>
-              <a:t>•  ASM·OMF를 쓴다면 구성 전체에서 대칭적으로 사용</a:t>
+              <a:t>•  Broker 구성에서도 조회는 SQL로 가능</a:t>
             </a:r>
           </a:p>
           <a:p>
@@ -11687,7 +12495,23 @@
                 </a:solidFill>
                 <a:latin typeface="맑은 고딕"/>
               </a:rPr>
-              <a:t>•  예외: Data Guard를 ASM/OMF 이행 수단으로 쓰는 경우</a:t>
+              <a:t>•  Broker 미사용: SQL 명령과 파라미터만 사용</a:t>
+            </a:r>
+          </a:p>
+          <a:p>
+            <a:pPr algn="l">
+              <a:spcAft>
+                <a:spcPts val="1000"/>
+              </a:spcAft>
+            </a:pPr>
+            <a:r>
+              <a:rPr sz="1700" b="0">
+                <a:solidFill>
+                  <a:srgbClr val="222222"/>
+                </a:solidFill>
+                <a:latin typeface="맑은 고딕"/>
+              </a:rPr>
+              <a:t>•  이 과정: SQL로 원리 → 13장부터 Broker</a:t>
             </a:r>
           </a:p>
         </p:txBody>
@@ -11788,7 +12612,7 @@
                 </a:solidFill>
                 <a:latin typeface="맑은 고딕"/>
               </a:rPr>
-              <a:t>구성 전 점검표 — 실측</a:t>
+              <a:t>Broker가 맡는 일과 SQL로 하는 일</a:t>
             </a:r>
           </a:p>
         </p:txBody>
@@ -11827,7 +12651,7 @@
                 </a:solidFill>
                 <a:latin typeface="맑은 고딕"/>
               </a:rPr>
-              <a:t>무엇이 같아야 하고 무엇은 달라도 되는가</a:t>
+              <a:t>같은 작업, 다른 경로</a:t>
             </a:r>
           </a:p>
         </p:txBody>
@@ -11866,7 +12690,7 @@
                 </a:solidFill>
                 <a:latin typeface="맑은 고딕"/>
               </a:rPr>
-              <a:t>•  같아야 함: 릴리스 19.3.0.0.0 EE / 플랫폼 ID 13 Linux x86 64-bit Little / AL32UTF8 / DBTIMEZONE +00:00</a:t>
+              <a:t>•  전송 목적지: 속성 지정 vs LOG_ARCHIVE_DEST_n</a:t>
             </a:r>
           </a:p>
           <a:p>
@@ -11882,7 +12706,7 @@
                 </a:solidFill>
                 <a:latin typeface="맑은 고딕"/>
               </a:rPr>
-              <a:t>•  같아야 함: db_name chicago, db_block_size 8192, compatible 19.0.0, db_files 200</a:t>
+              <a:t>•  적용 기동: SET STATE vs RECOVER MANAGED STANDBY</a:t>
             </a:r>
           </a:p>
           <a:p>
@@ -11898,7 +12722,7 @@
                 </a:solidFill>
                 <a:latin typeface="맑은 고딕"/>
               </a:rPr>
-              <a:t>•  같아야 함: remote_login_passwordfile = EXCLUSIVE</a:t>
+              <a:t>•  점검: VALIDATE DATABASE vs 여러 V$ 뷰</a:t>
             </a:r>
           </a:p>
           <a:p>
@@ -11914,7 +12738,7 @@
                 </a:solidFill>
                 <a:latin typeface="맑은 고딕"/>
               </a:rPr>
-              <a:t>•  달라야 함: db_unique_name (chicago / boston)</a:t>
+              <a:t>•  Standby 생성 자체는 Broker 밖에서</a:t>
             </a:r>
           </a:p>
           <a:p>
@@ -11930,7 +12754,7 @@
                 </a:solidFill>
                 <a:latin typeface="맑은 고딕"/>
               </a:rPr>
-              <a:t>•  무관: SESSIONTIMEZONE(+09:00은 클라이언트 설정), 하드웨어 사양</a:t>
+              <a:t>•  Broker 구성에서는 SQL로 설정을 바꾸지 않는다</a:t>
             </a:r>
           </a:p>
         </p:txBody>
@@ -12031,7 +12855,7 @@
                 </a:solidFill>
                 <a:latin typeface="맑은 고딕"/>
               </a:rPr>
-              <a:t>1.8</a:t>
+              <a:t>1.7</a:t>
             </a:r>
           </a:p>
         </p:txBody>
@@ -12070,7 +12894,7 @@
                 </a:solidFill>
                 <a:latin typeface="맑은 고딕"/>
               </a:rPr>
-              <a:t>라이선스 경계 — EE 기본과 ADG 옵션</a:t>
+              <a:t>Active Data Guard 옵션과 라이선스 경계</a:t>
             </a:r>
           </a:p>
         </p:txBody>
@@ -12153,7 +12977,7 @@
                 </a:solidFill>
                 <a:latin typeface="맑은 고딕"/>
               </a:rPr>
-              <a:t>•  이름에 ADG가 들어가지만 대부분은 EE 기본으로 실습 가능</a:t>
+              <a:t>•  EE 기본 기능과 옵션 기능</a:t>
             </a:r>
           </a:p>
           <a:p>
@@ -12169,7 +12993,7 @@
                 </a:solidFill>
                 <a:latin typeface="맑은 고딕"/>
               </a:rPr>
-              <a:t>•  옵션이 필요한 것은 9장과 10장뿐</a:t>
+              <a:t>•  옵션 기능의 쓰임새</a:t>
             </a:r>
           </a:p>
           <a:p>
@@ -12185,7 +13009,7 @@
                 </a:solidFill>
                 <a:latin typeface="맑은 고딕"/>
               </a:rPr>
-              <a:t>•  사용 이력 조회에는 함정이 있다</a:t>
+              <a:t>•  사용 여부 확인과 문서화</a:t>
             </a:r>
           </a:p>
         </p:txBody>
@@ -12286,7 +13110,7 @@
                 </a:solidFill>
                 <a:latin typeface="맑은 고딕"/>
               </a:rPr>
-              <a:t>무엇이 Active Data Guard 옵션인가</a:t>
+              <a:t>기본 Data Guard와 옵션 기능</a:t>
             </a:r>
           </a:p>
         </p:txBody>
@@ -12325,7 +13149,7 @@
                 </a:solidFill>
                 <a:latin typeface="맑은 고딕"/>
               </a:rPr>
-              <a:t>경계를 분명히 한다</a:t>
+              <a:t>기준은 적용하면서 여는가</a:t>
             </a:r>
           </a:p>
         </p:txBody>
@@ -12364,7 +13188,7 @@
                 </a:solidFill>
                 <a:latin typeface="맑은 고딕"/>
               </a:rPr>
-              <a:t>•  EE 기본: physical standby 생성·Redo Apply(4~8장), 역할 전환(16장)</a:t>
+              <a:t>•  EE 기본: Physical·Logical·Snapshot, Broker, FSFO</a:t>
             </a:r>
           </a:p>
           <a:p>
@@ -12380,7 +13204,7 @@
                 </a:solidFill>
                 <a:latin typeface="맑은 고딕"/>
               </a:rPr>
-              <a:t>•  EE 기본: logical standby(12장), snapshot standby(11장), Broker·DGMGRL(13~15장)</a:t>
+              <a:t>•  EE 기본: 적용을 멈춘 READ ONLY 조회</a:t>
             </a:r>
           </a:p>
           <a:p>
@@ -12396,7 +13220,7 @@
                 </a:solidFill>
                 <a:latin typeface="맑은 고딕"/>
               </a:rPr>
-              <a:t>•  ADG 옵션: Real-Time Query — standby를 열고 조회 (9장)</a:t>
+              <a:t>•  옵션: Real-Time Query (READ ONLY WITH APPLY)</a:t>
             </a:r>
           </a:p>
           <a:p>
@@ -12412,7 +13236,23 @@
                 </a:solidFill>
                 <a:latin typeface="맑은 고딕"/>
               </a:rPr>
-              <a:t>•  ADG 옵션: DML 리다이렉션(9장), Far Sync(10장), Standby In-Memory(9장)</a:t>
+              <a:t>•  옵션: DML 리다이렉션, Far Sync, 실시간 캐스케이딩</a:t>
+            </a:r>
+          </a:p>
+          <a:p>
+            <a:pPr algn="l">
+              <a:spcAft>
+                <a:spcPts val="1000"/>
+              </a:spcAft>
+            </a:pPr>
+            <a:r>
+              <a:rPr sz="1700" b="0">
+                <a:solidFill>
+                  <a:srgbClr val="222222"/>
+                </a:solidFill>
+                <a:latin typeface="맑은 고딕"/>
+              </a:rPr>
+              <a:t>•  옵션: 자동 블록 복구, Standby 블록 변경 추적</a:t>
             </a:r>
           </a:p>
         </p:txBody>
@@ -12513,7 +13353,7 @@
                 </a:solidFill>
                 <a:latin typeface="맑은 고딕"/>
               </a:rPr>
-              <a:t>사용 이력 확인의 함정</a:t>
+              <a:t>옵션 기능의 쓰임새</a:t>
             </a:r>
           </a:p>
         </p:txBody>
@@ -12552,7 +13392,7 @@
                 </a:solidFill>
                 <a:latin typeface="맑은 고딕"/>
               </a:rPr>
-              <a:t>실측에서 만난 두 가지</a:t>
+              <a:t>무엇을 위해 사는 옵션인가</a:t>
             </a:r>
           </a:p>
         </p:txBody>
@@ -12591,7 +13431,7 @@
                 </a:solidFill>
                 <a:latin typeface="맑은 고딕"/>
               </a:rPr>
-              <a:t>•  DBA_FEATURE_USAGE_STATISTICS 조회 → 0행. 조건을 빼도 COUNT(*)=0</a:t>
+              <a:t>•  Real-Time Query: 보고·조회 업무를 Standby로</a:t>
             </a:r>
           </a:p>
           <a:p>
@@ -12607,7 +13447,7 @@
                 </a:solidFill>
                 <a:latin typeface="맑은 고딕"/>
               </a:rPr>
-              <a:t>•  원인: CDB 환경에서 수집 결과가 PDB 컨테이너에 있었다</a:t>
+              <a:t>•  DML 리다이렉션: 조회 위주 앱의 가끔 있는 쓰기</a:t>
             </a:r>
           </a:p>
           <a:p>
@@ -12623,7 +13463,7 @@
                 </a:solidFill>
                 <a:latin typeface="맑은 고딕"/>
               </a:rPr>
-              <a:t>•  조치: CDB_FEATURE_USAGE_STATISTICS → 243행, 전부 CON_ID=3 (chicago_pdb1)</a:t>
+              <a:t>•  GTT·PTT 갱신: 임시 결과를 쓰는 보고서</a:t>
             </a:r>
           </a:p>
           <a:p>
@@ -12639,7 +13479,7 @@
                 </a:solidFill>
                 <a:latin typeface="맑은 고딕"/>
               </a:rPr>
-              <a:t>•  기능명: 'Data Guard' / 'Active Data Guard - Real-Time Query on Physical Standby'</a:t>
+              <a:t>•  Far Sync: 원거리 무손실 보호</a:t>
             </a:r>
           </a:p>
           <a:p>
@@ -12655,7 +13495,7 @@
                 </a:solidFill>
                 <a:latin typeface="맑은 고딕"/>
               </a:rPr>
-              <a:t>•  그런데 DETECTED_USAGES는 양쪽 모두 0 — ADG를 실제로 쓰고 있는데도</a:t>
+              <a:t>•  블록 변경 추적: Standby 증분 백업 가속</a:t>
             </a:r>
           </a:p>
         </p:txBody>
@@ -12756,7 +13596,7 @@
                 </a:solidFill>
                 <a:latin typeface="맑은 고딕"/>
               </a:rPr>
-              <a:t>그렇다면 무엇으로 판정하는가</a:t>
+              <a:t>옵션 기능은 잠겨 있지 않다</a:t>
             </a:r>
           </a:p>
         </p:txBody>
@@ -12795,7 +13635,7 @@
                 </a:solidFill>
                 <a:latin typeface="맑은 고딕"/>
               </a:rPr>
-              <a:t>가장 확실한 근거</a:t>
+              <a:t>명령은 성공하고, 책임은 남는다</a:t>
             </a:r>
           </a:p>
         </p:txBody>
@@ -12834,7 +13674,7 @@
                 </a:solidFill>
                 <a:latin typeface="맑은 고딕"/>
               </a:rPr>
-              <a:t>•  1차 근거: Standby의 V$DATABASE.OPEN_MODE</a:t>
+              <a:t>•  라이선스 없이도 READ ONLY WITH APPLY 명령은 성공</a:t>
             </a:r>
           </a:p>
           <a:p>
@@ -12850,7 +13690,7 @@
                 </a:solidFill>
                 <a:latin typeface="맑은 고딕"/>
               </a:rPr>
-              <a:t>•  READ ONLY WITH APPLY → Active Data Guard 사용 중</a:t>
+              <a:t>•  적용 중지 → OPEN → 적용 재기동 순서면 바로 옵션 사용</a:t>
             </a:r>
           </a:p>
           <a:p>
@@ -12866,7 +13706,7 @@
                 </a:solidFill>
                 <a:latin typeface="맑은 고딕"/>
               </a:rPr>
-              <a:t>•  MOUNTED → 옵션 미사용</a:t>
+              <a:t>•  장애 대응·점검 중 무심코 실행되기 쉬움</a:t>
             </a:r>
           </a:p>
           <a:p>
@@ -12882,7 +13722,7 @@
                 </a:solidFill>
                 <a:latin typeface="맑은 고딕"/>
               </a:rPr>
-              <a:t>•  2차 근거: V$VERSION 배너의 Enterprise Edition 여부</a:t>
+              <a:t>•  옵션 미보유 사이트는 MOUNT 기동을 절차서에 명시</a:t>
             </a:r>
           </a:p>
           <a:p>
@@ -12898,7 +13738,7 @@
                 </a:solidFill>
                 <a:latin typeface="맑은 고딕"/>
               </a:rPr>
-              <a:t>•  주의: V$OPTION의 TRUE는 "바이너리에 링크됨"일 뿐 라이선스 보유를 뜻하지 않는다</a:t>
+              <a:t>•  보유 여부를 운영 문서 첫 장에 기록</a:t>
             </a:r>
           </a:p>
         </p:txBody>
@@ -12930,7 +13770,7 @@
         <p:spPr>
           <a:xfrm>
             <a:off x="0" y="0"/>
-            <a:ext cx="12191695" cy="6858000"/>
+            <a:ext cx="12191695" cy="1005840"/>
           </a:xfrm>
           <a:prstGeom prst="rect">
             <a:avLst/>
@@ -12973,8 +13813,8 @@
         </p:nvSpPr>
         <p:spPr>
           <a:xfrm>
-            <a:off x="822960" y="2011680"/>
-            <a:ext cx="10515600" cy="1097280"/>
+            <a:off x="548640" y="91440"/>
+            <a:ext cx="10972800" cy="777240"/>
           </a:xfrm>
           <a:prstGeom prst="rect">
             <a:avLst/>
@@ -12993,13 +13833,13 @@
               </a:spcAft>
             </a:pPr>
             <a:r>
-              <a:rPr sz="4000" b="1">
+              <a:rPr sz="2600" b="1">
                 <a:solidFill>
                   <a:srgbClr val="FFFFFF"/>
                 </a:solidFill>
                 <a:latin typeface="맑은 고딕"/>
               </a:rPr>
-              <a:t>1.9</a:t>
+              <a:t>사용 여부 확인</a:t>
             </a:r>
           </a:p>
         </p:txBody>
@@ -13012,8 +13852,8 @@
         </p:nvSpPr>
         <p:spPr>
           <a:xfrm>
-            <a:off x="822960" y="3017520"/>
-            <a:ext cx="10515600" cy="914400"/>
+            <a:off x="640080" y="1078992"/>
+            <a:ext cx="10881360" cy="457200"/>
           </a:xfrm>
           <a:prstGeom prst="rect">
             <a:avLst/>
@@ -13032,71 +13872,27 @@
               </a:spcAft>
             </a:pPr>
             <a:r>
-              <a:rPr sz="2800" b="1">
-                <a:solidFill>
-                  <a:srgbClr val="FFFFFF"/>
-                </a:solidFill>
-                <a:latin typeface="맑은 고딕"/>
-              </a:rPr>
-              <a:t>구성을 관리하는 두 가지 방법</a:t>
-            </a:r>
-          </a:p>
-        </p:txBody>
-      </p:sp>
-      <p:sp>
-        <p:nvSpPr>
-          <p:cNvPr id="5" name="Rectangle 4"/>
-          <p:cNvSpPr/>
-          <p:nvPr/>
-        </p:nvSpPr>
-        <p:spPr>
-          <a:xfrm>
-            <a:off x="822960" y="4114800"/>
-            <a:ext cx="5486400" cy="54864"/>
-          </a:xfrm>
-          <a:prstGeom prst="rect">
-            <a:avLst/>
-          </a:prstGeom>
-          <a:solidFill>
-            <a:srgbClr val="FFFFFF"/>
-          </a:solidFill>
-          <a:ln>
-            <a:noFill/>
-          </a:ln>
-          <a:effectLst/>
-        </p:spPr>
-        <p:style>
-          <a:lnRef idx="1">
-            <a:schemeClr val="accent1"/>
-          </a:lnRef>
-          <a:fillRef idx="3">
-            <a:schemeClr val="accent1"/>
-          </a:fillRef>
-          <a:effectRef idx="2">
-            <a:schemeClr val="accent1"/>
-          </a:effectRef>
-          <a:fontRef idx="minor">
-            <a:schemeClr val="lt1"/>
-          </a:fontRef>
-        </p:style>
-        <p:txBody>
-          <a:bodyPr rtlCol="0" anchor="ctr"/>
-          <a:lstStyle/>
-          <a:p>
-            <a:pPr algn="ctr"/>
-          </a:p>
-        </p:txBody>
-      </p:sp>
-      <p:sp>
-        <p:nvSpPr>
-          <p:cNvPr id="6" name="TextBox 5"/>
+              <a:rPr sz="1500" b="0">
+                <a:solidFill>
+                  <a:srgbClr val="5A6672"/>
+                </a:solidFill>
+                <a:latin typeface="맑은 고딕"/>
+              </a:rPr>
+              <a:t>OPEN_MODE가 가장 확실한 근거</a:t>
+            </a:r>
+          </a:p>
+        </p:txBody>
+      </p:sp>
+      <p:sp>
+        <p:nvSpPr>
+          <p:cNvPr id="5" name="TextBox 4"/>
           <p:cNvSpPr txBox="1"/>
           <p:nvPr/>
         </p:nvSpPr>
         <p:spPr>
           <a:xfrm>
-            <a:off x="822960" y="4297680"/>
-            <a:ext cx="10058400" cy="2011680"/>
+            <a:off x="640080" y="1737360"/>
+            <a:ext cx="10881360" cy="4754880"/>
           </a:xfrm>
           <a:prstGeom prst="rect">
             <a:avLst/>
@@ -13111,49 +13907,81 @@
           <a:p>
             <a:pPr algn="l">
               <a:spcAft>
-                <a:spcPts val="800"/>
-              </a:spcAft>
-            </a:pPr>
-            <a:r>
-              <a:rPr sz="1600" b="0">
-                <a:solidFill>
-                  <a:srgbClr val="FFFFFF"/>
-                </a:solidFill>
-                <a:latin typeface="맑은 고딕"/>
-              </a:rPr>
-              <a:t>•  SQL 명령으로 직접 (4~12장)</a:t>
-            </a:r>
-          </a:p>
-          <a:p>
-            <a:pPr algn="l">
-              <a:spcAft>
-                <a:spcPts val="800"/>
-              </a:spcAft>
-            </a:pPr>
-            <a:r>
-              <a:rPr sz="1600" b="0">
-                <a:solidFill>
-                  <a:srgbClr val="FFFFFF"/>
-                </a:solidFill>
-                <a:latin typeface="맑은 고딕"/>
-              </a:rPr>
-              <a:t>•  Data Guard Broker와 DGMGRL (13~16장)</a:t>
-            </a:r>
-          </a:p>
-          <a:p>
-            <a:pPr algn="l">
-              <a:spcAft>
-                <a:spcPts val="800"/>
-              </a:spcAft>
-            </a:pPr>
-            <a:r>
-              <a:rPr sz="1600" b="0">
-                <a:solidFill>
-                  <a:srgbClr val="FFFFFF"/>
-                </a:solidFill>
-                <a:latin typeface="맑은 고딕"/>
-              </a:rPr>
-              <a:t>•  Enterprise Manager는 개념만 다룬다</a:t>
+                <a:spcPts val="1000"/>
+              </a:spcAft>
+            </a:pPr>
+            <a:r>
+              <a:rPr sz="1700" b="0">
+                <a:solidFill>
+                  <a:srgbClr val="222222"/>
+                </a:solidFill>
+                <a:latin typeface="맑은 고딕"/>
+              </a:rPr>
+              <a:t>•  Standby V$DATABASE.OPEN_MODE = READ ONLY WITH APPLY</a:t>
+            </a:r>
+          </a:p>
+          <a:p>
+            <a:pPr algn="l">
+              <a:spcAft>
+                <a:spcPts val="1000"/>
+              </a:spcAft>
+            </a:pPr>
+            <a:r>
+              <a:rPr sz="1700" b="0">
+                <a:solidFill>
+                  <a:srgbClr val="222222"/>
+                </a:solidFill>
+                <a:latin typeface="맑은 고딕"/>
+              </a:rPr>
+              <a:t>•  DBA_FEATURE_USAGE_STATISTICS의 사용 이력</a:t>
+            </a:r>
+          </a:p>
+          <a:p>
+            <a:pPr algn="l">
+              <a:spcAft>
+                <a:spcPts val="1000"/>
+              </a:spcAft>
+            </a:pPr>
+            <a:r>
+              <a:rPr sz="1700" b="0">
+                <a:solidFill>
+                  <a:srgbClr val="222222"/>
+                </a:solidFill>
+                <a:latin typeface="맑은 고딕"/>
+              </a:rPr>
+              <a:t>•  CDB에서는 CDB_FEATURE_USAGE_STATISTICS 조회</a:t>
+            </a:r>
+          </a:p>
+          <a:p>
+            <a:pPr algn="l">
+              <a:spcAft>
+                <a:spcPts val="1000"/>
+              </a:spcAft>
+            </a:pPr>
+            <a:r>
+              <a:rPr sz="1700" b="0">
+                <a:solidFill>
+                  <a:srgbClr val="222222"/>
+                </a:solidFill>
+                <a:latin typeface="맑은 고딕"/>
+              </a:rPr>
+              <a:t>•  읽기 전용 Standby는 이력을 기록하지 못함</a:t>
+            </a:r>
+          </a:p>
+          <a:p>
+            <a:pPr algn="l">
+              <a:spcAft>
+                <a:spcPts val="1000"/>
+              </a:spcAft>
+            </a:pPr>
+            <a:r>
+              <a:rPr sz="1700" b="0">
+                <a:solidFill>
+                  <a:srgbClr val="222222"/>
+                </a:solidFill>
+                <a:latin typeface="맑은 고딕"/>
+              </a:rPr>
+              <a:t>•  판정은 계약서 기준, 뷰는 보조 근거</a:t>
             </a:r>
           </a:p>
         </p:txBody>
@@ -13185,7 +14013,7 @@
         <p:spPr>
           <a:xfrm>
             <a:off x="0" y="0"/>
-            <a:ext cx="12191695" cy="1005840"/>
+            <a:ext cx="12191695" cy="6858000"/>
           </a:xfrm>
           <a:prstGeom prst="rect">
             <a:avLst/>
@@ -13228,8 +14056,8 @@
         </p:nvSpPr>
         <p:spPr>
           <a:xfrm>
-            <a:off x="548640" y="91440"/>
-            <a:ext cx="10972800" cy="777240"/>
+            <a:off x="822960" y="2011680"/>
+            <a:ext cx="10515600" cy="1097280"/>
           </a:xfrm>
           <a:prstGeom prst="rect">
             <a:avLst/>
@@ -13248,13 +14076,13 @@
               </a:spcAft>
             </a:pPr>
             <a:r>
-              <a:rPr sz="2600" b="1">
+              <a:rPr sz="4000" b="1">
                 <a:solidFill>
                   <a:srgbClr val="FFFFFF"/>
                 </a:solidFill>
                 <a:latin typeface="맑은 고딕"/>
               </a:rPr>
-              <a:t>SQL과 DGMGRL</a:t>
+              <a:t>1.8</a:t>
             </a:r>
           </a:p>
         </p:txBody>
@@ -13267,8 +14095,8 @@
         </p:nvSpPr>
         <p:spPr>
           <a:xfrm>
-            <a:off x="640080" y="1078992"/>
-            <a:ext cx="10881360" cy="457200"/>
+            <a:off x="822960" y="3017520"/>
+            <a:ext cx="10515600" cy="914400"/>
           </a:xfrm>
           <a:prstGeom prst="rect">
             <a:avLst/>
@@ -13287,27 +14115,71 @@
               </a:spcAft>
             </a:pPr>
             <a:r>
-              <a:rPr sz="1500" b="0">
-                <a:solidFill>
-                  <a:srgbClr val="5A6672"/>
-                </a:solidFill>
-                <a:latin typeface="맑은 고딕"/>
-              </a:rPr>
-              <a:t>먼저 손으로, 나중에 자동화</a:t>
-            </a:r>
-          </a:p>
-        </p:txBody>
-      </p:sp>
-      <p:sp>
-        <p:nvSpPr>
-          <p:cNvPr id="5" name="TextBox 4"/>
+              <a:rPr sz="2800" b="1">
+                <a:solidFill>
+                  <a:srgbClr val="FFFFFF"/>
+                </a:solidFill>
+                <a:latin typeface="맑은 고딕"/>
+              </a:rPr>
+              <a:t>구성 요건과 사전 점검</a:t>
+            </a:r>
+          </a:p>
+        </p:txBody>
+      </p:sp>
+      <p:sp>
+        <p:nvSpPr>
+          <p:cNvPr id="5" name="Rectangle 4"/>
+          <p:cNvSpPr/>
+          <p:nvPr/>
+        </p:nvSpPr>
+        <p:spPr>
+          <a:xfrm>
+            <a:off x="822960" y="4114800"/>
+            <a:ext cx="5486400" cy="54864"/>
+          </a:xfrm>
+          <a:prstGeom prst="rect">
+            <a:avLst/>
+          </a:prstGeom>
+          <a:solidFill>
+            <a:srgbClr val="FFFFFF"/>
+          </a:solidFill>
+          <a:ln>
+            <a:noFill/>
+          </a:ln>
+          <a:effectLst/>
+        </p:spPr>
+        <p:style>
+          <a:lnRef idx="1">
+            <a:schemeClr val="accent1"/>
+          </a:lnRef>
+          <a:fillRef idx="3">
+            <a:schemeClr val="accent1"/>
+          </a:fillRef>
+          <a:effectRef idx="2">
+            <a:schemeClr val="accent1"/>
+          </a:effectRef>
+          <a:fontRef idx="minor">
+            <a:schemeClr val="lt1"/>
+          </a:fontRef>
+        </p:style>
+        <p:txBody>
+          <a:bodyPr rtlCol="0" anchor="ctr"/>
+          <a:lstStyle/>
+          <a:p>
+            <a:pPr algn="ctr"/>
+          </a:p>
+        </p:txBody>
+      </p:sp>
+      <p:sp>
+        <p:nvSpPr>
+          <p:cNvPr id="6" name="TextBox 5"/>
           <p:cNvSpPr txBox="1"/>
           <p:nvPr/>
         </p:nvSpPr>
         <p:spPr>
           <a:xfrm>
-            <a:off x="640080" y="1737360"/>
-            <a:ext cx="10881360" cy="4754880"/>
+            <a:off x="822960" y="4297680"/>
+            <a:ext cx="10058400" cy="2011680"/>
           </a:xfrm>
           <a:prstGeom prst="rect">
             <a:avLst/>
@@ -13322,65 +14194,49 @@
           <a:p>
             <a:pPr algn="l">
               <a:spcAft>
-                <a:spcPts val="1000"/>
-              </a:spcAft>
-            </a:pPr>
-            <a:r>
-              <a:rPr sz="1700" b="0">
-                <a:solidFill>
-                  <a:srgbClr val="222222"/>
-                </a:solidFill>
-                <a:latin typeface="맑은 고딕"/>
-              </a:rPr>
-              <a:t>•  Broker 없이: 파라미터 직접 설정, MRP 직접 기동·중지, ALTER DATABASE로 역할 전환 → 4~12장</a:t>
-            </a:r>
-          </a:p>
-          <a:p>
-            <a:pPr algn="l">
-              <a:spcAft>
-                <a:spcPts val="1000"/>
-              </a:spcAft>
-            </a:pPr>
-            <a:r>
-              <a:rPr sz="1700" b="0">
-                <a:solidFill>
-                  <a:srgbClr val="222222"/>
-                </a:solidFill>
-                <a:latin typeface="맑은 고딕"/>
-              </a:rPr>
-              <a:t>•  Broker와 함께: SHOW CONFIGURATION 한 줄로 전체 상태, SWITCHOVER TO boston 한 줄로 전환 → 13~16장</a:t>
-            </a:r>
-          </a:p>
-          <a:p>
-            <a:pPr algn="l">
-              <a:spcAft>
-                <a:spcPts val="1000"/>
-              </a:spcAft>
-            </a:pPr>
-            <a:r>
-              <a:rPr sz="1700" b="0">
-                <a:solidFill>
-                  <a:srgbClr val="222222"/>
-                </a:solidFill>
-                <a:latin typeface="맑은 고딕"/>
-              </a:rPr>
-              <a:t>•  두 방식을 모두 다루는 이유: 운영은 Broker가 낫지만 문제 해결에는 내부 이해가 필요하다</a:t>
-            </a:r>
-          </a:p>
-          <a:p>
-            <a:pPr algn="l">
-              <a:spcAft>
-                <a:spcPts val="1000"/>
-              </a:spcAft>
-            </a:pPr>
-            <a:r>
-              <a:rPr sz="1700" b="0">
-                <a:solidFill>
-                  <a:srgbClr val="222222"/>
-                </a:solidFill>
-                <a:latin typeface="맑은 고딕"/>
-              </a:rPr>
-              <a:t>•  Enterprise Manager Cloud Control은 개념만 언급하고 실습에서 제외</a:t>
+                <a:spcPts val="800"/>
+              </a:spcAft>
+            </a:pPr>
+            <a:r>
+              <a:rPr sz="1600" b="0">
+                <a:solidFill>
+                  <a:srgbClr val="FFFFFF"/>
+                </a:solidFill>
+                <a:latin typeface="맑은 고딕"/>
+              </a:rPr>
+              <a:t>•  소프트웨어 요건</a:t>
+            </a:r>
+          </a:p>
+          <a:p>
+            <a:pPr algn="l">
+              <a:spcAft>
+                <a:spcPts val="800"/>
+              </a:spcAft>
+            </a:pPr>
+            <a:r>
+              <a:rPr sz="1600" b="0">
+                <a:solidFill>
+                  <a:srgbClr val="FFFFFF"/>
+                </a:solidFill>
+                <a:latin typeface="맑은 고딕"/>
+              </a:rPr>
+              <a:t>•  하드웨어와 운영체제</a:t>
+            </a:r>
+          </a:p>
+          <a:p>
+            <a:pPr algn="l">
+              <a:spcAft>
+                <a:spcPts val="800"/>
+              </a:spcAft>
+            </a:pPr>
+            <a:r>
+              <a:rPr sz="1600" b="0">
+                <a:solidFill>
+                  <a:srgbClr val="FFFFFF"/>
+                </a:solidFill>
+                <a:latin typeface="맑은 고딕"/>
+              </a:rPr>
+              <a:t>•  데이터베이스 수준 점검 항목</a:t>
             </a:r>
           </a:p>
         </p:txBody>
@@ -13520,7 +14376,7 @@
                 </a:solidFill>
                 <a:latin typeface="맑은 고딕"/>
               </a:rPr>
-              <a:t>Data Guard란 무엇인가</a:t>
+              <a:t>Data Guard가 해결하는 문제</a:t>
             </a:r>
           </a:p>
         </p:txBody>
@@ -13603,7 +14459,7 @@
                 </a:solidFill>
                 <a:latin typeface="맑은 고딕"/>
               </a:rPr>
-              <a:t>•  관리·모니터링·자동화 소프트웨어 인프라</a:t>
+              <a:t>•  다운타임의 종류와 대응</a:t>
             </a:r>
           </a:p>
           <a:p>
@@ -13619,7 +14475,7 @@
                 </a:solidFill>
                 <a:latin typeface="맑은 고딕"/>
               </a:rPr>
-              <a:t>•  Primary 1대 + Standby 최대 30대</a:t>
+              <a:t>•  RPO와 RTO로 보는 보호 수준</a:t>
             </a:r>
           </a:p>
           <a:p>
@@ -13635,7 +14491,7 @@
                 </a:solidFill>
                 <a:latin typeface="맑은 고딕"/>
               </a:rPr>
-              <a:t>•  실습 환경으로 직접 확인한다</a:t>
+              <a:t>•  전형적인 배치 형태</a:t>
             </a:r>
           </a:p>
         </p:txBody>
@@ -13736,7 +14592,7 @@
                 </a:solidFill>
                 <a:latin typeface="맑은 고딕"/>
               </a:rPr>
-              <a:t>퀴즈 (Quiz)</a:t>
+              <a:t>소프트웨어 요건</a:t>
             </a:r>
           </a:p>
         </p:txBody>
@@ -13749,8 +14605,8 @@
         </p:nvSpPr>
         <p:spPr>
           <a:xfrm>
-            <a:off x="640080" y="1371600"/>
-            <a:ext cx="10881360" cy="5120640"/>
+            <a:off x="640080" y="1078992"/>
+            <a:ext cx="10881360" cy="457200"/>
           </a:xfrm>
           <a:prstGeom prst="rect">
             <a:avLst/>
@@ -13765,97 +14621,120 @@
           <a:p>
             <a:pPr algn="l">
               <a:spcAft>
-                <a:spcPts val="1000"/>
-              </a:spcAft>
-            </a:pPr>
-            <a:r>
-              <a:rPr sz="1600" b="0">
-                <a:solidFill>
-                  <a:srgbClr val="222222"/>
-                </a:solidFill>
-                <a:latin typeface="맑은 고딕"/>
-              </a:rPr>
-              <a:t>•  Q1. V$DATABASE에서 양쪽이 같아야 하는 열과 달라야 하는 열을 각각 두 개씩 들고 이유를 설명하라.</a:t>
-            </a:r>
-          </a:p>
-          <a:p>
-            <a:pPr algn="l">
-              <a:spcAft>
-                <a:spcPts val="1000"/>
-              </a:spcAft>
-            </a:pPr>
-            <a:r>
-              <a:rPr sz="1600" b="0">
-                <a:solidFill>
-                  <a:srgbClr val="222222"/>
-                </a:solidFill>
-                <a:latin typeface="맑은 고딕"/>
-              </a:rPr>
-              <a:t>•  Q2. Standby의 OPEN_MODE가 MOUNTED인 경우와 READ ONLY WITH APPLY인 경우의 차이는? 후자에 필요한 것은?</a:t>
-            </a:r>
-          </a:p>
-          <a:p>
-            <a:pPr algn="l">
-              <a:spcAft>
-                <a:spcPts val="1000"/>
-              </a:spcAft>
-            </a:pPr>
-            <a:r>
-              <a:rPr sz="1600" b="0">
-                <a:solidFill>
-                  <a:srgbClr val="222222"/>
-                </a:solidFill>
-                <a:latin typeface="맑은 고딕"/>
-              </a:rPr>
-              <a:t>•  Q3. Snapshot standby에서 만든 테이블은 복귀 후 어떻게 되는가? 그 동작의 바탕이 되는 기능은?</a:t>
-            </a:r>
-          </a:p>
-          <a:p>
-            <a:pPr algn="l">
-              <a:spcAft>
-                <a:spcPts val="1000"/>
-              </a:spcAft>
-            </a:pPr>
-            <a:r>
-              <a:rPr sz="1600" b="0">
-                <a:solidFill>
-                  <a:srgbClr val="222222"/>
-                </a:solidFill>
-                <a:latin typeface="맑은 고딕"/>
-              </a:rPr>
-              <a:t>•  Q4. Primary에서 MRP0 조회가 no rows selected였다. 장애인가? 이유를 설명하라.</a:t>
-            </a:r>
-          </a:p>
-          <a:p>
-            <a:pPr algn="l">
-              <a:spcAft>
-                <a:spcPts val="1000"/>
-              </a:spcAft>
-            </a:pPr>
-            <a:r>
-              <a:rPr sz="1600" b="0">
-                <a:solidFill>
-                  <a:srgbClr val="222222"/>
-                </a:solidFill>
-                <a:latin typeface="맑은 고딕"/>
-              </a:rPr>
-              <a:t>•  Q5. V$DATAGUARD_PROCESS의 CLIENT_ROLE 열은 Standby에서 무엇을 알려 주는가?</a:t>
-            </a:r>
-          </a:p>
-          <a:p>
-            <a:pPr algn="l">
-              <a:spcAft>
-                <a:spcPts val="1000"/>
-              </a:spcAft>
-            </a:pPr>
-            <a:r>
-              <a:rPr sz="1600" b="0">
-                <a:solidFill>
-                  <a:srgbClr val="222222"/>
-                </a:solidFill>
-                <a:latin typeface="맑은 고딕"/>
-              </a:rPr>
-              <a:t>•  Q6. 구성 전 두 노드에서 일치를 확인해야 하는 항목 네 가지와 각각의 조회를 쓰라.</a:t>
+                <a:spcPts val="600"/>
+              </a:spcAft>
+            </a:pPr>
+            <a:r>
+              <a:rPr sz="1500" b="0">
+                <a:solidFill>
+                  <a:srgbClr val="5A6672"/>
+                </a:solidFill>
+                <a:latin typeface="맑은 고딕"/>
+              </a:rPr>
+              <a:t>같은 릴리스의 Enterprise Edition</a:t>
+            </a:r>
+          </a:p>
+        </p:txBody>
+      </p:sp>
+      <p:sp>
+        <p:nvSpPr>
+          <p:cNvPr id="5" name="TextBox 4"/>
+          <p:cNvSpPr txBox="1"/>
+          <p:nvPr/>
+        </p:nvSpPr>
+        <p:spPr>
+          <a:xfrm>
+            <a:off x="640080" y="1737360"/>
+            <a:ext cx="10881360" cy="4754880"/>
+          </a:xfrm>
+          <a:prstGeom prst="rect">
+            <a:avLst/>
+          </a:prstGeom>
+          <a:noFill/>
+        </p:spPr>
+        <p:txBody>
+          <a:bodyPr wrap="square">
+            <a:spAutoFit/>
+          </a:bodyPr>
+          <a:lstStyle/>
+          <a:p>
+            <a:pPr algn="l">
+              <a:spcAft>
+                <a:spcPts val="1000"/>
+              </a:spcAft>
+            </a:pPr>
+            <a:r>
+              <a:rPr sz="1700" b="0">
+                <a:solidFill>
+                  <a:srgbClr val="222222"/>
+                </a:solidFill>
+                <a:latin typeface="맑은 고딕"/>
+              </a:rPr>
+              <a:t>•  Data Guard는 EE 전용, SE에는 없음</a:t>
+            </a:r>
+          </a:p>
+          <a:p>
+            <a:pPr algn="l">
+              <a:spcAft>
+                <a:spcPts val="1000"/>
+              </a:spcAft>
+            </a:pPr>
+            <a:r>
+              <a:rPr sz="1700" b="0">
+                <a:solidFill>
+                  <a:srgbClr val="222222"/>
+                </a:solidFill>
+                <a:latin typeface="맑은 고딕"/>
+              </a:rPr>
+              <a:t>•  모든 데이터베이스가 같은 릴리스</a:t>
+            </a:r>
+          </a:p>
+          <a:p>
+            <a:pPr algn="l">
+              <a:spcAft>
+                <a:spcPts val="1000"/>
+              </a:spcAft>
+            </a:pPr>
+            <a:r>
+              <a:rPr sz="1700" b="0">
+                <a:solidFill>
+                  <a:srgbClr val="222222"/>
+                </a:solidFill>
+                <a:latin typeface="맑은 고딕"/>
+              </a:rPr>
+              <a:t>•  예외: Logical Standby 롤링 업그레이드</a:t>
+            </a:r>
+          </a:p>
+          <a:p>
+            <a:pPr algn="l">
+              <a:spcAft>
+                <a:spcPts val="1000"/>
+              </a:spcAft>
+            </a:pPr>
+            <a:r>
+              <a:rPr sz="1700" b="0">
+                <a:solidFill>
+                  <a:srgbClr val="222222"/>
+                </a:solidFill>
+                <a:latin typeface="맑은 고딕"/>
+              </a:rPr>
+              <a:t>•  실무에서는 RU 수준까지 일치</a:t>
+            </a:r>
+          </a:p>
+          <a:p>
+            <a:pPr algn="l">
+              <a:spcAft>
+                <a:spcPts val="1000"/>
+              </a:spcAft>
+            </a:pPr>
+            <a:r>
+              <a:rPr sz="1700" b="0">
+                <a:solidFill>
+                  <a:srgbClr val="222222"/>
+                </a:solidFill>
+                <a:latin typeface="맑은 고딕"/>
+              </a:rPr>
+              <a:t>•  ASM·OMF는 양쪽을 같은 조합으로</a:t>
             </a:r>
           </a:p>
         </p:txBody>
@@ -13956,7 +14835,7 @@
                 </a:solidFill>
                 <a:latin typeface="맑은 고딕"/>
               </a:rPr>
-              <a:t>요약 (Summary)</a:t>
+              <a:t>하드웨어와 운영체제</a:t>
             </a:r>
           </a:p>
         </p:txBody>
@@ -13969,8 +14848,8 @@
         </p:nvSpPr>
         <p:spPr>
           <a:xfrm>
-            <a:off x="640080" y="1371600"/>
-            <a:ext cx="10881360" cy="5120640"/>
+            <a:off x="640080" y="1078992"/>
+            <a:ext cx="10881360" cy="457200"/>
           </a:xfrm>
           <a:prstGeom prst="rect">
             <a:avLst/>
@@ -13985,129 +14864,120 @@
           <a:p>
             <a:pPr algn="l">
               <a:spcAft>
-                <a:spcPts val="1000"/>
-              </a:spcAft>
-            </a:pPr>
-            <a:r>
-              <a:rPr sz="1600" b="0">
-                <a:solidFill>
-                  <a:srgbClr val="222222"/>
-                </a:solidFill>
-                <a:latin typeface="맑은 고딕"/>
-              </a:rPr>
-              <a:t>•  Data Guard는 Primary 1대와 최대 30대 Standby를 유지·관리한다. 축은 리두이며 전송·적용·역할 관리 세 서비스로 이루어진다.</a:t>
-            </a:r>
-          </a:p>
-          <a:p>
-            <a:pPr algn="l">
-              <a:spcAft>
-                <a:spcPts val="1000"/>
-              </a:spcAft>
-            </a:pPr>
-            <a:r>
-              <a:rPr sz="1600" b="0">
-                <a:solidFill>
-                  <a:srgbClr val="222222"/>
-                </a:solidFill>
-                <a:latin typeface="맑은 고딕"/>
-              </a:rPr>
-              <a:t>•  Standby는 physical(Redo Apply)·logical(SQL Apply)·snapshot(적용 보류) 세 유형. ROLE과 OPEN_MODE 조합으로 판별한다.</a:t>
-            </a:r>
-          </a:p>
-          <a:p>
-            <a:pPr algn="l">
-              <a:spcAft>
-                <a:spcPts val="1000"/>
-              </a:spcAft>
-            </a:pPr>
-            <a:r>
-              <a:rPr sz="1600" b="0">
-                <a:solidFill>
-                  <a:srgbClr val="222222"/>
-                </a:solidFill>
-                <a:latin typeface="맑은 고딕"/>
-              </a:rPr>
-              <a:t>•  Primary와 Standby는 DB_NAME·DBID가 같고 DB_UNIQUE_NAME·CONTROLFILE_TYPE이 다르다. 실측 DBID 1852041610.</a:t>
-            </a:r>
-          </a:p>
-          <a:p>
-            <a:pPr algn="l">
-              <a:spcAft>
-                <a:spcPts val="1000"/>
-              </a:spcAft>
-            </a:pPr>
-            <a:r>
-              <a:rPr sz="1600" b="0">
-                <a:solidFill>
-                  <a:srgbClr val="222222"/>
-                </a:solidFill>
-                <a:latin typeface="맑은 고딕"/>
-              </a:rPr>
-              <a:t>•  Primary는 LGWR·NSSn·TTnn·ARCn, Standby는 RFS·ARCn·MRP·PRnn. V$DATAGUARD_PROCESS의 ROLE·CLIENT_ROLE로 짝을 맞춘다.</a:t>
-            </a:r>
-          </a:p>
-          <a:p>
-            <a:pPr algn="l">
-              <a:spcAft>
-                <a:spcPts val="1000"/>
-              </a:spcAft>
-            </a:pPr>
-            <a:r>
-              <a:rPr sz="1600" b="0">
-                <a:solidFill>
-                  <a:srgbClr val="222222"/>
-                </a:solidFill>
-                <a:latin typeface="맑은 고딕"/>
-              </a:rPr>
-              <a:t>•  MRP는 Standby에만 있다. 진단의 첫 질문은 "지금 어느 노드인가"다.</a:t>
-            </a:r>
-          </a:p>
-          <a:p>
-            <a:pPr algn="l">
-              <a:spcAft>
-                <a:spcPts val="1000"/>
-              </a:spcAft>
-            </a:pPr>
-            <a:r>
-              <a:rPr sz="1600" b="0">
-                <a:solidFill>
-                  <a:srgbClr val="222222"/>
-                </a:solidFill>
-                <a:latin typeface="맑은 고딕"/>
-              </a:rPr>
-              <a:t>•  보호 모드 기본값은 Maximum Performance. PROTECTION_MODE와 LEVEL이 어긋나면 이상 신호다.</a:t>
-            </a:r>
-          </a:p>
-          <a:p>
-            <a:pPr algn="l">
-              <a:spcAft>
-                <a:spcPts val="1000"/>
-              </a:spcAft>
-            </a:pPr>
-            <a:r>
-              <a:rPr sz="1600" b="0">
-                <a:solidFill>
-                  <a:srgbClr val="222222"/>
-                </a:solidFill>
-                <a:latin typeface="맑은 고딕"/>
-              </a:rPr>
-              <a:t>•  구성 전 릴리스·엔디안·문자셋·에디션 일치를 확인한다. 실측 19.3.0.0.0 / 플랫폼 13 Little / AL32UTF8.</a:t>
-            </a:r>
-          </a:p>
-          <a:p>
-            <a:pPr algn="l">
-              <a:spcAft>
-                <a:spcPts val="1000"/>
-              </a:spcAft>
-            </a:pPr>
-            <a:r>
-              <a:rPr sz="1600" b="0">
-                <a:solidFill>
-                  <a:srgbClr val="222222"/>
-                </a:solidFill>
-                <a:latin typeface="맑은 고딕"/>
-              </a:rPr>
-              <a:t>•  Real-Time Query·DML 리다이렉션·Far Sync는 ADG 옵션. 사용 이력 뷰가 아니라 Standby의 OPEN_MODE로 판정한다.</a:t>
+                <a:spcPts val="600"/>
+              </a:spcAft>
+            </a:pPr>
+            <a:r>
+              <a:rPr sz="1500" b="0">
+                <a:solidFill>
+                  <a:srgbClr val="5A6672"/>
+                </a:solidFill>
+                <a:latin typeface="맑은 고딕"/>
+              </a:rPr>
+              <a:t>달라도 되지만, 작으면 곤란하다</a:t>
+            </a:r>
+          </a:p>
+        </p:txBody>
+      </p:sp>
+      <p:sp>
+        <p:nvSpPr>
+          <p:cNvPr id="5" name="TextBox 4"/>
+          <p:cNvSpPr txBox="1"/>
+          <p:nvPr/>
+        </p:nvSpPr>
+        <p:spPr>
+          <a:xfrm>
+            <a:off x="640080" y="1737360"/>
+            <a:ext cx="10881360" cy="4754880"/>
+          </a:xfrm>
+          <a:prstGeom prst="rect">
+            <a:avLst/>
+          </a:prstGeom>
+          <a:noFill/>
+        </p:spPr>
+        <p:txBody>
+          <a:bodyPr wrap="square">
+            <a:spAutoFit/>
+          </a:bodyPr>
+          <a:lstStyle/>
+          <a:p>
+            <a:pPr algn="l">
+              <a:spcAft>
+                <a:spcPts val="1000"/>
+              </a:spcAft>
+            </a:pPr>
+            <a:r>
+              <a:rPr sz="1700" b="0">
+                <a:solidFill>
+                  <a:srgbClr val="222222"/>
+                </a:solidFill>
+                <a:latin typeface="맑은 고딕"/>
+              </a:rPr>
+              <a:t>•  CPU 수, 메모리, 스토리지 구성은 달라도 동작</a:t>
+            </a:r>
+          </a:p>
+          <a:p>
+            <a:pPr algn="l">
+              <a:spcAft>
+                <a:spcPts val="1000"/>
+              </a:spcAft>
+            </a:pPr>
+            <a:r>
+              <a:rPr sz="1700" b="0">
+                <a:solidFill>
+                  <a:srgbClr val="222222"/>
+                </a:solidFill>
+                <a:latin typeface="맑은 고딕"/>
+              </a:rPr>
+              <a:t>•  Failover 뒤 업무를 감당할 용량은 필요</a:t>
+            </a:r>
+          </a:p>
+          <a:p>
+            <a:pPr algn="l">
+              <a:spcAft>
+                <a:spcPts val="1000"/>
+              </a:spcAft>
+            </a:pPr>
+            <a:r>
+              <a:rPr sz="1700" b="0">
+                <a:solidFill>
+                  <a:srgbClr val="222222"/>
+                </a:solidFill>
+                <a:latin typeface="맑은 고딕"/>
+              </a:rPr>
+              <a:t>•  혼합 플랫폼은 일부 조합만 허용</a:t>
+            </a:r>
+          </a:p>
+          <a:p>
+            <a:pPr algn="l">
+              <a:spcAft>
+                <a:spcPts val="1000"/>
+              </a:spcAft>
+            </a:pPr>
+            <a:r>
+              <a:rPr sz="1700" b="0">
+                <a:solidFill>
+                  <a:srgbClr val="222222"/>
+                </a:solidFill>
+                <a:latin typeface="맑은 고딕"/>
+              </a:rPr>
+              <a:t>•  확인: MOS 413484.1(Physical), 1085687.1(Logical)</a:t>
+            </a:r>
+          </a:p>
+          <a:p>
+            <a:pPr algn="l">
+              <a:spcAft>
+                <a:spcPts val="1000"/>
+              </a:spcAft>
+            </a:pPr>
+            <a:r>
+              <a:rPr sz="1700" b="0">
+                <a:solidFill>
+                  <a:srgbClr val="222222"/>
+                </a:solidFill>
+                <a:latin typeface="맑은 고딕"/>
+              </a:rPr>
+              <a:t>•  같은 서버 배치는 학습·시험용</a:t>
             </a:r>
           </a:p>
         </p:txBody>
@@ -14208,7 +15078,7 @@
                 </a:solidFill>
                 <a:latin typeface="맑은 고딕"/>
               </a:rPr>
-              <a:t>실습 개요 (Practice Overview)</a:t>
+              <a:t>데이터베이스 수준 점검 항목</a:t>
             </a:r>
           </a:p>
         </p:txBody>
@@ -14221,8 +15091,8 @@
         </p:nvSpPr>
         <p:spPr>
           <a:xfrm>
-            <a:off x="640080" y="1371600"/>
-            <a:ext cx="10881360" cy="5120640"/>
+            <a:off x="640080" y="1078992"/>
+            <a:ext cx="10881360" cy="457200"/>
           </a:xfrm>
           <a:prstGeom prst="rect">
             <a:avLst/>
@@ -14237,97 +15107,1845 @@
           <a:p>
             <a:pPr algn="l">
               <a:spcAft>
-                <a:spcPts val="1000"/>
+                <a:spcPts val="600"/>
+              </a:spcAft>
+            </a:pPr>
+            <a:r>
+              <a:rPr sz="1500" b="0">
+                <a:solidFill>
+                  <a:srgbClr val="5A6672"/>
+                </a:solidFill>
+                <a:latin typeface="맑은 고딕"/>
+              </a:rPr>
+              <a:t>같아야 하는 것과 달라야 하는 것</a:t>
+            </a:r>
+          </a:p>
+        </p:txBody>
+      </p:sp>
+      <p:sp>
+        <p:nvSpPr>
+          <p:cNvPr id="5" name="TextBox 4"/>
+          <p:cNvSpPr txBox="1"/>
+          <p:nvPr/>
+        </p:nvSpPr>
+        <p:spPr>
+          <a:xfrm>
+            <a:off x="640080" y="1737360"/>
+            <a:ext cx="10881360" cy="4754880"/>
+          </a:xfrm>
+          <a:prstGeom prst="rect">
+            <a:avLst/>
+          </a:prstGeom>
+          <a:noFill/>
+        </p:spPr>
+        <p:txBody>
+          <a:bodyPr wrap="square">
+            <a:spAutoFit/>
+          </a:bodyPr>
+          <a:lstStyle/>
+          <a:p>
+            <a:pPr algn="l">
+              <a:spcAft>
+                <a:spcPts val="1000"/>
+              </a:spcAft>
+            </a:pPr>
+            <a:r>
+              <a:rPr sz="1700" b="0">
+                <a:solidFill>
+                  <a:srgbClr val="222222"/>
+                </a:solidFill>
+                <a:latin typeface="맑은 고딕"/>
+              </a:rPr>
+              <a:t>•  같아야 함: 릴리스·RU, DB_NAME, DBID, 문자셋</a:t>
+            </a:r>
+          </a:p>
+          <a:p>
+            <a:pPr algn="l">
+              <a:spcAft>
+                <a:spcPts val="1000"/>
+              </a:spcAft>
+            </a:pPr>
+            <a:r>
+              <a:rPr sz="1700" b="0">
+                <a:solidFill>
+                  <a:srgbClr val="222222"/>
+                </a:solidFill>
+                <a:latin typeface="맑은 고딕"/>
+              </a:rPr>
+              <a:t>•  같게 둠: DB_BLOCK_SIZE, COMPATIBLE</a:t>
+            </a:r>
+          </a:p>
+          <a:p>
+            <a:pPr algn="l">
+              <a:spcAft>
+                <a:spcPts val="1000"/>
+              </a:spcAft>
+            </a:pPr>
+            <a:r>
+              <a:rPr sz="1700" b="0">
+                <a:solidFill>
+                  <a:srgbClr val="222222"/>
+                </a:solidFill>
+                <a:latin typeface="맑은 고딕"/>
+              </a:rPr>
+              <a:t>•  달라야 함: DB_UNIQUE_NAME</a:t>
+            </a:r>
+          </a:p>
+          <a:p>
+            <a:pPr algn="l">
+              <a:spcAft>
+                <a:spcPts val="1000"/>
+              </a:spcAft>
+            </a:pPr>
+            <a:r>
+              <a:rPr sz="1700" b="0">
+                <a:solidFill>
+                  <a:srgbClr val="222222"/>
+                </a:solidFill>
+                <a:latin typeface="맑은 고딕"/>
+              </a:rPr>
+              <a:t>•  Primary 전제: ARCHIVELOG, FORCE LOGGING</a:t>
+            </a:r>
+          </a:p>
+          <a:p>
+            <a:pPr algn="l">
+              <a:spcAft>
+                <a:spcPts val="1000"/>
+              </a:spcAft>
+            </a:pPr>
+            <a:r>
+              <a:rPr sz="1700" b="0">
+                <a:solidFill>
+                  <a:srgbClr val="222222"/>
+                </a:solidFill>
+                <a:latin typeface="맑은 고딕"/>
+              </a:rPr>
+              <a:t>•  양쪽 이름 해석: 리스너, tnsnames.ora</a:t>
+            </a:r>
+          </a:p>
+        </p:txBody>
+      </p:sp>
+    </p:spTree>
+  </p:cSld>
+  <p:clrMapOvr>
+    <a:masterClrMapping/>
+  </p:clrMapOvr>
+</p:sld>
+</file>
+
+<file path=ppt/slides/slide43.xml><?xml version="1.0" encoding="utf-8"?>
+<p:sld xmlns:a="http://schemas.openxmlformats.org/drawingml/2006/main" xmlns:p="http://schemas.openxmlformats.org/presentationml/2006/main" xmlns:r="http://schemas.openxmlformats.org/officeDocument/2006/relationships">
+  <p:cSld>
+    <p:spTree>
+      <p:nvGrpSpPr>
+        <p:cNvPr id="1" name=""/>
+        <p:cNvGrpSpPr/>
+        <p:nvPr/>
+      </p:nvGrpSpPr>
+      <p:grpSpPr/>
+      <p:sp>
+        <p:nvSpPr>
+          <p:cNvPr id="2" name="Rectangle 1"/>
+          <p:cNvSpPr/>
+          <p:nvPr/>
+        </p:nvSpPr>
+        <p:spPr>
+          <a:xfrm>
+            <a:off x="0" y="0"/>
+            <a:ext cx="12191695" cy="6858000"/>
+          </a:xfrm>
+          <a:prstGeom prst="rect">
+            <a:avLst/>
+          </a:prstGeom>
+          <a:solidFill>
+            <a:srgbClr val="C0392B"/>
+          </a:solidFill>
+          <a:ln>
+            <a:noFill/>
+          </a:ln>
+          <a:effectLst/>
+        </p:spPr>
+        <p:style>
+          <a:lnRef idx="1">
+            <a:schemeClr val="accent1"/>
+          </a:lnRef>
+          <a:fillRef idx="3">
+            <a:schemeClr val="accent1"/>
+          </a:fillRef>
+          <a:effectRef idx="2">
+            <a:schemeClr val="accent1"/>
+          </a:effectRef>
+          <a:fontRef idx="minor">
+            <a:schemeClr val="lt1"/>
+          </a:fontRef>
+        </p:style>
+        <p:txBody>
+          <a:bodyPr rtlCol="0" anchor="ctr"/>
+          <a:lstStyle/>
+          <a:p>
+            <a:pPr algn="ctr"/>
+          </a:p>
+        </p:txBody>
+      </p:sp>
+      <p:sp>
+        <p:nvSpPr>
+          <p:cNvPr id="3" name="TextBox 2"/>
+          <p:cNvSpPr txBox="1"/>
+          <p:nvPr/>
+        </p:nvSpPr>
+        <p:spPr>
+          <a:xfrm>
+            <a:off x="822960" y="2011680"/>
+            <a:ext cx="10515600" cy="1097280"/>
+          </a:xfrm>
+          <a:prstGeom prst="rect">
+            <a:avLst/>
+          </a:prstGeom>
+          <a:noFill/>
+        </p:spPr>
+        <p:txBody>
+          <a:bodyPr wrap="square">
+            <a:spAutoFit/>
+          </a:bodyPr>
+          <a:lstStyle/>
+          <a:p>
+            <a:pPr algn="l">
+              <a:spcAft>
+                <a:spcPts val="600"/>
+              </a:spcAft>
+            </a:pPr>
+            <a:r>
+              <a:rPr sz="4000" b="1">
+                <a:solidFill>
+                  <a:srgbClr val="FFFFFF"/>
+                </a:solidFill>
+                <a:latin typeface="맑은 고딕"/>
+              </a:rPr>
+              <a:t>1.9</a:t>
+            </a:r>
+          </a:p>
+        </p:txBody>
+      </p:sp>
+      <p:sp>
+        <p:nvSpPr>
+          <p:cNvPr id="4" name="TextBox 3"/>
+          <p:cNvSpPr txBox="1"/>
+          <p:nvPr/>
+        </p:nvSpPr>
+        <p:spPr>
+          <a:xfrm>
+            <a:off x="822960" y="3017520"/>
+            <a:ext cx="10515600" cy="914400"/>
+          </a:xfrm>
+          <a:prstGeom prst="rect">
+            <a:avLst/>
+          </a:prstGeom>
+          <a:noFill/>
+        </p:spPr>
+        <p:txBody>
+          <a:bodyPr wrap="square">
+            <a:spAutoFit/>
+          </a:bodyPr>
+          <a:lstStyle/>
+          <a:p>
+            <a:pPr algn="l">
+              <a:spcAft>
+                <a:spcPts val="600"/>
+              </a:spcAft>
+            </a:pPr>
+            <a:r>
+              <a:rPr sz="2800" b="1">
+                <a:solidFill>
+                  <a:srgbClr val="FFFFFF"/>
+                </a:solidFill>
+                <a:latin typeface="맑은 고딕"/>
+              </a:rPr>
+              <a:t>다른 고가용성 기술과의 비교</a:t>
+            </a:r>
+          </a:p>
+        </p:txBody>
+      </p:sp>
+      <p:sp>
+        <p:nvSpPr>
+          <p:cNvPr id="5" name="Rectangle 4"/>
+          <p:cNvSpPr/>
+          <p:nvPr/>
+        </p:nvSpPr>
+        <p:spPr>
+          <a:xfrm>
+            <a:off x="822960" y="4114800"/>
+            <a:ext cx="5486400" cy="54864"/>
+          </a:xfrm>
+          <a:prstGeom prst="rect">
+            <a:avLst/>
+          </a:prstGeom>
+          <a:solidFill>
+            <a:srgbClr val="FFFFFF"/>
+          </a:solidFill>
+          <a:ln>
+            <a:noFill/>
+          </a:ln>
+          <a:effectLst/>
+        </p:spPr>
+        <p:style>
+          <a:lnRef idx="1">
+            <a:schemeClr val="accent1"/>
+          </a:lnRef>
+          <a:fillRef idx="3">
+            <a:schemeClr val="accent1"/>
+          </a:fillRef>
+          <a:effectRef idx="2">
+            <a:schemeClr val="accent1"/>
+          </a:effectRef>
+          <a:fontRef idx="minor">
+            <a:schemeClr val="lt1"/>
+          </a:fontRef>
+        </p:style>
+        <p:txBody>
+          <a:bodyPr rtlCol="0" anchor="ctr"/>
+          <a:lstStyle/>
+          <a:p>
+            <a:pPr algn="ctr"/>
+          </a:p>
+        </p:txBody>
+      </p:sp>
+      <p:sp>
+        <p:nvSpPr>
+          <p:cNvPr id="6" name="TextBox 5"/>
+          <p:cNvSpPr txBox="1"/>
+          <p:nvPr/>
+        </p:nvSpPr>
+        <p:spPr>
+          <a:xfrm>
+            <a:off x="822960" y="4297680"/>
+            <a:ext cx="10058400" cy="2011680"/>
+          </a:xfrm>
+          <a:prstGeom prst="rect">
+            <a:avLst/>
+          </a:prstGeom>
+          <a:noFill/>
+        </p:spPr>
+        <p:txBody>
+          <a:bodyPr wrap="square">
+            <a:spAutoFit/>
+          </a:bodyPr>
+          <a:lstStyle/>
+          <a:p>
+            <a:pPr algn="l">
+              <a:spcAft>
+                <a:spcPts val="800"/>
               </a:spcAft>
             </a:pPr>
             <a:r>
               <a:rPr sz="1600" b="0">
                 <a:solidFill>
-                  <a:srgbClr val="222222"/>
-                </a:solidFill>
-                <a:latin typeface="맑은 고딕"/>
-              </a:rPr>
-              <a:t>•  실습 01 — 현재 구성 파악: V$DATABASE로 양쪽 역할·모드·DBID 확인. Standby DDL로 ORA-16000 재현.</a:t>
-            </a:r>
-          </a:p>
-          <a:p>
-            <a:pPr algn="l">
-              <a:spcAft>
-                <a:spcPts val="1000"/>
+                  <a:srgbClr val="FFFFFF"/>
+                </a:solidFill>
+                <a:latin typeface="맑은 고딕"/>
+              </a:rPr>
+              <a:t>•  RAC, GoldenGate와의 비교</a:t>
+            </a:r>
+          </a:p>
+          <a:p>
+            <a:pPr algn="l">
+              <a:spcAft>
+                <a:spcPts val="800"/>
               </a:spcAft>
             </a:pPr>
             <a:r>
               <a:rPr sz="1600" b="0">
                 <a:solidFill>
-                  <a:srgbClr val="222222"/>
-                </a:solidFill>
-                <a:latin typeface="맑은 고딕"/>
-              </a:rPr>
-              <a:t>•  실습 02 — Data Guard 프로세스 식별: V$MANAGED_STANDBY·V$DATAGUARD_PROCESS로 양쪽 확인, CLIENT_ROLE로 짝 맞추기. Primary에서 MRP를 찾아 ORA-01665 재현.</a:t>
-            </a:r>
-          </a:p>
-          <a:p>
-            <a:pPr algn="l">
-              <a:spcAft>
-                <a:spcPts val="1000"/>
+                  <a:srgbClr val="FFFFFF"/>
+                </a:solidFill>
+                <a:latin typeface="맑은 고딕"/>
+              </a:rPr>
+              <a:t>•  백업·Flashback·스토리지 미러링</a:t>
+            </a:r>
+          </a:p>
+          <a:p>
+            <a:pPr algn="l">
+              <a:spcAft>
+                <a:spcPts val="800"/>
               </a:spcAft>
             </a:pPr>
             <a:r>
               <a:rPr sz="1600" b="0">
                 <a:solidFill>
-                  <a:srgbClr val="222222"/>
-                </a:solidFill>
-                <a:latin typeface="맑은 고딕"/>
-              </a:rPr>
-              <a:t>•  실습 03 — 라이선스 확인: DBA_ 뷰가 비어 있는 원인 규명 → CDB_ 뷰로 조치 → 사용 이력만으로 판정할 수 없는 이유 확인.</a:t>
-            </a:r>
-          </a:p>
-          <a:p>
-            <a:pPr algn="l">
-              <a:spcAft>
-                <a:spcPts val="1000"/>
+                  <a:srgbClr val="FFFFFF"/>
+                </a:solidFill>
+                <a:latin typeface="맑은 고딕"/>
+              </a:rPr>
+              <a:t>•  기술을 겹쳐 쓰는 방식</a:t>
+            </a:r>
+          </a:p>
+        </p:txBody>
+      </p:sp>
+    </p:spTree>
+  </p:cSld>
+  <p:clrMapOvr>
+    <a:masterClrMapping/>
+  </p:clrMapOvr>
+</p:sld>
+</file>
+
+<file path=ppt/slides/slide44.xml><?xml version="1.0" encoding="utf-8"?>
+<p:sld xmlns:a="http://schemas.openxmlformats.org/drawingml/2006/main" xmlns:p="http://schemas.openxmlformats.org/presentationml/2006/main" xmlns:r="http://schemas.openxmlformats.org/officeDocument/2006/relationships">
+  <p:cSld>
+    <p:spTree>
+      <p:nvGrpSpPr>
+        <p:cNvPr id="1" name=""/>
+        <p:cNvGrpSpPr/>
+        <p:nvPr/>
+      </p:nvGrpSpPr>
+      <p:grpSpPr/>
+      <p:sp>
+        <p:nvSpPr>
+          <p:cNvPr id="2" name="Rectangle 1"/>
+          <p:cNvSpPr/>
+          <p:nvPr/>
+        </p:nvSpPr>
+        <p:spPr>
+          <a:xfrm>
+            <a:off x="0" y="0"/>
+            <a:ext cx="12191695" cy="1005840"/>
+          </a:xfrm>
+          <a:prstGeom prst="rect">
+            <a:avLst/>
+          </a:prstGeom>
+          <a:solidFill>
+            <a:srgbClr val="C0392B"/>
+          </a:solidFill>
+          <a:ln>
+            <a:noFill/>
+          </a:ln>
+          <a:effectLst/>
+        </p:spPr>
+        <p:style>
+          <a:lnRef idx="1">
+            <a:schemeClr val="accent1"/>
+          </a:lnRef>
+          <a:fillRef idx="3">
+            <a:schemeClr val="accent1"/>
+          </a:fillRef>
+          <a:effectRef idx="2">
+            <a:schemeClr val="accent1"/>
+          </a:effectRef>
+          <a:fontRef idx="minor">
+            <a:schemeClr val="lt1"/>
+          </a:fontRef>
+        </p:style>
+        <p:txBody>
+          <a:bodyPr rtlCol="0" anchor="ctr"/>
+          <a:lstStyle/>
+          <a:p>
+            <a:pPr algn="ctr"/>
+          </a:p>
+        </p:txBody>
+      </p:sp>
+      <p:sp>
+        <p:nvSpPr>
+          <p:cNvPr id="3" name="TextBox 2"/>
+          <p:cNvSpPr txBox="1"/>
+          <p:nvPr/>
+        </p:nvSpPr>
+        <p:spPr>
+          <a:xfrm>
+            <a:off x="548640" y="91440"/>
+            <a:ext cx="10972800" cy="777240"/>
+          </a:xfrm>
+          <a:prstGeom prst="rect">
+            <a:avLst/>
+          </a:prstGeom>
+          <a:noFill/>
+        </p:spPr>
+        <p:txBody>
+          <a:bodyPr wrap="square">
+            <a:spAutoFit/>
+          </a:bodyPr>
+          <a:lstStyle/>
+          <a:p>
+            <a:pPr algn="l">
+              <a:spcAft>
+                <a:spcPts val="600"/>
+              </a:spcAft>
+            </a:pPr>
+            <a:r>
+              <a:rPr sz="2600" b="1">
+                <a:solidFill>
+                  <a:srgbClr val="FFFFFF"/>
+                </a:solidFill>
+                <a:latin typeface="맑은 고딕"/>
+              </a:rPr>
+              <a:t>RAC와의 비교</a:t>
+            </a:r>
+          </a:p>
+        </p:txBody>
+      </p:sp>
+      <p:sp>
+        <p:nvSpPr>
+          <p:cNvPr id="4" name="TextBox 3"/>
+          <p:cNvSpPr txBox="1"/>
+          <p:nvPr/>
+        </p:nvSpPr>
+        <p:spPr>
+          <a:xfrm>
+            <a:off x="640080" y="1078992"/>
+            <a:ext cx="10881360" cy="457200"/>
+          </a:xfrm>
+          <a:prstGeom prst="rect">
+            <a:avLst/>
+          </a:prstGeom>
+          <a:noFill/>
+        </p:spPr>
+        <p:txBody>
+          <a:bodyPr wrap="square">
+            <a:spAutoFit/>
+          </a:bodyPr>
+          <a:lstStyle/>
+          <a:p>
+            <a:pPr algn="l">
+              <a:spcAft>
+                <a:spcPts val="600"/>
+              </a:spcAft>
+            </a:pPr>
+            <a:r>
+              <a:rPr sz="1500" b="0">
+                <a:solidFill>
+                  <a:srgbClr val="5A6672"/>
+                </a:solidFill>
+                <a:latin typeface="맑은 고딕"/>
+              </a:rPr>
+              <a:t>인스턴스를 지키는가, 데이터를 지키는가</a:t>
+            </a:r>
+          </a:p>
+        </p:txBody>
+      </p:sp>
+      <p:sp>
+        <p:nvSpPr>
+          <p:cNvPr id="5" name="TextBox 4"/>
+          <p:cNvSpPr txBox="1"/>
+          <p:nvPr/>
+        </p:nvSpPr>
+        <p:spPr>
+          <a:xfrm>
+            <a:off x="640080" y="1737360"/>
+            <a:ext cx="10881360" cy="4754880"/>
+          </a:xfrm>
+          <a:prstGeom prst="rect">
+            <a:avLst/>
+          </a:prstGeom>
+          <a:noFill/>
+        </p:spPr>
+        <p:txBody>
+          <a:bodyPr wrap="square">
+            <a:spAutoFit/>
+          </a:bodyPr>
+          <a:lstStyle/>
+          <a:p>
+            <a:pPr algn="l">
+              <a:spcAft>
+                <a:spcPts val="1000"/>
+              </a:spcAft>
+            </a:pPr>
+            <a:r>
+              <a:rPr sz="1700" b="0">
+                <a:solidFill>
+                  <a:srgbClr val="222222"/>
+                </a:solidFill>
+                <a:latin typeface="맑은 고딕"/>
+              </a:rPr>
+              <a:t>•  RAC: 데이터베이스 하나를 여러 인스턴스가 공유</a:t>
+            </a:r>
+          </a:p>
+          <a:p>
+            <a:pPr algn="l">
+              <a:spcAft>
+                <a:spcPts val="1000"/>
+              </a:spcAft>
+            </a:pPr>
+            <a:r>
+              <a:rPr sz="1700" b="0">
+                <a:solidFill>
+                  <a:srgbClr val="222222"/>
+                </a:solidFill>
+                <a:latin typeface="맑은 고딕"/>
+              </a:rPr>
+              <a:t>•  서버 장애에는 수 초 단위로 대응</a:t>
+            </a:r>
+          </a:p>
+          <a:p>
+            <a:pPr algn="l">
+              <a:spcAft>
+                <a:spcPts val="1000"/>
+              </a:spcAft>
+            </a:pPr>
+            <a:r>
+              <a:rPr sz="1700" b="0">
+                <a:solidFill>
+                  <a:srgbClr val="222222"/>
+                </a:solidFill>
+                <a:latin typeface="맑은 고딕"/>
+              </a:rPr>
+              <a:t>•  데이터 파일은 한 벌, 스토리지·사이트 장애는 대응 불가</a:t>
+            </a:r>
+          </a:p>
+          <a:p>
+            <a:pPr algn="l">
+              <a:spcAft>
+                <a:spcPts val="1000"/>
+              </a:spcAft>
+            </a:pPr>
+            <a:r>
+              <a:rPr sz="1700" b="0">
+                <a:solidFill>
+                  <a:srgbClr val="222222"/>
+                </a:solidFill>
+                <a:latin typeface="맑은 고딕"/>
+              </a:rPr>
+              <a:t>•  Data Guard: 별도 사본, 스토리지·사이트 장애 대응</a:t>
+            </a:r>
+          </a:p>
+          <a:p>
+            <a:pPr algn="l">
+              <a:spcAft>
+                <a:spcPts val="1000"/>
+              </a:spcAft>
+            </a:pPr>
+            <a:r>
+              <a:rPr sz="1700" b="0">
+                <a:solidFill>
+                  <a:srgbClr val="222222"/>
+                </a:solidFill>
+                <a:latin typeface="맑은 고딕"/>
+              </a:rPr>
+              <a:t>•  RAC Primary + RAC Standby 조합이 흔함</a:t>
+            </a:r>
+          </a:p>
+        </p:txBody>
+      </p:sp>
+    </p:spTree>
+  </p:cSld>
+  <p:clrMapOvr>
+    <a:masterClrMapping/>
+  </p:clrMapOvr>
+</p:sld>
+</file>
+
+<file path=ppt/slides/slide45.xml><?xml version="1.0" encoding="utf-8"?>
+<p:sld xmlns:a="http://schemas.openxmlformats.org/drawingml/2006/main" xmlns:p="http://schemas.openxmlformats.org/presentationml/2006/main" xmlns:r="http://schemas.openxmlformats.org/officeDocument/2006/relationships">
+  <p:cSld>
+    <p:spTree>
+      <p:nvGrpSpPr>
+        <p:cNvPr id="1" name=""/>
+        <p:cNvGrpSpPr/>
+        <p:nvPr/>
+      </p:nvGrpSpPr>
+      <p:grpSpPr/>
+      <p:sp>
+        <p:nvSpPr>
+          <p:cNvPr id="2" name="Rectangle 1"/>
+          <p:cNvSpPr/>
+          <p:nvPr/>
+        </p:nvSpPr>
+        <p:spPr>
+          <a:xfrm>
+            <a:off x="0" y="0"/>
+            <a:ext cx="12191695" cy="1005840"/>
+          </a:xfrm>
+          <a:prstGeom prst="rect">
+            <a:avLst/>
+          </a:prstGeom>
+          <a:solidFill>
+            <a:srgbClr val="C0392B"/>
+          </a:solidFill>
+          <a:ln>
+            <a:noFill/>
+          </a:ln>
+          <a:effectLst/>
+        </p:spPr>
+        <p:style>
+          <a:lnRef idx="1">
+            <a:schemeClr val="accent1"/>
+          </a:lnRef>
+          <a:fillRef idx="3">
+            <a:schemeClr val="accent1"/>
+          </a:fillRef>
+          <a:effectRef idx="2">
+            <a:schemeClr val="accent1"/>
+          </a:effectRef>
+          <a:fontRef idx="minor">
+            <a:schemeClr val="lt1"/>
+          </a:fontRef>
+        </p:style>
+        <p:txBody>
+          <a:bodyPr rtlCol="0" anchor="ctr"/>
+          <a:lstStyle/>
+          <a:p>
+            <a:pPr algn="ctr"/>
+          </a:p>
+        </p:txBody>
+      </p:sp>
+      <p:sp>
+        <p:nvSpPr>
+          <p:cNvPr id="3" name="TextBox 2"/>
+          <p:cNvSpPr txBox="1"/>
+          <p:nvPr/>
+        </p:nvSpPr>
+        <p:spPr>
+          <a:xfrm>
+            <a:off x="548640" y="91440"/>
+            <a:ext cx="10972800" cy="777240"/>
+          </a:xfrm>
+          <a:prstGeom prst="rect">
+            <a:avLst/>
+          </a:prstGeom>
+          <a:noFill/>
+        </p:spPr>
+        <p:txBody>
+          <a:bodyPr wrap="square">
+            <a:spAutoFit/>
+          </a:bodyPr>
+          <a:lstStyle/>
+          <a:p>
+            <a:pPr algn="l">
+              <a:spcAft>
+                <a:spcPts val="600"/>
+              </a:spcAft>
+            </a:pPr>
+            <a:r>
+              <a:rPr sz="2600" b="1">
+                <a:solidFill>
+                  <a:srgbClr val="FFFFFF"/>
+                </a:solidFill>
+                <a:latin typeface="맑은 고딕"/>
+              </a:rPr>
+              <a:t>GoldenGate와의 비교</a:t>
+            </a:r>
+          </a:p>
+        </p:txBody>
+      </p:sp>
+      <p:sp>
+        <p:nvSpPr>
+          <p:cNvPr id="4" name="TextBox 3"/>
+          <p:cNvSpPr txBox="1"/>
+          <p:nvPr/>
+        </p:nvSpPr>
+        <p:spPr>
+          <a:xfrm>
+            <a:off x="640080" y="1078992"/>
+            <a:ext cx="10881360" cy="457200"/>
+          </a:xfrm>
+          <a:prstGeom prst="rect">
+            <a:avLst/>
+          </a:prstGeom>
+          <a:noFill/>
+        </p:spPr>
+        <p:txBody>
+          <a:bodyPr wrap="square">
+            <a:spAutoFit/>
+          </a:bodyPr>
+          <a:lstStyle/>
+          <a:p>
+            <a:pPr algn="l">
+              <a:spcAft>
+                <a:spcPts val="600"/>
+              </a:spcAft>
+            </a:pPr>
+            <a:r>
+              <a:rPr sz="1500" b="0">
+                <a:solidFill>
+                  <a:srgbClr val="5A6672"/>
+                </a:solidFill>
+                <a:latin typeface="맑은 고딕"/>
+              </a:rPr>
+              <a:t>논리 복제와 물리 복제</a:t>
+            </a:r>
+          </a:p>
+        </p:txBody>
+      </p:sp>
+      <p:sp>
+        <p:nvSpPr>
+          <p:cNvPr id="5" name="TextBox 4"/>
+          <p:cNvSpPr txBox="1"/>
+          <p:nvPr/>
+        </p:nvSpPr>
+        <p:spPr>
+          <a:xfrm>
+            <a:off x="640080" y="1737360"/>
+            <a:ext cx="10881360" cy="4754880"/>
+          </a:xfrm>
+          <a:prstGeom prst="rect">
+            <a:avLst/>
+          </a:prstGeom>
+          <a:noFill/>
+        </p:spPr>
+        <p:txBody>
+          <a:bodyPr wrap="square">
+            <a:spAutoFit/>
+          </a:bodyPr>
+          <a:lstStyle/>
+          <a:p>
+            <a:pPr algn="l">
+              <a:spcAft>
+                <a:spcPts val="1000"/>
+              </a:spcAft>
+            </a:pPr>
+            <a:r>
+              <a:rPr sz="1700" b="0">
+                <a:solidFill>
+                  <a:srgbClr val="222222"/>
+                </a:solidFill>
+                <a:latin typeface="맑은 고딕"/>
+              </a:rPr>
+              <a:t>•  GoldenGate: 리두에서 변경을 뽑아 논리 복제</a:t>
+            </a:r>
+          </a:p>
+          <a:p>
+            <a:pPr algn="l">
+              <a:spcAft>
+                <a:spcPts val="1000"/>
+              </a:spcAft>
+            </a:pPr>
+            <a:r>
+              <a:rPr sz="1700" b="0">
+                <a:solidFill>
+                  <a:srgbClr val="222222"/>
+                </a:solidFill>
+                <a:latin typeface="맑은 고딕"/>
+              </a:rPr>
+              <a:t>•  양방향, 이기종, 버전이 다른 대상 가능</a:t>
+            </a:r>
+          </a:p>
+          <a:p>
+            <a:pPr algn="l">
+              <a:spcAft>
+                <a:spcPts val="1000"/>
+              </a:spcAft>
+            </a:pPr>
+            <a:r>
+              <a:rPr sz="1700" b="0">
+                <a:solidFill>
+                  <a:srgbClr val="222222"/>
+                </a:solidFill>
+                <a:latin typeface="맑은 고딕"/>
+              </a:rPr>
+              <a:t>•  무중단 이전, active-active 구성에 강함</a:t>
+            </a:r>
+          </a:p>
+          <a:p>
+            <a:pPr algn="l">
+              <a:spcAft>
+                <a:spcPts val="1000"/>
+              </a:spcAft>
+            </a:pPr>
+            <a:r>
+              <a:rPr sz="1700" b="0">
+                <a:solidFill>
+                  <a:srgbClr val="222222"/>
+                </a:solidFill>
+                <a:latin typeface="맑은 고딕"/>
+              </a:rPr>
+              <a:t>•  비동기·데이터 유형 제약 → 무손실 재해 복구는 Physical</a:t>
+            </a:r>
+          </a:p>
+          <a:p>
+            <a:pPr algn="l">
+              <a:spcAft>
+                <a:spcPts val="1000"/>
+              </a:spcAft>
+            </a:pPr>
+            <a:r>
+              <a:rPr sz="1700" b="0">
+                <a:solidFill>
+                  <a:srgbClr val="222222"/>
+                </a:solidFill>
+                <a:latin typeface="맑은 고딕"/>
+              </a:rPr>
+              <a:t>•  별도 라이선스 제품</a:t>
+            </a:r>
+          </a:p>
+        </p:txBody>
+      </p:sp>
+    </p:spTree>
+  </p:cSld>
+  <p:clrMapOvr>
+    <a:masterClrMapping/>
+  </p:clrMapOvr>
+</p:sld>
+</file>
+
+<file path=ppt/slides/slide46.xml><?xml version="1.0" encoding="utf-8"?>
+<p:sld xmlns:a="http://schemas.openxmlformats.org/drawingml/2006/main" xmlns:p="http://schemas.openxmlformats.org/presentationml/2006/main" xmlns:r="http://schemas.openxmlformats.org/officeDocument/2006/relationships">
+  <p:cSld>
+    <p:spTree>
+      <p:nvGrpSpPr>
+        <p:cNvPr id="1" name=""/>
+        <p:cNvGrpSpPr/>
+        <p:nvPr/>
+      </p:nvGrpSpPr>
+      <p:grpSpPr/>
+      <p:sp>
+        <p:nvSpPr>
+          <p:cNvPr id="2" name="Rectangle 1"/>
+          <p:cNvSpPr/>
+          <p:nvPr/>
+        </p:nvSpPr>
+        <p:spPr>
+          <a:xfrm>
+            <a:off x="0" y="0"/>
+            <a:ext cx="12191695" cy="1005840"/>
+          </a:xfrm>
+          <a:prstGeom prst="rect">
+            <a:avLst/>
+          </a:prstGeom>
+          <a:solidFill>
+            <a:srgbClr val="C0392B"/>
+          </a:solidFill>
+          <a:ln>
+            <a:noFill/>
+          </a:ln>
+          <a:effectLst/>
+        </p:spPr>
+        <p:style>
+          <a:lnRef idx="1">
+            <a:schemeClr val="accent1"/>
+          </a:lnRef>
+          <a:fillRef idx="3">
+            <a:schemeClr val="accent1"/>
+          </a:fillRef>
+          <a:effectRef idx="2">
+            <a:schemeClr val="accent1"/>
+          </a:effectRef>
+          <a:fontRef idx="minor">
+            <a:schemeClr val="lt1"/>
+          </a:fontRef>
+        </p:style>
+        <p:txBody>
+          <a:bodyPr rtlCol="0" anchor="ctr"/>
+          <a:lstStyle/>
+          <a:p>
+            <a:pPr algn="ctr"/>
+          </a:p>
+        </p:txBody>
+      </p:sp>
+      <p:sp>
+        <p:nvSpPr>
+          <p:cNvPr id="3" name="TextBox 2"/>
+          <p:cNvSpPr txBox="1"/>
+          <p:nvPr/>
+        </p:nvSpPr>
+        <p:spPr>
+          <a:xfrm>
+            <a:off x="548640" y="91440"/>
+            <a:ext cx="10972800" cy="777240"/>
+          </a:xfrm>
+          <a:prstGeom prst="rect">
+            <a:avLst/>
+          </a:prstGeom>
+          <a:noFill/>
+        </p:spPr>
+        <p:txBody>
+          <a:bodyPr wrap="square">
+            <a:spAutoFit/>
+          </a:bodyPr>
+          <a:lstStyle/>
+          <a:p>
+            <a:pPr algn="l">
+              <a:spcAft>
+                <a:spcPts val="600"/>
+              </a:spcAft>
+            </a:pPr>
+            <a:r>
+              <a:rPr sz="2600" b="1">
+                <a:solidFill>
+                  <a:srgbClr val="FFFFFF"/>
+                </a:solidFill>
+                <a:latin typeface="맑은 고딕"/>
+              </a:rPr>
+              <a:t>백업, Flashback, 스토리지 미러링</a:t>
+            </a:r>
+          </a:p>
+        </p:txBody>
+      </p:sp>
+      <p:sp>
+        <p:nvSpPr>
+          <p:cNvPr id="4" name="TextBox 3"/>
+          <p:cNvSpPr txBox="1"/>
+          <p:nvPr/>
+        </p:nvSpPr>
+        <p:spPr>
+          <a:xfrm>
+            <a:off x="640080" y="1078992"/>
+            <a:ext cx="10881360" cy="457200"/>
+          </a:xfrm>
+          <a:prstGeom prst="rect">
+            <a:avLst/>
+          </a:prstGeom>
+          <a:noFill/>
+        </p:spPr>
+        <p:txBody>
+          <a:bodyPr wrap="square">
+            <a:spAutoFit/>
+          </a:bodyPr>
+          <a:lstStyle/>
+          <a:p>
+            <a:pPr algn="l">
+              <a:spcAft>
+                <a:spcPts val="600"/>
+              </a:spcAft>
+            </a:pPr>
+            <a:r>
+              <a:rPr sz="1500" b="0">
+                <a:solidFill>
+                  <a:srgbClr val="5A6672"/>
+                </a:solidFill>
+                <a:latin typeface="맑은 고딕"/>
+              </a:rPr>
+              <a:t>Data Guard가 대신하지 않는 것</a:t>
+            </a:r>
+          </a:p>
+        </p:txBody>
+      </p:sp>
+      <p:sp>
+        <p:nvSpPr>
+          <p:cNvPr id="5" name="TextBox 4"/>
+          <p:cNvSpPr txBox="1"/>
+          <p:nvPr/>
+        </p:nvSpPr>
+        <p:spPr>
+          <a:xfrm>
+            <a:off x="640080" y="1737360"/>
+            <a:ext cx="10881360" cy="4754880"/>
+          </a:xfrm>
+          <a:prstGeom prst="rect">
+            <a:avLst/>
+          </a:prstGeom>
+          <a:noFill/>
+        </p:spPr>
+        <p:txBody>
+          <a:bodyPr wrap="square">
+            <a:spAutoFit/>
+          </a:bodyPr>
+          <a:lstStyle/>
+          <a:p>
+            <a:pPr algn="l">
+              <a:spcAft>
+                <a:spcPts val="1000"/>
+              </a:spcAft>
+            </a:pPr>
+            <a:r>
+              <a:rPr sz="1700" b="0">
+                <a:solidFill>
+                  <a:srgbClr val="222222"/>
+                </a:solidFill>
+                <a:latin typeface="맑은 고딕"/>
+              </a:rPr>
+              <a:t>•  RMAN 백업: 모든 전략의 바닥, RTO가 김</a:t>
+            </a:r>
+          </a:p>
+          <a:p>
+            <a:pPr algn="l">
+              <a:spcAft>
+                <a:spcPts val="1000"/>
+              </a:spcAft>
+            </a:pPr>
+            <a:r>
+              <a:rPr sz="1700" b="0">
+                <a:solidFill>
+                  <a:srgbClr val="222222"/>
+                </a:solidFill>
+                <a:latin typeface="맑은 고딕"/>
+              </a:rPr>
+              <a:t>•  Flashback Database: 논리 오류 되감기, reinstate 기반</a:t>
+            </a:r>
+          </a:p>
+          <a:p>
+            <a:pPr algn="l">
+              <a:spcAft>
+                <a:spcPts val="1000"/>
+              </a:spcAft>
+            </a:pPr>
+            <a:r>
+              <a:rPr sz="1700" b="0">
+                <a:solidFill>
+                  <a:srgbClr val="222222"/>
+                </a:solidFill>
+                <a:latin typeface="맑은 고딕"/>
+              </a:rPr>
+              <a:t>•  스토리지 미러링: 손상된 블록도 그대로 복제</a:t>
+            </a:r>
+          </a:p>
+          <a:p>
+            <a:pPr algn="l">
+              <a:spcAft>
+                <a:spcPts val="1000"/>
+              </a:spcAft>
+            </a:pPr>
+            <a:r>
+              <a:rPr sz="1700" b="0">
+                <a:solidFill>
+                  <a:srgbClr val="222222"/>
+                </a:solidFill>
+                <a:latin typeface="맑은 고딕"/>
+              </a:rPr>
+              <a:t>•  Data Guard는 리두 적용 중 검증, 손상이 번지지 않음</a:t>
+            </a:r>
+          </a:p>
+          <a:p>
+            <a:pPr algn="l">
+              <a:spcAft>
+                <a:spcPts val="1000"/>
+              </a:spcAft>
+            </a:pPr>
+            <a:r>
+              <a:rPr sz="1700" b="0">
+                <a:solidFill>
+                  <a:srgbClr val="222222"/>
+                </a:solidFill>
+                <a:latin typeface="맑은 고딕"/>
+              </a:rPr>
+              <a:t>•  백업은 Physical Standby에서 받아 Primary 부하 경감</a:t>
+            </a:r>
+          </a:p>
+        </p:txBody>
+      </p:sp>
+    </p:spTree>
+  </p:cSld>
+  <p:clrMapOvr>
+    <a:masterClrMapping/>
+  </p:clrMapOvr>
+</p:sld>
+</file>
+
+<file path=ppt/slides/slide47.xml><?xml version="1.0" encoding="utf-8"?>
+<p:sld xmlns:a="http://schemas.openxmlformats.org/drawingml/2006/main" xmlns:p="http://schemas.openxmlformats.org/presentationml/2006/main" xmlns:r="http://schemas.openxmlformats.org/officeDocument/2006/relationships">
+  <p:cSld>
+    <p:spTree>
+      <p:nvGrpSpPr>
+        <p:cNvPr id="1" name=""/>
+        <p:cNvGrpSpPr/>
+        <p:nvPr/>
+      </p:nvGrpSpPr>
+      <p:grpSpPr/>
+      <p:sp>
+        <p:nvSpPr>
+          <p:cNvPr id="2" name="Rectangle 1"/>
+          <p:cNvSpPr/>
+          <p:nvPr/>
+        </p:nvSpPr>
+        <p:spPr>
+          <a:xfrm>
+            <a:off x="0" y="0"/>
+            <a:ext cx="12191695" cy="1005840"/>
+          </a:xfrm>
+          <a:prstGeom prst="rect">
+            <a:avLst/>
+          </a:prstGeom>
+          <a:solidFill>
+            <a:srgbClr val="C0392B"/>
+          </a:solidFill>
+          <a:ln>
+            <a:noFill/>
+          </a:ln>
+          <a:effectLst/>
+        </p:spPr>
+        <p:style>
+          <a:lnRef idx="1">
+            <a:schemeClr val="accent1"/>
+          </a:lnRef>
+          <a:fillRef idx="3">
+            <a:schemeClr val="accent1"/>
+          </a:fillRef>
+          <a:effectRef idx="2">
+            <a:schemeClr val="accent1"/>
+          </a:effectRef>
+          <a:fontRef idx="minor">
+            <a:schemeClr val="lt1"/>
+          </a:fontRef>
+        </p:style>
+        <p:txBody>
+          <a:bodyPr rtlCol="0" anchor="ctr"/>
+          <a:lstStyle/>
+          <a:p>
+            <a:pPr algn="ctr"/>
+          </a:p>
+        </p:txBody>
+      </p:sp>
+      <p:sp>
+        <p:nvSpPr>
+          <p:cNvPr id="3" name="TextBox 2"/>
+          <p:cNvSpPr txBox="1"/>
+          <p:nvPr/>
+        </p:nvSpPr>
+        <p:spPr>
+          <a:xfrm>
+            <a:off x="548640" y="91440"/>
+            <a:ext cx="10972800" cy="777240"/>
+          </a:xfrm>
+          <a:prstGeom prst="rect">
+            <a:avLst/>
+          </a:prstGeom>
+          <a:noFill/>
+        </p:spPr>
+        <p:txBody>
+          <a:bodyPr wrap="square">
+            <a:spAutoFit/>
+          </a:bodyPr>
+          <a:lstStyle/>
+          <a:p>
+            <a:pPr algn="l">
+              <a:spcAft>
+                <a:spcPts val="600"/>
+              </a:spcAft>
+            </a:pPr>
+            <a:r>
+              <a:rPr sz="2600" b="1">
+                <a:solidFill>
+                  <a:srgbClr val="FFFFFF"/>
+                </a:solidFill>
+                <a:latin typeface="맑은 고딕"/>
+              </a:rPr>
+              <a:t>기술을 겹쳐 쓰는 방식</a:t>
+            </a:r>
+          </a:p>
+        </p:txBody>
+      </p:sp>
+      <p:sp>
+        <p:nvSpPr>
+          <p:cNvPr id="4" name="TextBox 3"/>
+          <p:cNvSpPr txBox="1"/>
+          <p:nvPr/>
+        </p:nvSpPr>
+        <p:spPr>
+          <a:xfrm>
+            <a:off x="640080" y="1078992"/>
+            <a:ext cx="10881360" cy="457200"/>
+          </a:xfrm>
+          <a:prstGeom prst="rect">
+            <a:avLst/>
+          </a:prstGeom>
+          <a:noFill/>
+        </p:spPr>
+        <p:txBody>
+          <a:bodyPr wrap="square">
+            <a:spAutoFit/>
+          </a:bodyPr>
+          <a:lstStyle/>
+          <a:p>
+            <a:pPr algn="l">
+              <a:spcAft>
+                <a:spcPts val="600"/>
+              </a:spcAft>
+            </a:pPr>
+            <a:r>
+              <a:rPr sz="1500" b="0">
+                <a:solidFill>
+                  <a:srgbClr val="5A6672"/>
+                </a:solidFill>
+                <a:latin typeface="맑은 고딕"/>
+              </a:rPr>
+              <a:t>MAA의 계층 구조</a:t>
+            </a:r>
+          </a:p>
+        </p:txBody>
+      </p:sp>
+      <p:sp>
+        <p:nvSpPr>
+          <p:cNvPr id="5" name="TextBox 4"/>
+          <p:cNvSpPr txBox="1"/>
+          <p:nvPr/>
+        </p:nvSpPr>
+        <p:spPr>
+          <a:xfrm>
+            <a:off x="640080" y="1737360"/>
+            <a:ext cx="10881360" cy="4754880"/>
+          </a:xfrm>
+          <a:prstGeom prst="rect">
+            <a:avLst/>
+          </a:prstGeom>
+          <a:noFill/>
+        </p:spPr>
+        <p:txBody>
+          <a:bodyPr wrap="square">
+            <a:spAutoFit/>
+          </a:bodyPr>
+          <a:lstStyle/>
+          <a:p>
+            <a:pPr algn="l">
+              <a:spcAft>
+                <a:spcPts val="1000"/>
+              </a:spcAft>
+            </a:pPr>
+            <a:r>
+              <a:rPr sz="1700" b="0">
+                <a:solidFill>
+                  <a:srgbClr val="222222"/>
+                </a:solidFill>
+                <a:latin typeface="맑은 고딕"/>
+              </a:rPr>
+              <a:t>•  기본: 단일 인스턴스 + RMAN 백업 + Flashback</a:t>
+            </a:r>
+          </a:p>
+          <a:p>
+            <a:pPr algn="l">
+              <a:spcAft>
+                <a:spcPts val="1000"/>
+              </a:spcAft>
+            </a:pPr>
+            <a:r>
+              <a:rPr sz="1700" b="0">
+                <a:solidFill>
+                  <a:srgbClr val="222222"/>
+                </a:solidFill>
+                <a:latin typeface="맑은 고딕"/>
+              </a:rPr>
+              <a:t>•  서버 장애 대비: + RAC</a:t>
+            </a:r>
+          </a:p>
+          <a:p>
+            <a:pPr algn="l">
+              <a:spcAft>
+                <a:spcPts val="1000"/>
+              </a:spcAft>
+            </a:pPr>
+            <a:r>
+              <a:rPr sz="1700" b="0">
+                <a:solidFill>
+                  <a:srgbClr val="222222"/>
+                </a:solidFill>
+                <a:latin typeface="맑은 고딕"/>
+              </a:rPr>
+              <a:t>•  사이트 재해 대비: + Data Guard (필요 시 ADG)</a:t>
+            </a:r>
+          </a:p>
+          <a:p>
+            <a:pPr algn="l">
+              <a:spcAft>
+                <a:spcPts val="1000"/>
+              </a:spcAft>
+            </a:pPr>
+            <a:r>
+              <a:rPr sz="1700" b="0">
+                <a:solidFill>
+                  <a:srgbClr val="222222"/>
+                </a:solidFill>
+                <a:latin typeface="맑은 고딕"/>
+              </a:rPr>
+              <a:t>•  무중단 이전·다중 사이트 쓰기: + GoldenGate</a:t>
+            </a:r>
+          </a:p>
+          <a:p>
+            <a:pPr algn="l">
+              <a:spcAft>
+                <a:spcPts val="1000"/>
+              </a:spcAft>
+            </a:pPr>
+            <a:r>
+              <a:rPr sz="1700" b="0">
+                <a:solidFill>
+                  <a:srgbClr val="222222"/>
+                </a:solidFill>
+                <a:latin typeface="맑은 고딕"/>
+              </a:rPr>
+              <a:t>•  시스템별 RPO·RTO에 맞는 계층을 고른다</a:t>
+            </a:r>
+          </a:p>
+        </p:txBody>
+      </p:sp>
+    </p:spTree>
+  </p:cSld>
+  <p:clrMapOvr>
+    <a:masterClrMapping/>
+  </p:clrMapOvr>
+</p:sld>
+</file>
+
+<file path=ppt/slides/slide48.xml><?xml version="1.0" encoding="utf-8"?>
+<p:sld xmlns:a="http://schemas.openxmlformats.org/drawingml/2006/main" xmlns:p="http://schemas.openxmlformats.org/presentationml/2006/main" xmlns:r="http://schemas.openxmlformats.org/officeDocument/2006/relationships">
+  <p:cSld>
+    <p:spTree>
+      <p:nvGrpSpPr>
+        <p:cNvPr id="1" name=""/>
+        <p:cNvGrpSpPr/>
+        <p:nvPr/>
+      </p:nvGrpSpPr>
+      <p:grpSpPr/>
+      <p:sp>
+        <p:nvSpPr>
+          <p:cNvPr id="2" name="Rectangle 1"/>
+          <p:cNvSpPr/>
+          <p:nvPr/>
+        </p:nvSpPr>
+        <p:spPr>
+          <a:xfrm>
+            <a:off x="0" y="0"/>
+            <a:ext cx="12191695" cy="1005840"/>
+          </a:xfrm>
+          <a:prstGeom prst="rect">
+            <a:avLst/>
+          </a:prstGeom>
+          <a:solidFill>
+            <a:srgbClr val="C0392B"/>
+          </a:solidFill>
+          <a:ln>
+            <a:noFill/>
+          </a:ln>
+          <a:effectLst/>
+        </p:spPr>
+        <p:style>
+          <a:lnRef idx="1">
+            <a:schemeClr val="accent1"/>
+          </a:lnRef>
+          <a:fillRef idx="3">
+            <a:schemeClr val="accent1"/>
+          </a:fillRef>
+          <a:effectRef idx="2">
+            <a:schemeClr val="accent1"/>
+          </a:effectRef>
+          <a:fontRef idx="minor">
+            <a:schemeClr val="lt1"/>
+          </a:fontRef>
+        </p:style>
+        <p:txBody>
+          <a:bodyPr rtlCol="0" anchor="ctr"/>
+          <a:lstStyle/>
+          <a:p>
+            <a:pPr algn="ctr"/>
+          </a:p>
+        </p:txBody>
+      </p:sp>
+      <p:sp>
+        <p:nvSpPr>
+          <p:cNvPr id="3" name="TextBox 2"/>
+          <p:cNvSpPr txBox="1"/>
+          <p:nvPr/>
+        </p:nvSpPr>
+        <p:spPr>
+          <a:xfrm>
+            <a:off x="548640" y="91440"/>
+            <a:ext cx="10972800" cy="777240"/>
+          </a:xfrm>
+          <a:prstGeom prst="rect">
+            <a:avLst/>
+          </a:prstGeom>
+          <a:noFill/>
+        </p:spPr>
+        <p:txBody>
+          <a:bodyPr wrap="square">
+            <a:spAutoFit/>
+          </a:bodyPr>
+          <a:lstStyle/>
+          <a:p>
+            <a:pPr algn="l">
+              <a:spcAft>
+                <a:spcPts val="600"/>
+              </a:spcAft>
+            </a:pPr>
+            <a:r>
+              <a:rPr sz="2600" b="1">
+                <a:solidFill>
+                  <a:srgbClr val="FFFFFF"/>
+                </a:solidFill>
+                <a:latin typeface="맑은 고딕"/>
+              </a:rPr>
+              <a:t>사례: 어떤 기술부터 도입할까</a:t>
+            </a:r>
+          </a:p>
+        </p:txBody>
+      </p:sp>
+      <p:sp>
+        <p:nvSpPr>
+          <p:cNvPr id="4" name="TextBox 3"/>
+          <p:cNvSpPr txBox="1"/>
+          <p:nvPr/>
+        </p:nvSpPr>
+        <p:spPr>
+          <a:xfrm>
+            <a:off x="640080" y="1078992"/>
+            <a:ext cx="10881360" cy="457200"/>
+          </a:xfrm>
+          <a:prstGeom prst="rect">
+            <a:avLst/>
+          </a:prstGeom>
+          <a:noFill/>
+        </p:spPr>
+        <p:txBody>
+          <a:bodyPr wrap="square">
+            <a:spAutoFit/>
+          </a:bodyPr>
+          <a:lstStyle/>
+          <a:p>
+            <a:pPr algn="l">
+              <a:spcAft>
+                <a:spcPts val="600"/>
+              </a:spcAft>
+            </a:pPr>
+            <a:r>
+              <a:rPr sz="1500" b="0">
+                <a:solidFill>
+                  <a:srgbClr val="5A6672"/>
+                </a:solidFill>
+                <a:latin typeface="맑은 고딕"/>
+              </a:rPr>
+              <a:t>단일 서버 병원 정보 시스템</a:t>
+            </a:r>
+          </a:p>
+        </p:txBody>
+      </p:sp>
+      <p:sp>
+        <p:nvSpPr>
+          <p:cNvPr id="5" name="TextBox 4"/>
+          <p:cNvSpPr txBox="1"/>
+          <p:nvPr/>
+        </p:nvSpPr>
+        <p:spPr>
+          <a:xfrm>
+            <a:off x="640080" y="1737360"/>
+            <a:ext cx="10881360" cy="4754880"/>
+          </a:xfrm>
+          <a:prstGeom prst="rect">
+            <a:avLst/>
+          </a:prstGeom>
+          <a:noFill/>
+        </p:spPr>
+        <p:txBody>
+          <a:bodyPr wrap="square">
+            <a:spAutoFit/>
+          </a:bodyPr>
+          <a:lstStyle/>
+          <a:p>
+            <a:pPr algn="l">
+              <a:spcAft>
+                <a:spcPts val="1000"/>
+              </a:spcAft>
+            </a:pPr>
+            <a:r>
+              <a:rPr sz="1700" b="0">
+                <a:solidFill>
+                  <a:srgbClr val="222222"/>
+                </a:solidFill>
+                <a:latin typeface="맑은 고딕"/>
+              </a:rPr>
+              <a:t>•  요구: 30분 내 복구, 데이터 손실 없음, 패치 중단 최소</a:t>
+            </a:r>
+          </a:p>
+          <a:p>
+            <a:pPr algn="l">
+              <a:spcAft>
+                <a:spcPts val="1000"/>
+              </a:spcAft>
+            </a:pPr>
+            <a:r>
+              <a:rPr sz="1700" b="0">
+                <a:solidFill>
+                  <a:srgbClr val="222222"/>
+                </a:solidFill>
+                <a:latin typeface="맑은 고딕"/>
+              </a:rPr>
+              <a:t>•  RAC: 서버 장애는 해결, 스토리지 위험은 남음</a:t>
+            </a:r>
+          </a:p>
+          <a:p>
+            <a:pPr algn="l">
+              <a:spcAft>
+                <a:spcPts val="1000"/>
+              </a:spcAft>
+            </a:pPr>
+            <a:r>
+              <a:rPr sz="1700" b="0">
+                <a:solidFill>
+                  <a:srgbClr val="222222"/>
+                </a:solidFill>
+                <a:latin typeface="맑은 고딕"/>
+              </a:rPr>
+              <a:t>•  Physical Standby + Maximum Availability로 세 요구 충족</a:t>
+            </a:r>
+          </a:p>
+          <a:p>
+            <a:pPr algn="l">
+              <a:spcAft>
+                <a:spcPts val="1000"/>
+              </a:spcAft>
+            </a:pPr>
+            <a:r>
+              <a:rPr sz="1700" b="0">
+                <a:solidFill>
+                  <a:srgbClr val="222222"/>
+                </a:solidFill>
+                <a:latin typeface="맑은 고딕"/>
+              </a:rPr>
+              <a:t>•  패치는 Standby 선적용 후 Switchover</a:t>
+            </a:r>
+          </a:p>
+          <a:p>
+            <a:pPr algn="l">
+              <a:spcAft>
+                <a:spcPts val="1000"/>
+              </a:spcAft>
+            </a:pPr>
+            <a:r>
+              <a:rPr sz="1700" b="0">
+                <a:solidFill>
+                  <a:srgbClr val="222222"/>
+                </a:solidFill>
+                <a:latin typeface="맑은 고딕"/>
+              </a:rPr>
+              <a:t>•  조회 분산이 필요해지면 그때 ADG 옵션 검토</a:t>
+            </a:r>
+          </a:p>
+        </p:txBody>
+      </p:sp>
+    </p:spTree>
+  </p:cSld>
+  <p:clrMapOvr>
+    <a:masterClrMapping/>
+  </p:clrMapOvr>
+</p:sld>
+</file>
+
+<file path=ppt/slides/slide49.xml><?xml version="1.0" encoding="utf-8"?>
+<p:sld xmlns:a="http://schemas.openxmlformats.org/drawingml/2006/main" xmlns:p="http://schemas.openxmlformats.org/presentationml/2006/main" xmlns:r="http://schemas.openxmlformats.org/officeDocument/2006/relationships">
+  <p:cSld>
+    <p:spTree>
+      <p:nvGrpSpPr>
+        <p:cNvPr id="1" name=""/>
+        <p:cNvGrpSpPr/>
+        <p:nvPr/>
+      </p:nvGrpSpPr>
+      <p:grpSpPr/>
+      <p:sp>
+        <p:nvSpPr>
+          <p:cNvPr id="2" name="Rectangle 1"/>
+          <p:cNvSpPr/>
+          <p:nvPr/>
+        </p:nvSpPr>
+        <p:spPr>
+          <a:xfrm>
+            <a:off x="0" y="0"/>
+            <a:ext cx="12191695" cy="6858000"/>
+          </a:xfrm>
+          <a:prstGeom prst="rect">
+            <a:avLst/>
+          </a:prstGeom>
+          <a:solidFill>
+            <a:srgbClr val="C0392B"/>
+          </a:solidFill>
+          <a:ln>
+            <a:noFill/>
+          </a:ln>
+          <a:effectLst/>
+        </p:spPr>
+        <p:style>
+          <a:lnRef idx="1">
+            <a:schemeClr val="accent1"/>
+          </a:lnRef>
+          <a:fillRef idx="3">
+            <a:schemeClr val="accent1"/>
+          </a:fillRef>
+          <a:effectRef idx="2">
+            <a:schemeClr val="accent1"/>
+          </a:effectRef>
+          <a:fontRef idx="minor">
+            <a:schemeClr val="lt1"/>
+          </a:fontRef>
+        </p:style>
+        <p:txBody>
+          <a:bodyPr rtlCol="0" anchor="ctr"/>
+          <a:lstStyle/>
+          <a:p>
+            <a:pPr algn="ctr"/>
+          </a:p>
+        </p:txBody>
+      </p:sp>
+      <p:sp>
+        <p:nvSpPr>
+          <p:cNvPr id="3" name="TextBox 2"/>
+          <p:cNvSpPr txBox="1"/>
+          <p:nvPr/>
+        </p:nvSpPr>
+        <p:spPr>
+          <a:xfrm>
+            <a:off x="822960" y="2011680"/>
+            <a:ext cx="10515600" cy="1097280"/>
+          </a:xfrm>
+          <a:prstGeom prst="rect">
+            <a:avLst/>
+          </a:prstGeom>
+          <a:noFill/>
+        </p:spPr>
+        <p:txBody>
+          <a:bodyPr wrap="square">
+            <a:spAutoFit/>
+          </a:bodyPr>
+          <a:lstStyle/>
+          <a:p>
+            <a:pPr algn="l">
+              <a:spcAft>
+                <a:spcPts val="600"/>
+              </a:spcAft>
+            </a:pPr>
+            <a:r>
+              <a:rPr sz="4000" b="1">
+                <a:solidFill>
+                  <a:srgbClr val="FFFFFF"/>
+                </a:solidFill>
+                <a:latin typeface="맑은 고딕"/>
+              </a:rPr>
+              <a:t>1.10</a:t>
+            </a:r>
+          </a:p>
+        </p:txBody>
+      </p:sp>
+      <p:sp>
+        <p:nvSpPr>
+          <p:cNvPr id="4" name="TextBox 3"/>
+          <p:cNvSpPr txBox="1"/>
+          <p:nvPr/>
+        </p:nvSpPr>
+        <p:spPr>
+          <a:xfrm>
+            <a:off x="822960" y="3017520"/>
+            <a:ext cx="10515600" cy="914400"/>
+          </a:xfrm>
+          <a:prstGeom prst="rect">
+            <a:avLst/>
+          </a:prstGeom>
+          <a:noFill/>
+        </p:spPr>
+        <p:txBody>
+          <a:bodyPr wrap="square">
+            <a:spAutoFit/>
+          </a:bodyPr>
+          <a:lstStyle/>
+          <a:p>
+            <a:pPr algn="l">
+              <a:spcAft>
+                <a:spcPts val="600"/>
+              </a:spcAft>
+            </a:pPr>
+            <a:r>
+              <a:rPr sz="2800" b="1">
+                <a:solidFill>
+                  <a:srgbClr val="FFFFFF"/>
+                </a:solidFill>
+                <a:latin typeface="맑은 고딕"/>
+              </a:rPr>
+              <a:t>운영 시 주의점</a:t>
+            </a:r>
+          </a:p>
+        </p:txBody>
+      </p:sp>
+      <p:sp>
+        <p:nvSpPr>
+          <p:cNvPr id="5" name="Rectangle 4"/>
+          <p:cNvSpPr/>
+          <p:nvPr/>
+        </p:nvSpPr>
+        <p:spPr>
+          <a:xfrm>
+            <a:off x="822960" y="4114800"/>
+            <a:ext cx="5486400" cy="54864"/>
+          </a:xfrm>
+          <a:prstGeom prst="rect">
+            <a:avLst/>
+          </a:prstGeom>
+          <a:solidFill>
+            <a:srgbClr val="FFFFFF"/>
+          </a:solidFill>
+          <a:ln>
+            <a:noFill/>
+          </a:ln>
+          <a:effectLst/>
+        </p:spPr>
+        <p:style>
+          <a:lnRef idx="1">
+            <a:schemeClr val="accent1"/>
+          </a:lnRef>
+          <a:fillRef idx="3">
+            <a:schemeClr val="accent1"/>
+          </a:fillRef>
+          <a:effectRef idx="2">
+            <a:schemeClr val="accent1"/>
+          </a:effectRef>
+          <a:fontRef idx="minor">
+            <a:schemeClr val="lt1"/>
+          </a:fontRef>
+        </p:style>
+        <p:txBody>
+          <a:bodyPr rtlCol="0" anchor="ctr"/>
+          <a:lstStyle/>
+          <a:p>
+            <a:pPr algn="ctr"/>
+          </a:p>
+        </p:txBody>
+      </p:sp>
+      <p:sp>
+        <p:nvSpPr>
+          <p:cNvPr id="6" name="TextBox 5"/>
+          <p:cNvSpPr txBox="1"/>
+          <p:nvPr/>
+        </p:nvSpPr>
+        <p:spPr>
+          <a:xfrm>
+            <a:off x="822960" y="4297680"/>
+            <a:ext cx="10058400" cy="2011680"/>
+          </a:xfrm>
+          <a:prstGeom prst="rect">
+            <a:avLst/>
+          </a:prstGeom>
+          <a:noFill/>
+        </p:spPr>
+        <p:txBody>
+          <a:bodyPr wrap="square">
+            <a:spAutoFit/>
+          </a:bodyPr>
+          <a:lstStyle/>
+          <a:p>
+            <a:pPr algn="l">
+              <a:spcAft>
+                <a:spcPts val="800"/>
               </a:spcAft>
             </a:pPr>
             <a:r>
               <a:rPr sz="1600" b="0">
                 <a:solidFill>
-                  <a:srgbClr val="222222"/>
-                </a:solidFill>
-                <a:latin typeface="맑은 고딕"/>
-              </a:rPr>
-              <a:t>•  실습 04 — Standby 유형별 상태 확인: snapshot standby 변환·복귀. ORA-01109(안내)와 ORA-00942(폐기 확인) 관찰.</a:t>
-            </a:r>
-          </a:p>
-          <a:p>
-            <a:pPr algn="l">
-              <a:spcAft>
-                <a:spcPts val="1000"/>
+                  <a:srgbClr val="FFFFFF"/>
+                </a:solidFill>
+                <a:latin typeface="맑은 고딕"/>
+              </a:rPr>
+              <a:t>•  접속 대상과 상태 확인</a:t>
+            </a:r>
+          </a:p>
+          <a:p>
+            <a:pPr algn="l">
+              <a:spcAft>
+                <a:spcPts val="800"/>
               </a:spcAft>
             </a:pPr>
             <a:r>
               <a:rPr sz="1600" b="0">
                 <a:solidFill>
-                  <a:srgbClr val="222222"/>
-                </a:solidFill>
-                <a:latin typeface="맑은 고딕"/>
-              </a:rPr>
-              <a:t>•  실습 05 — 구성 전 점검표: 두 노드의 버전·엔디안·문자셋·시간대·파라미터 대조. ORACLE_SID 오설정으로 ORA-01034 재현.</a:t>
-            </a:r>
-          </a:p>
-          <a:p>
-            <a:pPr algn="l">
-              <a:spcAft>
-                <a:spcPts val="1000"/>
+                  <a:srgbClr val="FFFFFF"/>
+                </a:solidFill>
+                <a:latin typeface="맑은 고딕"/>
+              </a:rPr>
+              <a:t>•  기본값과 라이선스</a:t>
+            </a:r>
+          </a:p>
+          <a:p>
+            <a:pPr algn="l">
+              <a:spcAft>
+                <a:spcPts val="800"/>
               </a:spcAft>
             </a:pPr>
             <a:r>
               <a:rPr sz="1600" b="0">
                 <a:solidFill>
-                  <a:srgbClr val="222222"/>
-                </a:solidFill>
-                <a:latin typeface="맑은 고딕"/>
-              </a:rPr>
-              <a:t>•  모든 실습은 2노드 환경(chicago-srv 172.16.225.60 / boston-srv 172.16.225.61)에서 수행한다.</a:t>
+                  <a:srgbClr val="FFFFFF"/>
+                </a:solidFill>
+                <a:latin typeface="맑은 고딕"/>
+              </a:rPr>
+              <a:t>•  감시 기준과 삭제 정책</a:t>
             </a:r>
           </a:p>
         </p:txBody>
@@ -14428,7 +17046,7 @@
                 </a:solidFill>
                 <a:latin typeface="맑은 고딕"/>
               </a:rPr>
-              <a:t>Data Guard의 정의</a:t>
+              <a:t>다운타임의 종류</a:t>
             </a:r>
           </a:p>
         </p:txBody>
@@ -14467,7 +17085,7 @@
                 </a:solidFill>
                 <a:latin typeface="맑은 고딕"/>
               </a:rPr>
-              <a:t>백업이 아니라 "따라오는 데이터베이스"</a:t>
+              <a:t>원인마다 대책이 다르다</a:t>
             </a:r>
           </a:p>
         </p:txBody>
@@ -14506,7 +17124,7 @@
                 </a:solidFill>
                 <a:latin typeface="맑은 고딕"/>
               </a:rPr>
-              <a:t>•  운영 DB 한 대와 복제본 여러 대를 함께 관리하는 소프트웨어 인프라</a:t>
+              <a:t>•  계획 정지: 패치, 하드웨어 교체 → Switchover</a:t>
             </a:r>
           </a:p>
           <a:p>
@@ -14522,7 +17140,7 @@
                 </a:solidFill>
                 <a:latin typeface="맑은 고딕"/>
               </a:rPr>
-              <a:t>•  목적: 장애·오류·손상으로부터 데이터를 보호한다</a:t>
+              <a:t>•  서버·인스턴스 장애 → Failover</a:t>
             </a:r>
           </a:p>
           <a:p>
@@ -14538,7 +17156,7 @@
                 </a:solidFill>
                 <a:latin typeface="맑은 고딕"/>
               </a:rPr>
-              <a:t>•  백업은 과거 시점으로 되돌리는 수단, Data Guard는 현재를 따라오는 또 하나의 DB</a:t>
+              <a:t>•  사이트 재해: 화재, 정전, 네트워크 단절 → 원격 Standby</a:t>
             </a:r>
           </a:p>
           <a:p>
@@ -14554,7 +17172,1034 @@
                 </a:solidFill>
                 <a:latin typeface="맑은 고딕"/>
               </a:rPr>
-              <a:t>•  한 문장 요약: Primary의 리두를 Standby로 옮기고 적용해 같은 상태를 유지한다</a:t>
+              <a:t>•  데이터 손상: lost write, 블록 손상 → 리두 검증</a:t>
+            </a:r>
+          </a:p>
+          <a:p>
+            <a:pPr algn="l">
+              <a:spcAft>
+                <a:spcPts val="1000"/>
+              </a:spcAft>
+            </a:pPr>
+            <a:r>
+              <a:rPr sz="1700" b="0">
+                <a:solidFill>
+                  <a:srgbClr val="222222"/>
+                </a:solidFill>
+                <a:latin typeface="맑은 고딕"/>
+              </a:rPr>
+              <a:t>•  사용자 오류는 그대로 전달됨 → 지연 적용, Flashback</a:t>
+            </a:r>
+          </a:p>
+        </p:txBody>
+      </p:sp>
+    </p:spTree>
+  </p:cSld>
+  <p:clrMapOvr>
+    <a:masterClrMapping/>
+  </p:clrMapOvr>
+</p:sld>
+</file>
+
+<file path=ppt/slides/slide50.xml><?xml version="1.0" encoding="utf-8"?>
+<p:sld xmlns:a="http://schemas.openxmlformats.org/drawingml/2006/main" xmlns:p="http://schemas.openxmlformats.org/presentationml/2006/main" xmlns:r="http://schemas.openxmlformats.org/officeDocument/2006/relationships">
+  <p:cSld>
+    <p:spTree>
+      <p:nvGrpSpPr>
+        <p:cNvPr id="1" name=""/>
+        <p:cNvGrpSpPr/>
+        <p:nvPr/>
+      </p:nvGrpSpPr>
+      <p:grpSpPr/>
+      <p:sp>
+        <p:nvSpPr>
+          <p:cNvPr id="2" name="Rectangle 1"/>
+          <p:cNvSpPr/>
+          <p:nvPr/>
+        </p:nvSpPr>
+        <p:spPr>
+          <a:xfrm>
+            <a:off x="0" y="0"/>
+            <a:ext cx="12191695" cy="1005840"/>
+          </a:xfrm>
+          <a:prstGeom prst="rect">
+            <a:avLst/>
+          </a:prstGeom>
+          <a:solidFill>
+            <a:srgbClr val="C0392B"/>
+          </a:solidFill>
+          <a:ln>
+            <a:noFill/>
+          </a:ln>
+          <a:effectLst/>
+        </p:spPr>
+        <p:style>
+          <a:lnRef idx="1">
+            <a:schemeClr val="accent1"/>
+          </a:lnRef>
+          <a:fillRef idx="3">
+            <a:schemeClr val="accent1"/>
+          </a:fillRef>
+          <a:effectRef idx="2">
+            <a:schemeClr val="accent1"/>
+          </a:effectRef>
+          <a:fontRef idx="minor">
+            <a:schemeClr val="lt1"/>
+          </a:fontRef>
+        </p:style>
+        <p:txBody>
+          <a:bodyPr rtlCol="0" anchor="ctr"/>
+          <a:lstStyle/>
+          <a:p>
+            <a:pPr algn="ctr"/>
+          </a:p>
+        </p:txBody>
+      </p:sp>
+      <p:sp>
+        <p:nvSpPr>
+          <p:cNvPr id="3" name="TextBox 2"/>
+          <p:cNvSpPr txBox="1"/>
+          <p:nvPr/>
+        </p:nvSpPr>
+        <p:spPr>
+          <a:xfrm>
+            <a:off x="548640" y="91440"/>
+            <a:ext cx="10972800" cy="777240"/>
+          </a:xfrm>
+          <a:prstGeom prst="rect">
+            <a:avLst/>
+          </a:prstGeom>
+          <a:noFill/>
+        </p:spPr>
+        <p:txBody>
+          <a:bodyPr wrap="square">
+            <a:spAutoFit/>
+          </a:bodyPr>
+          <a:lstStyle/>
+          <a:p>
+            <a:pPr algn="l">
+              <a:spcAft>
+                <a:spcPts val="600"/>
+              </a:spcAft>
+            </a:pPr>
+            <a:r>
+              <a:rPr sz="2600" b="1">
+                <a:solidFill>
+                  <a:srgbClr val="FFFFFF"/>
+                </a:solidFill>
+                <a:latin typeface="맑은 고딕"/>
+              </a:rPr>
+              <a:t>운영 시 주의점</a:t>
+            </a:r>
+          </a:p>
+        </p:txBody>
+      </p:sp>
+      <p:sp>
+        <p:nvSpPr>
+          <p:cNvPr id="4" name="TextBox 3"/>
+          <p:cNvSpPr txBox="1"/>
+          <p:nvPr/>
+        </p:nvSpPr>
+        <p:spPr>
+          <a:xfrm>
+            <a:off x="640080" y="1078992"/>
+            <a:ext cx="10881360" cy="457200"/>
+          </a:xfrm>
+          <a:prstGeom prst="rect">
+            <a:avLst/>
+          </a:prstGeom>
+          <a:noFill/>
+        </p:spPr>
+        <p:txBody>
+          <a:bodyPr wrap="square">
+            <a:spAutoFit/>
+          </a:bodyPr>
+          <a:lstStyle/>
+          <a:p>
+            <a:pPr algn="l">
+              <a:spcAft>
+                <a:spcPts val="600"/>
+              </a:spcAft>
+            </a:pPr>
+            <a:r>
+              <a:rPr sz="1500" b="0">
+                <a:solidFill>
+                  <a:srgbClr val="5A6672"/>
+                </a:solidFill>
+                <a:latin typeface="맑은 고딕"/>
+              </a:rPr>
+              <a:t>경보 없이 생기는 문제들</a:t>
+            </a:r>
+          </a:p>
+        </p:txBody>
+      </p:sp>
+      <p:sp>
+        <p:nvSpPr>
+          <p:cNvPr id="5" name="TextBox 4"/>
+          <p:cNvSpPr txBox="1"/>
+          <p:nvPr/>
+        </p:nvSpPr>
+        <p:spPr>
+          <a:xfrm>
+            <a:off x="640080" y="1737360"/>
+            <a:ext cx="10881360" cy="4754880"/>
+          </a:xfrm>
+          <a:prstGeom prst="rect">
+            <a:avLst/>
+          </a:prstGeom>
+          <a:noFill/>
+        </p:spPr>
+        <p:txBody>
+          <a:bodyPr wrap="square">
+            <a:spAutoFit/>
+          </a:bodyPr>
+          <a:lstStyle/>
+          <a:p>
+            <a:pPr algn="l">
+              <a:spcAft>
+                <a:spcPts val="1000"/>
+              </a:spcAft>
+            </a:pPr>
+            <a:r>
+              <a:rPr sz="1700" b="0">
+                <a:solidFill>
+                  <a:srgbClr val="222222"/>
+                </a:solidFill>
+                <a:latin typeface="맑은 고딕"/>
+              </a:rPr>
+              <a:t>•  접속한 노드부터 확인: DB_UNIQUE_NAME, DATABASE_ROLE</a:t>
+            </a:r>
+          </a:p>
+          <a:p>
+            <a:pPr algn="l">
+              <a:spcAft>
+                <a:spcPts val="1000"/>
+              </a:spcAft>
+            </a:pPr>
+            <a:r>
+              <a:rPr sz="1700" b="0">
+                <a:solidFill>
+                  <a:srgbClr val="222222"/>
+                </a:solidFill>
+                <a:latin typeface="맑은 고딕"/>
+              </a:rPr>
+              <a:t>•  상태는 역할·열린 모드·적용 여부의 조합으로</a:t>
+            </a:r>
+          </a:p>
+          <a:p>
+            <a:pPr algn="l">
+              <a:spcAft>
+                <a:spcPts val="1000"/>
+              </a:spcAft>
+            </a:pPr>
+            <a:r>
+              <a:rPr sz="1700" b="0">
+                <a:solidFill>
+                  <a:srgbClr val="222222"/>
+                </a:solidFill>
+                <a:latin typeface="맑은 고딕"/>
+              </a:rPr>
+              <a:t>•  기본 보호 모드(Performance)를 그대로 쓰는지 점검</a:t>
+            </a:r>
+          </a:p>
+          <a:p>
+            <a:pPr algn="l">
+              <a:spcAft>
+                <a:spcPts val="1000"/>
+              </a:spcAft>
+            </a:pPr>
+            <a:r>
+              <a:rPr sz="1700" b="0">
+                <a:solidFill>
+                  <a:srgbClr val="222222"/>
+                </a:solidFill>
+                <a:latin typeface="맑은 고딕"/>
+              </a:rPr>
+              <a:t>•  정기 Switchover 훈련, 아카이브 삭제 정책 확인</a:t>
+            </a:r>
+          </a:p>
+          <a:p>
+            <a:pPr algn="l">
+              <a:spcAft>
+                <a:spcPts val="1000"/>
+              </a:spcAft>
+            </a:pPr>
+            <a:r>
+              <a:rPr sz="1700" b="0">
+                <a:solidFill>
+                  <a:srgbClr val="222222"/>
+                </a:solidFill>
+                <a:latin typeface="맑은 고딕"/>
+              </a:rPr>
+              <a:t>•  감시 기준은 살아 있는가가 아니라 따라오는가</a:t>
+            </a:r>
+          </a:p>
+        </p:txBody>
+      </p:sp>
+    </p:spTree>
+  </p:cSld>
+  <p:clrMapOvr>
+    <a:masterClrMapping/>
+  </p:clrMapOvr>
+</p:sld>
+</file>
+
+<file path=ppt/slides/slide51.xml><?xml version="1.0" encoding="utf-8"?>
+<p:sld xmlns:a="http://schemas.openxmlformats.org/drawingml/2006/main" xmlns:p="http://schemas.openxmlformats.org/presentationml/2006/main" xmlns:r="http://schemas.openxmlformats.org/officeDocument/2006/relationships">
+  <p:cSld>
+    <p:spTree>
+      <p:nvGrpSpPr>
+        <p:cNvPr id="1" name=""/>
+        <p:cNvGrpSpPr/>
+        <p:nvPr/>
+      </p:nvGrpSpPr>
+      <p:grpSpPr/>
+      <p:sp>
+        <p:nvSpPr>
+          <p:cNvPr id="2" name="Rectangle 1"/>
+          <p:cNvSpPr/>
+          <p:nvPr/>
+        </p:nvSpPr>
+        <p:spPr>
+          <a:xfrm>
+            <a:off x="0" y="0"/>
+            <a:ext cx="12191695" cy="1005840"/>
+          </a:xfrm>
+          <a:prstGeom prst="rect">
+            <a:avLst/>
+          </a:prstGeom>
+          <a:solidFill>
+            <a:srgbClr val="C0392B"/>
+          </a:solidFill>
+          <a:ln>
+            <a:noFill/>
+          </a:ln>
+          <a:effectLst/>
+        </p:spPr>
+        <p:style>
+          <a:lnRef idx="1">
+            <a:schemeClr val="accent1"/>
+          </a:lnRef>
+          <a:fillRef idx="3">
+            <a:schemeClr val="accent1"/>
+          </a:fillRef>
+          <a:effectRef idx="2">
+            <a:schemeClr val="accent1"/>
+          </a:effectRef>
+          <a:fontRef idx="minor">
+            <a:schemeClr val="lt1"/>
+          </a:fontRef>
+        </p:style>
+        <p:txBody>
+          <a:bodyPr rtlCol="0" anchor="ctr"/>
+          <a:lstStyle/>
+          <a:p>
+            <a:pPr algn="ctr"/>
+          </a:p>
+        </p:txBody>
+      </p:sp>
+      <p:sp>
+        <p:nvSpPr>
+          <p:cNvPr id="3" name="TextBox 2"/>
+          <p:cNvSpPr txBox="1"/>
+          <p:nvPr/>
+        </p:nvSpPr>
+        <p:spPr>
+          <a:xfrm>
+            <a:off x="548640" y="91440"/>
+            <a:ext cx="10972800" cy="777240"/>
+          </a:xfrm>
+          <a:prstGeom prst="rect">
+            <a:avLst/>
+          </a:prstGeom>
+          <a:noFill/>
+        </p:spPr>
+        <p:txBody>
+          <a:bodyPr wrap="square">
+            <a:spAutoFit/>
+          </a:bodyPr>
+          <a:lstStyle/>
+          <a:p>
+            <a:pPr algn="l">
+              <a:spcAft>
+                <a:spcPts val="600"/>
+              </a:spcAft>
+            </a:pPr>
+            <a:r>
+              <a:rPr sz="2600" b="1">
+                <a:solidFill>
+                  <a:srgbClr val="FFFFFF"/>
+                </a:solidFill>
+                <a:latin typeface="맑은 고딕"/>
+              </a:rPr>
+              <a:t>요약</a:t>
+            </a:r>
+          </a:p>
+        </p:txBody>
+      </p:sp>
+      <p:sp>
+        <p:nvSpPr>
+          <p:cNvPr id="4" name="TextBox 3"/>
+          <p:cNvSpPr txBox="1"/>
+          <p:nvPr/>
+        </p:nvSpPr>
+        <p:spPr>
+          <a:xfrm>
+            <a:off x="640080" y="1371600"/>
+            <a:ext cx="10881360" cy="5120640"/>
+          </a:xfrm>
+          <a:prstGeom prst="rect">
+            <a:avLst/>
+          </a:prstGeom>
+          <a:noFill/>
+        </p:spPr>
+        <p:txBody>
+          <a:bodyPr wrap="square">
+            <a:spAutoFit/>
+          </a:bodyPr>
+          <a:lstStyle/>
+          <a:p>
+            <a:pPr algn="l">
+              <a:spcAft>
+                <a:spcPts val="1000"/>
+              </a:spcAft>
+            </a:pPr>
+            <a:r>
+              <a:rPr sz="1600" b="0">
+                <a:solidFill>
+                  <a:srgbClr val="222222"/>
+                </a:solidFill>
+                <a:latin typeface="맑은 고딕"/>
+              </a:rPr>
+              <a:t>•  구성 = Primary 1 + Standby 최대 30, 리두로 동기화</a:t>
+            </a:r>
+          </a:p>
+          <a:p>
+            <a:pPr algn="l">
+              <a:spcAft>
+                <a:spcPts val="1000"/>
+              </a:spcAft>
+            </a:pPr>
+            <a:r>
+              <a:rPr sz="1600" b="0">
+                <a:solidFill>
+                  <a:srgbClr val="222222"/>
+                </a:solidFill>
+                <a:latin typeface="맑은 고딕"/>
+              </a:rPr>
+              <a:t>•  Physical(블록 동일)·Logical(SQL Apply)·Snapshot(시험용), Far Sync는 중계</a:t>
+            </a:r>
+          </a:p>
+          <a:p>
+            <a:pPr algn="l">
+              <a:spcAft>
+                <a:spcPts val="1000"/>
+              </a:spcAft>
+            </a:pPr>
+            <a:r>
+              <a:rPr sz="1600" b="0">
+                <a:solidFill>
+                  <a:srgbClr val="222222"/>
+                </a:solidFill>
+                <a:latin typeface="맑은 고딕"/>
+              </a:rPr>
+              <a:t>•  전송(LGWR·NSS·TTnn·ARCn)과 적용(RFS·MRP0·LSP)은 분리</a:t>
+            </a:r>
+          </a:p>
+          <a:p>
+            <a:pPr algn="l">
+              <a:spcAft>
+                <a:spcPts val="1000"/>
+              </a:spcAft>
+            </a:pPr>
+            <a:r>
+              <a:rPr sz="1600" b="0">
+                <a:solidFill>
+                  <a:srgbClr val="222222"/>
+                </a:solidFill>
+                <a:latin typeface="맑은 고딕"/>
+              </a:rPr>
+              <a:t>•  갭은 ARCn·FAL로 자동 해소, 기본 보호 모드는 Performance</a:t>
+            </a:r>
+          </a:p>
+          <a:p>
+            <a:pPr algn="l">
+              <a:spcAft>
+                <a:spcPts val="1000"/>
+              </a:spcAft>
+            </a:pPr>
+            <a:r>
+              <a:rPr sz="1600" b="0">
+                <a:solidFill>
+                  <a:srgbClr val="222222"/>
+                </a:solidFill>
+                <a:latin typeface="맑은 고딕"/>
+              </a:rPr>
+              <a:t>•  Switchover는 계획 교대, Failover는 비상 전환, FSFO는 자동</a:t>
+            </a:r>
+          </a:p>
+          <a:p>
+            <a:pPr algn="l">
+              <a:spcAft>
+                <a:spcPts val="1000"/>
+              </a:spcAft>
+            </a:pPr>
+            <a:r>
+              <a:rPr sz="1600" b="0">
+                <a:solidFill>
+                  <a:srgbClr val="222222"/>
+                </a:solidFill>
+                <a:latin typeface="맑은 고딕"/>
+              </a:rPr>
+              <a:t>•  적용 중 조회·Far Sync·DML 리다이렉션은 ADG 옵션</a:t>
+            </a:r>
+          </a:p>
+        </p:txBody>
+      </p:sp>
+    </p:spTree>
+  </p:cSld>
+  <p:clrMapOvr>
+    <a:masterClrMapping/>
+  </p:clrMapOvr>
+</p:sld>
+</file>
+
+<file path=ppt/slides/slide52.xml><?xml version="1.0" encoding="utf-8"?>
+<p:sld xmlns:a="http://schemas.openxmlformats.org/drawingml/2006/main" xmlns:p="http://schemas.openxmlformats.org/presentationml/2006/main" xmlns:r="http://schemas.openxmlformats.org/officeDocument/2006/relationships">
+  <p:cSld>
+    <p:spTree>
+      <p:nvGrpSpPr>
+        <p:cNvPr id="1" name=""/>
+        <p:cNvGrpSpPr/>
+        <p:nvPr/>
+      </p:nvGrpSpPr>
+      <p:grpSpPr/>
+      <p:sp>
+        <p:nvSpPr>
+          <p:cNvPr id="2" name="Rectangle 1"/>
+          <p:cNvSpPr/>
+          <p:nvPr/>
+        </p:nvSpPr>
+        <p:spPr>
+          <a:xfrm>
+            <a:off x="0" y="0"/>
+            <a:ext cx="12191695" cy="1005840"/>
+          </a:xfrm>
+          <a:prstGeom prst="rect">
+            <a:avLst/>
+          </a:prstGeom>
+          <a:solidFill>
+            <a:srgbClr val="C0392B"/>
+          </a:solidFill>
+          <a:ln>
+            <a:noFill/>
+          </a:ln>
+          <a:effectLst/>
+        </p:spPr>
+        <p:style>
+          <a:lnRef idx="1">
+            <a:schemeClr val="accent1"/>
+          </a:lnRef>
+          <a:fillRef idx="3">
+            <a:schemeClr val="accent1"/>
+          </a:fillRef>
+          <a:effectRef idx="2">
+            <a:schemeClr val="accent1"/>
+          </a:effectRef>
+          <a:fontRef idx="minor">
+            <a:schemeClr val="lt1"/>
+          </a:fontRef>
+        </p:style>
+        <p:txBody>
+          <a:bodyPr rtlCol="0" anchor="ctr"/>
+          <a:lstStyle/>
+          <a:p>
+            <a:pPr algn="ctr"/>
+          </a:p>
+        </p:txBody>
+      </p:sp>
+      <p:sp>
+        <p:nvSpPr>
+          <p:cNvPr id="3" name="TextBox 2"/>
+          <p:cNvSpPr txBox="1"/>
+          <p:nvPr/>
+        </p:nvSpPr>
+        <p:spPr>
+          <a:xfrm>
+            <a:off x="548640" y="91440"/>
+            <a:ext cx="10972800" cy="777240"/>
+          </a:xfrm>
+          <a:prstGeom prst="rect">
+            <a:avLst/>
+          </a:prstGeom>
+          <a:noFill/>
+        </p:spPr>
+        <p:txBody>
+          <a:bodyPr wrap="square">
+            <a:spAutoFit/>
+          </a:bodyPr>
+          <a:lstStyle/>
+          <a:p>
+            <a:pPr algn="l">
+              <a:spcAft>
+                <a:spcPts val="600"/>
+              </a:spcAft>
+            </a:pPr>
+            <a:r>
+              <a:rPr sz="2600" b="1">
+                <a:solidFill>
+                  <a:srgbClr val="FFFFFF"/>
+                </a:solidFill>
+                <a:latin typeface="맑은 고딕"/>
+              </a:rPr>
+              <a:t>퀴즈 (1/2)</a:t>
+            </a:r>
+          </a:p>
+        </p:txBody>
+      </p:sp>
+      <p:sp>
+        <p:nvSpPr>
+          <p:cNvPr id="4" name="TextBox 3"/>
+          <p:cNvSpPr txBox="1"/>
+          <p:nvPr/>
+        </p:nvSpPr>
+        <p:spPr>
+          <a:xfrm>
+            <a:off x="640080" y="1371600"/>
+            <a:ext cx="10881360" cy="5120640"/>
+          </a:xfrm>
+          <a:prstGeom prst="rect">
+            <a:avLst/>
+          </a:prstGeom>
+          <a:noFill/>
+        </p:spPr>
+        <p:txBody>
+          <a:bodyPr wrap="square">
+            <a:spAutoFit/>
+          </a:bodyPr>
+          <a:lstStyle/>
+          <a:p>
+            <a:pPr algn="l">
+              <a:spcAft>
+                <a:spcPts val="1000"/>
+              </a:spcAft>
+            </a:pPr>
+            <a:r>
+              <a:rPr sz="1600" b="0">
+                <a:solidFill>
+                  <a:srgbClr val="222222"/>
+                </a:solidFill>
+                <a:latin typeface="맑은 고딕"/>
+              </a:rPr>
+              <a:t>•  Q1. Standby 유형이 아닌 것은? → Primary</a:t>
+            </a:r>
+          </a:p>
+          <a:p>
+            <a:pPr algn="l">
+              <a:spcAft>
+                <a:spcPts val="1000"/>
+              </a:spcAft>
+            </a:pPr>
+            <a:r>
+              <a:rPr sz="1600" b="0">
+                <a:solidFill>
+                  <a:srgbClr val="222222"/>
+                </a:solidFill>
+                <a:latin typeface="맑은 고딕"/>
+              </a:rPr>
+              <a:t>•  Q2. Standby 최대 개수와 근거는? → 30개, LOG_ARCHIVE_DEST_n</a:t>
+            </a:r>
+          </a:p>
+          <a:p>
+            <a:pPr algn="l">
+              <a:spcAft>
+                <a:spcPts val="1000"/>
+              </a:spcAft>
+            </a:pPr>
+            <a:r>
+              <a:rPr sz="1600" b="0">
+                <a:solidFill>
+                  <a:srgbClr val="222222"/>
+                </a:solidFill>
+                <a:latin typeface="맑은 고딕"/>
+              </a:rPr>
+              <a:t>•  Q3. Snapshot Standby는 리두를 받지 않는다? → 틀림, 받아서 보관</a:t>
+            </a:r>
+          </a:p>
+        </p:txBody>
+      </p:sp>
+    </p:spTree>
+  </p:cSld>
+  <p:clrMapOvr>
+    <a:masterClrMapping/>
+  </p:clrMapOvr>
+</p:sld>
+</file>
+
+<file path=ppt/slides/slide53.xml><?xml version="1.0" encoding="utf-8"?>
+<p:sld xmlns:a="http://schemas.openxmlformats.org/drawingml/2006/main" xmlns:p="http://schemas.openxmlformats.org/presentationml/2006/main" xmlns:r="http://schemas.openxmlformats.org/officeDocument/2006/relationships">
+  <p:cSld>
+    <p:spTree>
+      <p:nvGrpSpPr>
+        <p:cNvPr id="1" name=""/>
+        <p:cNvGrpSpPr/>
+        <p:nvPr/>
+      </p:nvGrpSpPr>
+      <p:grpSpPr/>
+      <p:sp>
+        <p:nvSpPr>
+          <p:cNvPr id="2" name="Rectangle 1"/>
+          <p:cNvSpPr/>
+          <p:nvPr/>
+        </p:nvSpPr>
+        <p:spPr>
+          <a:xfrm>
+            <a:off x="0" y="0"/>
+            <a:ext cx="12191695" cy="1005840"/>
+          </a:xfrm>
+          <a:prstGeom prst="rect">
+            <a:avLst/>
+          </a:prstGeom>
+          <a:solidFill>
+            <a:srgbClr val="C0392B"/>
+          </a:solidFill>
+          <a:ln>
+            <a:noFill/>
+          </a:ln>
+          <a:effectLst/>
+        </p:spPr>
+        <p:style>
+          <a:lnRef idx="1">
+            <a:schemeClr val="accent1"/>
+          </a:lnRef>
+          <a:fillRef idx="3">
+            <a:schemeClr val="accent1"/>
+          </a:fillRef>
+          <a:effectRef idx="2">
+            <a:schemeClr val="accent1"/>
+          </a:effectRef>
+          <a:fontRef idx="minor">
+            <a:schemeClr val="lt1"/>
+          </a:fontRef>
+        </p:style>
+        <p:txBody>
+          <a:bodyPr rtlCol="0" anchor="ctr"/>
+          <a:lstStyle/>
+          <a:p>
+            <a:pPr algn="ctr"/>
+          </a:p>
+        </p:txBody>
+      </p:sp>
+      <p:sp>
+        <p:nvSpPr>
+          <p:cNvPr id="3" name="TextBox 2"/>
+          <p:cNvSpPr txBox="1"/>
+          <p:nvPr/>
+        </p:nvSpPr>
+        <p:spPr>
+          <a:xfrm>
+            <a:off x="548640" y="91440"/>
+            <a:ext cx="10972800" cy="777240"/>
+          </a:xfrm>
+          <a:prstGeom prst="rect">
+            <a:avLst/>
+          </a:prstGeom>
+          <a:noFill/>
+        </p:spPr>
+        <p:txBody>
+          <a:bodyPr wrap="square">
+            <a:spAutoFit/>
+          </a:bodyPr>
+          <a:lstStyle/>
+          <a:p>
+            <a:pPr algn="l">
+              <a:spcAft>
+                <a:spcPts val="600"/>
+              </a:spcAft>
+            </a:pPr>
+            <a:r>
+              <a:rPr sz="2600" b="1">
+                <a:solidFill>
+                  <a:srgbClr val="FFFFFF"/>
+                </a:solidFill>
+                <a:latin typeface="맑은 고딕"/>
+              </a:rPr>
+              <a:t>퀴즈 (2/2)</a:t>
+            </a:r>
+          </a:p>
+        </p:txBody>
+      </p:sp>
+      <p:sp>
+        <p:nvSpPr>
+          <p:cNvPr id="4" name="TextBox 3"/>
+          <p:cNvSpPr txBox="1"/>
+          <p:nvPr/>
+        </p:nvSpPr>
+        <p:spPr>
+          <a:xfrm>
+            <a:off x="640080" y="1371600"/>
+            <a:ext cx="10881360" cy="5120640"/>
+          </a:xfrm>
+          <a:prstGeom prst="rect">
+            <a:avLst/>
+          </a:prstGeom>
+          <a:noFill/>
+        </p:spPr>
+        <p:txBody>
+          <a:bodyPr wrap="square">
+            <a:spAutoFit/>
+          </a:bodyPr>
+          <a:lstStyle/>
+          <a:p>
+            <a:pPr algn="l">
+              <a:spcAft>
+                <a:spcPts val="1000"/>
+              </a:spcAft>
+            </a:pPr>
+            <a:r>
+              <a:rPr sz="1600" b="0">
+                <a:solidFill>
+                  <a:srgbClr val="222222"/>
+                </a:solidFill>
+                <a:latin typeface="맑은 고딕"/>
+              </a:rPr>
+              <a:t>•  Q4. ASYNC 목적지로 보내는 프로세스는? → TTnn</a:t>
+            </a:r>
+          </a:p>
+          <a:p>
+            <a:pPr algn="l">
+              <a:spcAft>
+                <a:spcPts val="1000"/>
+              </a:spcAft>
+            </a:pPr>
+            <a:r>
+              <a:rPr sz="1600" b="0">
+                <a:solidFill>
+                  <a:srgbClr val="222222"/>
+                </a:solidFill>
+                <a:latin typeface="맑은 고딕"/>
+              </a:rPr>
+              <a:t>•  Q5. 스토리지 고장 시 전환과 원래 Primary 처리는? → Failover, reinstate</a:t>
+            </a:r>
+          </a:p>
+          <a:p>
+            <a:pPr algn="l">
+              <a:spcAft>
+                <a:spcPts val="1000"/>
+              </a:spcAft>
+            </a:pPr>
+            <a:r>
+              <a:rPr sz="1600" b="0">
+                <a:solidFill>
+                  <a:srgbClr val="222222"/>
+                </a:solidFill>
+                <a:latin typeface="맑은 고딕"/>
+              </a:rPr>
+              <a:t>•  Q6. 옵션 없이 허용되는 운영은? → 적용 중지 후 READ ONLY 조회</a:t>
+            </a:r>
+          </a:p>
+        </p:txBody>
+      </p:sp>
+    </p:spTree>
+  </p:cSld>
+  <p:clrMapOvr>
+    <a:masterClrMapping/>
+  </p:clrMapOvr>
+</p:sld>
+</file>
+
+<file path=ppt/slides/slide54.xml><?xml version="1.0" encoding="utf-8"?>
+<p:sld xmlns:a="http://schemas.openxmlformats.org/drawingml/2006/main" xmlns:p="http://schemas.openxmlformats.org/presentationml/2006/main" xmlns:r="http://schemas.openxmlformats.org/officeDocument/2006/relationships">
+  <p:cSld>
+    <p:spTree>
+      <p:nvGrpSpPr>
+        <p:cNvPr id="1" name=""/>
+        <p:cNvGrpSpPr/>
+        <p:nvPr/>
+      </p:nvGrpSpPr>
+      <p:grpSpPr/>
+      <p:sp>
+        <p:nvSpPr>
+          <p:cNvPr id="2" name="Rectangle 1"/>
+          <p:cNvSpPr/>
+          <p:nvPr/>
+        </p:nvSpPr>
+        <p:spPr>
+          <a:xfrm>
+            <a:off x="0" y="0"/>
+            <a:ext cx="12191695" cy="1005840"/>
+          </a:xfrm>
+          <a:prstGeom prst="rect">
+            <a:avLst/>
+          </a:prstGeom>
+          <a:solidFill>
+            <a:srgbClr val="C0392B"/>
+          </a:solidFill>
+          <a:ln>
+            <a:noFill/>
+          </a:ln>
+          <a:effectLst/>
+        </p:spPr>
+        <p:style>
+          <a:lnRef idx="1">
+            <a:schemeClr val="accent1"/>
+          </a:lnRef>
+          <a:fillRef idx="3">
+            <a:schemeClr val="accent1"/>
+          </a:fillRef>
+          <a:effectRef idx="2">
+            <a:schemeClr val="accent1"/>
+          </a:effectRef>
+          <a:fontRef idx="minor">
+            <a:schemeClr val="lt1"/>
+          </a:fontRef>
+        </p:style>
+        <p:txBody>
+          <a:bodyPr rtlCol="0" anchor="ctr"/>
+          <a:lstStyle/>
+          <a:p>
+            <a:pPr algn="ctr"/>
+          </a:p>
+        </p:txBody>
+      </p:sp>
+      <p:sp>
+        <p:nvSpPr>
+          <p:cNvPr id="3" name="TextBox 2"/>
+          <p:cNvSpPr txBox="1"/>
+          <p:nvPr/>
+        </p:nvSpPr>
+        <p:spPr>
+          <a:xfrm>
+            <a:off x="548640" y="91440"/>
+            <a:ext cx="10972800" cy="777240"/>
+          </a:xfrm>
+          <a:prstGeom prst="rect">
+            <a:avLst/>
+          </a:prstGeom>
+          <a:noFill/>
+        </p:spPr>
+        <p:txBody>
+          <a:bodyPr wrap="square">
+            <a:spAutoFit/>
+          </a:bodyPr>
+          <a:lstStyle/>
+          <a:p>
+            <a:pPr algn="l">
+              <a:spcAft>
+                <a:spcPts val="600"/>
+              </a:spcAft>
+            </a:pPr>
+            <a:r>
+              <a:rPr sz="2600" b="1">
+                <a:solidFill>
+                  <a:srgbClr val="FFFFFF"/>
+                </a:solidFill>
+                <a:latin typeface="맑은 고딕"/>
+              </a:rPr>
+              <a:t>실습 개요</a:t>
+            </a:r>
+          </a:p>
+        </p:txBody>
+      </p:sp>
+      <p:sp>
+        <p:nvSpPr>
+          <p:cNvPr id="4" name="TextBox 3"/>
+          <p:cNvSpPr txBox="1"/>
+          <p:nvPr/>
+        </p:nvSpPr>
+        <p:spPr>
+          <a:xfrm>
+            <a:off x="640080" y="1371600"/>
+            <a:ext cx="10881360" cy="5120640"/>
+          </a:xfrm>
+          <a:prstGeom prst="rect">
+            <a:avLst/>
+          </a:prstGeom>
+          <a:noFill/>
+        </p:spPr>
+        <p:txBody>
+          <a:bodyPr wrap="square">
+            <a:spAutoFit/>
+          </a:bodyPr>
+          <a:lstStyle/>
+          <a:p>
+            <a:pPr algn="l">
+              <a:spcAft>
+                <a:spcPts val="1000"/>
+              </a:spcAft>
+            </a:pPr>
+            <a:r>
+              <a:rPr sz="1600" b="0">
+                <a:solidFill>
+                  <a:srgbClr val="222222"/>
+                </a:solidFill>
+                <a:latin typeface="맑은 고딕"/>
+              </a:rPr>
+              <a:t>•  01 현재 구성 파악: 이름·역할·열린 모드 (1.3)</a:t>
+            </a:r>
+          </a:p>
+          <a:p>
+            <a:pPr algn="l">
+              <a:spcAft>
+                <a:spcPts val="1000"/>
+              </a:spcAft>
+            </a:pPr>
+            <a:r>
+              <a:rPr sz="1600" b="0">
+                <a:solidFill>
+                  <a:srgbClr val="222222"/>
+                </a:solidFill>
+                <a:latin typeface="맑은 고딕"/>
+              </a:rPr>
+              <a:t>•  02 Data Guard 프로세스 식별: V$DATAGUARD_PROCESS (1.4)</a:t>
+            </a:r>
+          </a:p>
+          <a:p>
+            <a:pPr algn="l">
+              <a:spcAft>
+                <a:spcPts val="1000"/>
+              </a:spcAft>
+            </a:pPr>
+            <a:r>
+              <a:rPr sz="1600" b="0">
+                <a:solidFill>
+                  <a:srgbClr val="222222"/>
+                </a:solidFill>
+                <a:latin typeface="맑은 고딕"/>
+              </a:rPr>
+              <a:t>•  03 라이선스 확인: 에디션, 사용 이력, OPEN_MODE (1.7)</a:t>
+            </a:r>
+          </a:p>
+          <a:p>
+            <a:pPr algn="l">
+              <a:spcAft>
+                <a:spcPts val="1000"/>
+              </a:spcAft>
+            </a:pPr>
+            <a:r>
+              <a:rPr sz="1600" b="0">
+                <a:solidFill>
+                  <a:srgbClr val="222222"/>
+                </a:solidFill>
+                <a:latin typeface="맑은 고딕"/>
+              </a:rPr>
+              <a:t>•  04 Standby 유형별 상태 확인: Snapshot 전환과 복귀 (1.3)</a:t>
+            </a:r>
+          </a:p>
+          <a:p>
+            <a:pPr algn="l">
+              <a:spcAft>
+                <a:spcPts val="1000"/>
+              </a:spcAft>
+            </a:pPr>
+            <a:r>
+              <a:rPr sz="1600" b="0">
+                <a:solidFill>
+                  <a:srgbClr val="222222"/>
+                </a:solidFill>
+                <a:latin typeface="맑은 고딕"/>
+              </a:rPr>
+              <a:t>•  05 구성 전 점검표: 릴리스·플랫폼·문자셋·파라미터 (1.8)</a:t>
             </a:r>
           </a:p>
         </p:txBody>
@@ -14655,7 +18300,7 @@
                 </a:solidFill>
                 <a:latin typeface="맑은 고딕"/>
               </a:rPr>
-              <a:t>Primary와 Standby</a:t>
+              <a:t>RPO와 RTO</a:t>
             </a:r>
           </a:p>
         </p:txBody>
@@ -14694,7 +18339,7 @@
                 </a:solidFill>
                 <a:latin typeface="맑은 고딕"/>
               </a:rPr>
-              <a:t>이름과 개수의 규칙</a:t>
+              <a:t>얼마나 잃어도 되고, 얼마나 멈춰도 되는가</a:t>
             </a:r>
           </a:p>
         </p:txBody>
@@ -14733,7 +18378,7 @@
                 </a:solidFill>
                 <a:latin typeface="맑은 고딕"/>
               </a:rPr>
-              <a:t>•  운영 DB = Primary database / 동기화된 복제본 = Standby database</a:t>
+              <a:t>•  RPO: 잃어도 되는 데이터의 양(시간)</a:t>
             </a:r>
           </a:p>
           <a:p>
@@ -14749,7 +18394,7 @@
                 </a:solidFill>
                 <a:latin typeface="맑은 고딕"/>
               </a:rPr>
-              <a:t>•  하나의 Primary에 최대 30개의 Standby</a:t>
+              <a:t>•  RTO: 서비스가 돌아오기까지 허용 시간</a:t>
             </a:r>
           </a:p>
           <a:p>
@@ -14765,7 +18410,7 @@
                 </a:solidFill>
                 <a:latin typeface="맑은 고딕"/>
               </a:rPr>
-              <a:t>•  한계의 출처: LOG_ARCHIVE_DEST_n 목적지 31개 중 하나는 로컬 아카이브가 사용</a:t>
+              <a:t>•  백업 복원: RPO는 작게, RTO는 수 시간</a:t>
             </a:r>
           </a:p>
           <a:p>
@@ -14781,7 +18426,23 @@
                 </a:solidFill>
                 <a:latin typeface="맑은 고딕"/>
               </a:rPr>
-              <a:t>•  Primary와 Standby들을 통틀어 "Data Guard 구성(configuration)"이라 부른다</a:t>
+              <a:t>•  Data Guard: RTO 분 단위, RPO는 보호 모드가 결정</a:t>
+            </a:r>
+          </a:p>
+          <a:p>
+            <a:pPr algn="l">
+              <a:spcAft>
+                <a:spcPts val="1000"/>
+              </a:spcAft>
+            </a:pPr>
+            <a:r>
+              <a:rPr sz="1700" b="0">
+                <a:solidFill>
+                  <a:srgbClr val="222222"/>
+                </a:solidFill>
+                <a:latin typeface="맑은 고딕"/>
+              </a:rPr>
+              <a:t>•  숫자를 먼저 합의해야 구성을 고를 수 있다</a:t>
             </a:r>
           </a:p>
         </p:txBody>
@@ -14882,7 +18543,7 @@
                 </a:solidFill>
                 <a:latin typeface="맑은 고딕"/>
               </a:rPr>
-              <a:t>실습 환경 구성 확인 — V$DATABASE</a:t>
+              <a:t>Data Guard의 정의와 도입 효과</a:t>
             </a:r>
           </a:p>
         </p:txBody>
@@ -14921,7 +18582,7 @@
                 </a:solidFill>
                 <a:latin typeface="맑은 고딕"/>
               </a:rPr>
-              <a:t>같은 조회, 다른 결과</a:t>
+              <a:t>이미 있는 리두로 사본을 유지한다</a:t>
             </a:r>
           </a:p>
         </p:txBody>
@@ -14960,7 +18621,7 @@
                 </a:solidFill>
                 <a:latin typeface="맑은 고딕"/>
               </a:rPr>
-              <a:t>•  chicago: PRIMARY / READ WRITE / MAXIMUM PERFORMANCE</a:t>
+              <a:t>•  Primary와 Standby 구성을 생성·관리·감시하는 기반</a:t>
             </a:r>
           </a:p>
           <a:p>
@@ -14976,7 +18637,7 @@
                 </a:solidFill>
                 <a:latin typeface="맑은 고딕"/>
               </a:rPr>
-              <a:t>•  boston: PHYSICAL STANDBY / READ ONLY WITH APPLY / MAXIMUM PERFORMANCE</a:t>
+              <a:t>•  별도 복제 엔진 없이 Primary의 리두를 그대로 사용</a:t>
             </a:r>
           </a:p>
           <a:p>
@@ -14992,7 +18653,7 @@
                 </a:solidFill>
                 <a:latin typeface="맑은 고딕"/>
               </a:rPr>
-              <a:t>•  NAME은 양쪽 모두 CHICAGO — DB_NAME은 물리 복제본이므로 같다</a:t>
+              <a:t>•  서비스 연속성과 손실 없는 데이터 보호</a:t>
             </a:r>
           </a:p>
           <a:p>
@@ -15008,7 +18669,23 @@
                 </a:solidFill>
                 <a:latin typeface="맑은 고딕"/>
               </a:rPr>
-              <a:t>•  DB_UNIQUE_NAME만 chicago / boston으로 다르다 — 둘을 구별하는 유일한 이름</a:t>
+              <a:t>•  대기 서버를 조회·백업에 활용</a:t>
+            </a:r>
+          </a:p>
+          <a:p>
+            <a:pPr algn="l">
+              <a:spcAft>
+                <a:spcPts val="1000"/>
+              </a:spcAft>
+            </a:pPr>
+            <a:r>
+              <a:rPr sz="1700" b="0">
+                <a:solidFill>
+                  <a:srgbClr val="222222"/>
+                </a:solidFill>
+                <a:latin typeface="맑은 고딕"/>
+              </a:rPr>
+              <a:t>•  속성별 유연한 구성, Broker·EM으로 중앙 관리</a:t>
             </a:r>
           </a:p>
         </p:txBody>
@@ -15109,7 +18786,7 @@
                 </a:solidFill>
                 <a:latin typeface="맑은 고딕"/>
               </a:rPr>
-              <a:t>DBID가 같다는 것의 의미</a:t>
+              <a:t>전형적인 배치 형태</a:t>
             </a:r>
           </a:p>
         </p:txBody>
@@ -15148,7 +18825,7 @@
                 </a:solidFill>
                 <a:latin typeface="맑은 고딕"/>
               </a:rPr>
-              <a:t>BR 17장과 갈리는 지점</a:t>
+              <a:t>어떤 장애에 대비하느냐에 따라 위치가 달라진다</a:t>
             </a:r>
           </a:p>
         </p:txBody>
@@ -15187,7 +18864,7 @@
                 </a:solidFill>
                 <a:latin typeface="맑은 고딕"/>
               </a:rPr>
-              <a:t>•  실측: 양쪽 DBID가 모두 1852041610으로 동일</a:t>
+              <a:t>•  로컬 Standby: 서버·스토리지 장애, SYNC 전송이 쉬움</a:t>
             </a:r>
           </a:p>
           <a:p>
@@ -15203,7 +18880,7 @@
                 </a:solidFill>
                 <a:latin typeface="맑은 고딕"/>
               </a:rPr>
-              <a:t>•  DUPLICATE TARGET DATABASE TO &lt;새이름&gt; → 새 DBID, 원본과 관계 단절, 결과는 OPEN</a:t>
+              <a:t>•  원격 Standby: 사이트 재해, 대개 ASYNC</a:t>
             </a:r>
           </a:p>
           <a:p>
@@ -15219,7 +18896,7 @@
                 </a:solidFill>
                 <a:latin typeface="맑은 고딕"/>
               </a:rPr>
-              <a:t>•  DUPLICATE ... FOR STANDBY → 원본 DBID 유지, 리두로 계속 연결, 결과는 MOUNT+Redo Apply</a:t>
+              <a:t>•  로컬 + 원격: 두 종류 장애를 모두 대비</a:t>
             </a:r>
           </a:p>
           <a:p>
@@ -15235,7 +18912,23 @@
                 </a:solidFill>
                 <a:latin typeface="맑은 고딕"/>
               </a:rPr>
-              <a:t>•  CONTROLFILE_TYPE도 CURRENT / STANDBY로 갈린다</a:t>
+              <a:t>•  Far Sync + 원격: 원거리에서도 손실 없는 전환</a:t>
+            </a:r>
+          </a:p>
+          <a:p>
+            <a:pPr algn="l">
+              <a:spcAft>
+                <a:spcPts val="1000"/>
+              </a:spcAft>
+            </a:pPr>
+            <a:r>
+              <a:rPr sz="1700" b="0">
+                <a:solidFill>
+                  <a:srgbClr val="222222"/>
+                </a:solidFill>
+                <a:latin typeface="맑은 고딕"/>
+              </a:rPr>
+              <a:t>•  위치는 RPO, RTO, 왕복 지연을 함께 놓고 결정</a:t>
             </a:r>
           </a:p>
         </p:txBody>
@@ -15267,7 +18960,7 @@
         <p:spPr>
           <a:xfrm>
             <a:off x="0" y="0"/>
-            <a:ext cx="12191695" cy="6858000"/>
+            <a:ext cx="12191695" cy="1005840"/>
           </a:xfrm>
           <a:prstGeom prst="rect">
             <a:avLst/>
@@ -15310,8 +19003,8 @@
         </p:nvSpPr>
         <p:spPr>
           <a:xfrm>
-            <a:off x="822960" y="2011680"/>
-            <a:ext cx="10515600" cy="1097280"/>
+            <a:off x="548640" y="91440"/>
+            <a:ext cx="10972800" cy="777240"/>
           </a:xfrm>
           <a:prstGeom prst="rect">
             <a:avLst/>
@@ -15330,13 +19023,13 @@
               </a:spcAft>
             </a:pPr>
             <a:r>
-              <a:rPr sz="4000" b="1">
+              <a:rPr sz="2600" b="1">
                 <a:solidFill>
                   <a:srgbClr val="FFFFFF"/>
                 </a:solidFill>
                 <a:latin typeface="맑은 고딕"/>
               </a:rPr>
-              <a:t>1.3</a:t>
+              <a:t>Data Guard가 막지 못하는 것</a:t>
             </a:r>
           </a:p>
         </p:txBody>
@@ -15349,8 +19042,8 @@
         </p:nvSpPr>
         <p:spPr>
           <a:xfrm>
-            <a:off x="822960" y="3017520"/>
-            <a:ext cx="10515600" cy="914400"/>
+            <a:off x="640080" y="1078992"/>
+            <a:ext cx="10881360" cy="457200"/>
           </a:xfrm>
           <a:prstGeom prst="rect">
             <a:avLst/>
@@ -15369,71 +19062,27 @@
               </a:spcAft>
             </a:pPr>
             <a:r>
-              <a:rPr sz="2800" b="1">
-                <a:solidFill>
-                  <a:srgbClr val="FFFFFF"/>
-                </a:solidFill>
-                <a:latin typeface="맑은 고딕"/>
-              </a:rPr>
-              <a:t>Standby 데이터베이스의 세 유형</a:t>
-            </a:r>
-          </a:p>
-        </p:txBody>
-      </p:sp>
-      <p:sp>
-        <p:nvSpPr>
-          <p:cNvPr id="5" name="Rectangle 4"/>
-          <p:cNvSpPr/>
-          <p:nvPr/>
-        </p:nvSpPr>
-        <p:spPr>
-          <a:xfrm>
-            <a:off x="822960" y="4114800"/>
-            <a:ext cx="5486400" cy="54864"/>
-          </a:xfrm>
-          <a:prstGeom prst="rect">
-            <a:avLst/>
-          </a:prstGeom>
-          <a:solidFill>
-            <a:srgbClr val="FFFFFF"/>
-          </a:solidFill>
-          <a:ln>
-            <a:noFill/>
-          </a:ln>
-          <a:effectLst/>
-        </p:spPr>
-        <p:style>
-          <a:lnRef idx="1">
-            <a:schemeClr val="accent1"/>
-          </a:lnRef>
-          <a:fillRef idx="3">
-            <a:schemeClr val="accent1"/>
-          </a:fillRef>
-          <a:effectRef idx="2">
-            <a:schemeClr val="accent1"/>
-          </a:effectRef>
-          <a:fontRef idx="minor">
-            <a:schemeClr val="lt1"/>
-          </a:fontRef>
-        </p:style>
-        <p:txBody>
-          <a:bodyPr rtlCol="0" anchor="ctr"/>
-          <a:lstStyle/>
-          <a:p>
-            <a:pPr algn="ctr"/>
-          </a:p>
-        </p:txBody>
-      </p:sp>
-      <p:sp>
-        <p:nvSpPr>
-          <p:cNvPr id="6" name="TextBox 5"/>
+              <a:rPr sz="1500" b="0">
+                <a:solidFill>
+                  <a:srgbClr val="5A6672"/>
+                </a:solidFill>
+                <a:latin typeface="맑은 고딕"/>
+              </a:rPr>
+              <a:t>정상 커밋된 실수는 그대로 복제된다</a:t>
+            </a:r>
+          </a:p>
+        </p:txBody>
+      </p:sp>
+      <p:sp>
+        <p:nvSpPr>
+          <p:cNvPr id="5" name="TextBox 4"/>
           <p:cNvSpPr txBox="1"/>
           <p:nvPr/>
         </p:nvSpPr>
         <p:spPr>
           <a:xfrm>
-            <a:off x="822960" y="4297680"/>
-            <a:ext cx="10058400" cy="2011680"/>
+            <a:off x="640080" y="1737360"/>
+            <a:ext cx="10881360" cy="4754880"/>
           </a:xfrm>
           <a:prstGeom prst="rect">
             <a:avLst/>
@@ -15448,49 +19097,81 @@
           <a:p>
             <a:pPr algn="l">
               <a:spcAft>
-                <a:spcPts val="800"/>
-              </a:spcAft>
-            </a:pPr>
-            <a:r>
-              <a:rPr sz="1600" b="0">
-                <a:solidFill>
-                  <a:srgbClr val="FFFFFF"/>
-                </a:solidFill>
-                <a:latin typeface="맑은 고딕"/>
-              </a:rPr>
-              <a:t>•  기준은 "리두를 어떻게 소화하는가"</a:t>
-            </a:r>
-          </a:p>
-          <a:p>
-            <a:pPr algn="l">
-              <a:spcAft>
-                <a:spcPts val="800"/>
-              </a:spcAft>
-            </a:pPr>
-            <a:r>
-              <a:rPr sz="1600" b="0">
-                <a:solidFill>
-                  <a:srgbClr val="FFFFFF"/>
-                </a:solidFill>
-                <a:latin typeface="맑은 고딕"/>
-              </a:rPr>
-              <a:t>•  physical · logical · snapshot</a:t>
-            </a:r>
-          </a:p>
-          <a:p>
-            <a:pPr algn="l">
-              <a:spcAft>
-                <a:spcPts val="800"/>
-              </a:spcAft>
-            </a:pPr>
-            <a:r>
-              <a:rPr sz="1600" b="0">
-                <a:solidFill>
-                  <a:srgbClr val="FFFFFF"/>
-                </a:solidFill>
-                <a:latin typeface="맑은 고딕"/>
-              </a:rPr>
-              <a:t>•  ROLE과 OPEN_MODE 조합으로 판별한다</a:t>
+                <a:spcPts val="1000"/>
+              </a:spcAft>
+            </a:pPr>
+            <a:r>
+              <a:rPr sz="1700" b="0">
+                <a:solidFill>
+                  <a:srgbClr val="222222"/>
+                </a:solidFill>
+                <a:latin typeface="맑은 고딕"/>
+              </a:rPr>
+              <a:t>•  잘못된 UPDATE, TRUNCATE도 정상 리두</a:t>
+            </a:r>
+          </a:p>
+          <a:p>
+            <a:pPr algn="l">
+              <a:spcAft>
+                <a:spcPts val="1000"/>
+              </a:spcAft>
+            </a:pPr>
+            <a:r>
+              <a:rPr sz="1700" b="0">
+                <a:solidFill>
+                  <a:srgbClr val="222222"/>
+                </a:solidFill>
+                <a:latin typeface="맑은 고딕"/>
+              </a:rPr>
+              <a:t>•  Standby에 수 초 안에 그대로 적용</a:t>
+            </a:r>
+          </a:p>
+          <a:p>
+            <a:pPr algn="l">
+              <a:spcAft>
+                <a:spcPts val="1000"/>
+              </a:spcAft>
+            </a:pPr>
+            <a:r>
+              <a:rPr sz="1700" b="0">
+                <a:solidFill>
+                  <a:srgbClr val="222222"/>
+                </a:solidFill>
+                <a:latin typeface="맑은 고딕"/>
+              </a:rPr>
+              <a:t>•  대비책 ①: Standby 하나에 지연 적용(DELAY)</a:t>
+            </a:r>
+          </a:p>
+          <a:p>
+            <a:pPr algn="l">
+              <a:spcAft>
+                <a:spcPts val="1000"/>
+              </a:spcAft>
+            </a:pPr>
+            <a:r>
+              <a:rPr sz="1700" b="0">
+                <a:solidFill>
+                  <a:srgbClr val="222222"/>
+                </a:solidFill>
+                <a:latin typeface="맑은 고딕"/>
+              </a:rPr>
+              <a:t>•  대비책 ②: 양쪽에 Flashback Database</a:t>
+            </a:r>
+          </a:p>
+          <a:p>
+            <a:pPr algn="l">
+              <a:spcAft>
+                <a:spcPts val="1000"/>
+              </a:spcAft>
+            </a:pPr>
+            <a:r>
+              <a:rPr sz="1700" b="0">
+                <a:solidFill>
+                  <a:srgbClr val="222222"/>
+                </a:solidFill>
+                <a:latin typeface="맑은 고딕"/>
+              </a:rPr>
+              <a:t>•  백업 정책은 Data Guard 도입 뒤에도 유지</a:t>
             </a:r>
           </a:p>
         </p:txBody>
